--- a/docs/hanasaku_service_overview.pptx
+++ b/docs/hanasaku_service_overview.pptx
@@ -3093,7 +3093,7 @@
     <p:bg>
       <p:bgPr>
         <a:solidFill>
-          <a:srgbClr val="FFFFFF"/>
+          <a:srgbClr val="5A2030"/>
         </a:solidFill>
         <a:effectLst/>
       </p:bgPr>
@@ -3107,20 +3107,285 @@
       <p:grpSpPr/>
       <p:sp>
         <p:nvSpPr>
-          <p:cNvPr id="2" name="Rectangle 1"/>
-          <p:cNvSpPr/>
+          <p:cNvPr id="2" name="TextBox 1"/>
+          <p:cNvSpPr txBox="1"/>
+          <p:nvPr/>
+        </p:nvSpPr>
+        <p:spPr>
+          <a:xfrm>
+            <a:off x="731520" y="1371600"/>
+            <a:ext cx="7680960" cy="1828800"/>
+          </a:xfrm>
+          <a:prstGeom prst="rect">
+            <a:avLst/>
+          </a:prstGeom>
+          <a:noFill/>
+        </p:spPr>
+        <p:txBody>
+          <a:bodyPr wrap="square">
+            <a:spAutoFit/>
+          </a:bodyPr>
+          <a:lstStyle/>
+          <a:p>
+            <a:pPr algn="l">
+              <a:defRPr sz="3200" b="1">
+                <a:solidFill>
+                  <a:srgbClr val="FFFFFF"/>
+                </a:solidFill>
+              </a:defRPr>
+            </a:pPr>
+            <a:r>
+              <a:t>ハナサク</a:t>
+            </a:r>
+            <a:br/>
+            <a:r>
+              <a:t>サービス紹介資料</a:t>
+            </a:r>
+          </a:p>
+          <a:p>
+            <a:pPr algn="l">
+              <a:defRPr sz="1600">
+                <a:solidFill>
+                  <a:srgbClr val="E8A0A8"/>
+                </a:solidFill>
+              </a:defRPr>
+            </a:pPr>
+            <a:r>
+              <a:t>福井の女の子が、自分の言葉で未来を語れるようになる就活伴走サービス</a:t>
+            </a:r>
+            <a:br/>
+            <a:br/>
+            <a:r>
+              <a:t>西川 舞衣子（EMKO）</a:t>
+            </a:r>
+          </a:p>
+        </p:txBody>
+      </p:sp>
+    </p:spTree>
+  </p:cSld>
+  <p:clrMapOvr>
+    <a:masterClrMapping/>
+  </p:clrMapOvr>
+</p:sld>
+</file>
+
+<file path=ppt/slides/slide10.xml><?xml version="1.0" encoding="utf-8"?>
+<p:sld xmlns:a="http://schemas.openxmlformats.org/drawingml/2006/main" xmlns:p="http://schemas.openxmlformats.org/presentationml/2006/main" xmlns:r="http://schemas.openxmlformats.org/officeDocument/2006/relationships">
+  <p:cSld>
+    <p:bg>
+      <p:bgPr>
+        <a:solidFill>
+          <a:srgbClr val="7A3045"/>
+        </a:solidFill>
+        <a:effectLst/>
+      </p:bgPr>
+    </p:bg>
+    <p:spTree>
+      <p:nvGrpSpPr>
+        <p:cNvPr id="1" name=""/>
+        <p:cNvGrpSpPr/>
+        <p:nvPr/>
+      </p:nvGrpSpPr>
+      <p:grpSpPr/>
+      <p:sp>
+        <p:nvSpPr>
+          <p:cNvPr id="2" name="TextBox 1"/>
+          <p:cNvSpPr txBox="1"/>
+          <p:nvPr/>
+        </p:nvSpPr>
+        <p:spPr>
+          <a:xfrm>
+            <a:off x="731520" y="2286000"/>
+            <a:ext cx="7680960" cy="1371600"/>
+          </a:xfrm>
+          <a:prstGeom prst="rect">
+            <a:avLst/>
+          </a:prstGeom>
+          <a:noFill/>
+        </p:spPr>
+        <p:txBody>
+          <a:bodyPr wrap="none">
+            <a:spAutoFit/>
+          </a:bodyPr>
+          <a:lstStyle/>
+          <a:p>
+            <a:pPr algn="ctr">
+              <a:defRPr sz="2800" b="1">
+                <a:solidFill>
+                  <a:srgbClr val="FFFFFF"/>
+                </a:solidFill>
+              </a:defRPr>
+            </a:pPr>
+            <a:r>
+              <a:t>まずは無料で相談してみませんか？</a:t>
+            </a:r>
+          </a:p>
+        </p:txBody>
+      </p:sp>
+      <p:sp>
+        <p:nvSpPr>
+          <p:cNvPr id="3" name="TextBox 2"/>
+          <p:cNvSpPr txBox="1"/>
+          <p:nvPr/>
+        </p:nvSpPr>
+        <p:spPr>
+          <a:xfrm>
+            <a:off x="731520" y="3657600"/>
+            <a:ext cx="7680960" cy="2286000"/>
+          </a:xfrm>
+          <a:prstGeom prst="rect">
+            <a:avLst/>
+          </a:prstGeom>
+          <a:noFill/>
+        </p:spPr>
+        <p:txBody>
+          <a:bodyPr wrap="square">
+            <a:spAutoFit/>
+          </a:bodyPr>
+          <a:lstStyle/>
+          <a:p>
+            <a:pPr algn="ctr">
+              <a:spcAft>
+                <a:spcPts val="800"/>
+              </a:spcAft>
+              <a:defRPr sz="1400">
+                <a:solidFill>
+                  <a:srgbClr val="E8A0A8"/>
+                </a:solidFill>
+              </a:defRPr>
+            </a:pPr>
+            <a:r>
+              <a:t>LP: https://mai-san447.github.io/hanasaku-career/</a:t>
+            </a:r>
+          </a:p>
+          <a:p>
+            <a:pPr algn="ctr">
+              <a:spcAft>
+                <a:spcPts val="800"/>
+              </a:spcAft>
+              <a:defRPr sz="1400">
+                <a:solidFill>
+                  <a:srgbClr val="E8A0A8"/>
+                </a:solidFill>
+              </a:defRPr>
+            </a:pPr>
+            <a:r>
+              <a:t>無料相談予約: https://calendar.app.google/u8SkpMApaMfaRoSx6</a:t>
+            </a:r>
+          </a:p>
+          <a:p>
+            <a:pPr algn="ctr">
+              <a:spcAft>
+                <a:spcPts val="800"/>
+              </a:spcAft>
+              <a:defRPr sz="1400">
+                <a:solidFill>
+                  <a:srgbClr val="E8A0A8"/>
+                </a:solidFill>
+              </a:defRPr>
+            </a:pPr>
+            <a:r>
+              <a:t>LINE公式: https://lin.ee/qURXYyS</a:t>
+            </a:r>
+          </a:p>
+          <a:p>
+            <a:pPr algn="ctr">
+              <a:spcAft>
+                <a:spcPts val="800"/>
+              </a:spcAft>
+              <a:defRPr sz="1100">
+                <a:solidFill>
+                  <a:srgbClr val="888888"/>
+                </a:solidFill>
+              </a:defRPr>
+            </a:pPr>
+          </a:p>
+          <a:p>
+            <a:pPr algn="ctr">
+              <a:spcAft>
+                <a:spcPts val="800"/>
+              </a:spcAft>
+              <a:defRPr sz="1100">
+                <a:solidFill>
+                  <a:srgbClr val="888888"/>
+                </a:solidFill>
+              </a:defRPr>
+            </a:pPr>
+            <a:r>
+              <a:t>© 2026 ハナサク / EMKO</a:t>
+            </a:r>
+          </a:p>
+        </p:txBody>
+      </p:sp>
+    </p:spTree>
+  </p:cSld>
+  <p:clrMapOvr>
+    <a:masterClrMapping/>
+  </p:clrMapOvr>
+</p:sld>
+</file>
+
+<file path=ppt/slides/slide2.xml><?xml version="1.0" encoding="utf-8"?>
+<p:sld xmlns:a="http://schemas.openxmlformats.org/drawingml/2006/main" xmlns:p="http://schemas.openxmlformats.org/presentationml/2006/main" xmlns:r="http://schemas.openxmlformats.org/officeDocument/2006/relationships">
+  <p:cSld>
+    <p:spTree>
+      <p:nvGrpSpPr>
+        <p:cNvPr id="1" name=""/>
+        <p:cNvGrpSpPr/>
+        <p:nvPr/>
+      </p:nvGrpSpPr>
+      <p:grpSpPr/>
+      <p:sp>
+        <p:nvSpPr>
+          <p:cNvPr id="2" name="TextBox 1"/>
+          <p:cNvSpPr txBox="1"/>
           <p:nvPr/>
         </p:nvSpPr>
         <p:spPr>
           <a:xfrm>
             <a:off x="0" y="0"/>
-            <a:ext cx="9144000" cy="137160"/>
+            <a:ext cx="9144000" cy="914400"/>
+          </a:xfrm>
+          <a:prstGeom prst="rect">
+            <a:avLst/>
+          </a:prstGeom>
+          <a:noFill/>
+        </p:spPr>
+        <p:txBody>
+          <a:bodyPr wrap="square">
+            <a:spAutoFit/>
+          </a:bodyPr>
+          <a:lstStyle/>
+          <a:p>
+            <a:pPr algn="l">
+              <a:defRPr sz="2200" b="1">
+                <a:solidFill>
+                  <a:srgbClr val="5A2030"/>
+                </a:solidFill>
+              </a:defRPr>
+            </a:pPr>
+            <a:r>
+              <a:t>  サービス概要</a:t>
+            </a:r>
+          </a:p>
+        </p:txBody>
+      </p:sp>
+      <p:sp>
+        <p:nvSpPr>
+          <p:cNvPr id="3" name="Rectangle 2"/>
+          <p:cNvSpPr/>
+          <p:nvPr/>
+        </p:nvSpPr>
+        <p:spPr>
+          <a:xfrm>
+            <a:off x="457200" y="868680"/>
+            <a:ext cx="8229600" cy="27432"/>
           </a:xfrm>
           <a:prstGeom prst="rect">
             <a:avLst/>
           </a:prstGeom>
           <a:solidFill>
-            <a:srgbClr val="C06070"/>
+            <a:srgbClr val="5A2030"/>
           </a:solidFill>
           <a:ln>
             <a:noFill/>
@@ -3150,20 +3415,270 @@
       </p:sp>
       <p:sp>
         <p:nvSpPr>
-          <p:cNvPr id="3" name="Oval 2"/>
+          <p:cNvPr id="4" name="TextBox 3"/>
+          <p:cNvSpPr txBox="1"/>
+          <p:nvPr/>
+        </p:nvSpPr>
+        <p:spPr>
+          <a:xfrm>
+            <a:off x="548640" y="1097280"/>
+            <a:ext cx="8046720" cy="5029200"/>
+          </a:xfrm>
+          <a:prstGeom prst="rect">
+            <a:avLst/>
+          </a:prstGeom>
+          <a:noFill/>
+        </p:spPr>
+        <p:txBody>
+          <a:bodyPr wrap="square">
+            <a:spAutoFit/>
+          </a:bodyPr>
+          <a:lstStyle/>
+          <a:p>
+            <a:pPr>
+              <a:spcAft>
+                <a:spcPts val="600"/>
+              </a:spcAft>
+              <a:defRPr sz="1400">
+                <a:solidFill>
+                  <a:srgbClr val="333333"/>
+                </a:solidFill>
+              </a:defRPr>
+            </a:pPr>
+            <a:r>
+              <a:t>「ハナサク」は、福井県の女子学生とその保護者を対象としたオンライン就活伴走コーチングです。</a:t>
+            </a:r>
+          </a:p>
+          <a:p>
+            <a:pPr>
+              <a:spcAft>
+                <a:spcPts val="600"/>
+              </a:spcAft>
+              <a:defRPr sz="1400">
+                <a:solidFill>
+                  <a:srgbClr val="333333"/>
+                </a:solidFill>
+              </a:defRPr>
+            </a:pPr>
+            <a:r>
+              <a:t>就活塾でもエージェントでもない、あなたの「伴走者」として一貫してサポートします。</a:t>
+            </a:r>
+          </a:p>
+          <a:p>
+            <a:pPr>
+              <a:spcAft>
+                <a:spcPts val="600"/>
+              </a:spcAft>
+              <a:defRPr sz="1400">
+                <a:solidFill>
+                  <a:srgbClr val="333333"/>
+                </a:solidFill>
+              </a:defRPr>
+            </a:pPr>
+          </a:p>
+          <a:p>
+            <a:pPr>
+              <a:spcAft>
+                <a:spcPts val="600"/>
+              </a:spcAft>
+              <a:defRPr sz="1400" b="1">
+                <a:solidFill>
+                  <a:srgbClr val="5A2030"/>
+                </a:solidFill>
+              </a:defRPr>
+            </a:pPr>
+            <a:r>
+              <a:t>◎ 就活伴走コーチング</a:t>
+            </a:r>
+          </a:p>
+          <a:p>
+            <a:pPr lvl="1">
+              <a:spcAft>
+                <a:spcPts val="600"/>
+              </a:spcAft>
+              <a:defRPr sz="1200">
+                <a:solidFill>
+                  <a:srgbClr val="333333"/>
+                </a:solidFill>
+              </a:defRPr>
+            </a:pPr>
+            <a:r>
+              <a:t>対象: 女子学生 + 保護者</a:t>
+            </a:r>
+          </a:p>
+          <a:p>
+            <a:pPr lvl="1">
+              <a:spcAft>
+                <a:spcPts val="600"/>
+              </a:spcAft>
+              <a:defRPr sz="1200">
+                <a:solidFill>
+                  <a:srgbClr val="333333"/>
+                </a:solidFill>
+              </a:defRPr>
+            </a:pPr>
+            <a:r>
+              <a:t>形式: オンライン面談（30分/回）</a:t>
+            </a:r>
+          </a:p>
+          <a:p>
+            <a:pPr lvl="1">
+              <a:spcAft>
+                <a:spcPts val="600"/>
+              </a:spcAft>
+              <a:defRPr sz="1200">
+                <a:solidFill>
+                  <a:srgbClr val="333333"/>
+                </a:solidFill>
+              </a:defRPr>
+            </a:pPr>
+            <a:r>
+              <a:t>LINE質問対応・親御さんへの月次レポート</a:t>
+            </a:r>
+          </a:p>
+          <a:p>
+            <a:pPr>
+              <a:spcAft>
+                <a:spcPts val="600"/>
+              </a:spcAft>
+              <a:defRPr sz="1400">
+                <a:solidFill>
+                  <a:srgbClr val="333333"/>
+                </a:solidFill>
+              </a:defRPr>
+            </a:pPr>
+          </a:p>
+          <a:p>
+            <a:pPr>
+              <a:spcAft>
+                <a:spcPts val="600"/>
+              </a:spcAft>
+              <a:defRPr sz="1400" b="1">
+                <a:solidFill>
+                  <a:srgbClr val="5A2030"/>
+                </a:solidFill>
+              </a:defRPr>
+            </a:pPr>
+            <a:r>
+              <a:t>◎ 女性リーダー向けメンタリング</a:t>
+            </a:r>
+          </a:p>
+          <a:p>
+            <a:pPr lvl="1">
+              <a:spcAft>
+                <a:spcPts val="600"/>
+              </a:spcAft>
+              <a:defRPr sz="1200">
+                <a:solidFill>
+                  <a:srgbClr val="333333"/>
+                </a:solidFill>
+              </a:defRPr>
+            </a:pPr>
+            <a:r>
+              <a:t>対象: 管理職・リーダー候補の女性</a:t>
+            </a:r>
+          </a:p>
+          <a:p>
+            <a:pPr lvl="1">
+              <a:spcAft>
+                <a:spcPts val="600"/>
+              </a:spcAft>
+              <a:defRPr sz="1200">
+                <a:solidFill>
+                  <a:srgbClr val="333333"/>
+                </a:solidFill>
+              </a:defRPr>
+            </a:pPr>
+            <a:r>
+              <a:t>形式: オンライン1on1（45分/回）</a:t>
+            </a:r>
+          </a:p>
+          <a:p>
+            <a:pPr lvl="1">
+              <a:spcAft>
+                <a:spcPts val="600"/>
+              </a:spcAft>
+              <a:defRPr sz="1200">
+                <a:solidFill>
+                  <a:srgbClr val="333333"/>
+                </a:solidFill>
+              </a:defRPr>
+            </a:pPr>
+            <a:r>
+              <a:t>キャリア相談・壁打ち</a:t>
+            </a:r>
+          </a:p>
+        </p:txBody>
+      </p:sp>
+    </p:spTree>
+  </p:cSld>
+  <p:clrMapOvr>
+    <a:masterClrMapping/>
+  </p:clrMapOvr>
+</p:sld>
+</file>
+
+<file path=ppt/slides/slide3.xml><?xml version="1.0" encoding="utf-8"?>
+<p:sld xmlns:a="http://schemas.openxmlformats.org/drawingml/2006/main" xmlns:p="http://schemas.openxmlformats.org/presentationml/2006/main" xmlns:r="http://schemas.openxmlformats.org/officeDocument/2006/relationships">
+  <p:cSld>
+    <p:spTree>
+      <p:nvGrpSpPr>
+        <p:cNvPr id="1" name=""/>
+        <p:cNvGrpSpPr/>
+        <p:nvPr/>
+      </p:nvGrpSpPr>
+      <p:grpSpPr/>
+      <p:sp>
+        <p:nvSpPr>
+          <p:cNvPr id="2" name="TextBox 1"/>
+          <p:cNvSpPr txBox="1"/>
+          <p:nvPr/>
+        </p:nvSpPr>
+        <p:spPr>
+          <a:xfrm>
+            <a:off x="0" y="0"/>
+            <a:ext cx="9144000" cy="914400"/>
+          </a:xfrm>
+          <a:prstGeom prst="rect">
+            <a:avLst/>
+          </a:prstGeom>
+          <a:noFill/>
+        </p:spPr>
+        <p:txBody>
+          <a:bodyPr wrap="square">
+            <a:spAutoFit/>
+          </a:bodyPr>
+          <a:lstStyle/>
+          <a:p>
+            <a:pPr algn="l">
+              <a:defRPr sz="2200" b="1">
+                <a:solidFill>
+                  <a:srgbClr val="5A2030"/>
+                </a:solidFill>
+              </a:defRPr>
+            </a:pPr>
+            <a:r>
+              <a:t>  こんな悩み、ありませんか？</a:t>
+            </a:r>
+          </a:p>
+        </p:txBody>
+      </p:sp>
+      <p:sp>
+        <p:nvSpPr>
+          <p:cNvPr id="3" name="Rectangle 2"/>
           <p:cNvSpPr/>
           <p:nvPr/>
         </p:nvSpPr>
         <p:spPr>
           <a:xfrm>
-            <a:off x="6858000" y="457200"/>
-            <a:ext cx="2286000" cy="2286000"/>
+            <a:off x="457200" y="868680"/>
+            <a:ext cx="8229600" cy="27432"/>
           </a:xfrm>
-          <a:prstGeom prst="ellipse">
+          <a:prstGeom prst="rect">
             <a:avLst/>
           </a:prstGeom>
           <a:solidFill>
-            <a:srgbClr val="F5E6EA"/>
+            <a:srgbClr val="5A2030"/>
           </a:solidFill>
           <a:ln>
             <a:noFill/>
@@ -3193,20 +3708,315 @@
       </p:sp>
       <p:sp>
         <p:nvSpPr>
-          <p:cNvPr id="4" name="Oval 3"/>
+          <p:cNvPr id="4" name="TextBox 3"/>
+          <p:cNvSpPr txBox="1"/>
+          <p:nvPr/>
+        </p:nvSpPr>
+        <p:spPr>
+          <a:xfrm>
+            <a:off x="548640" y="1097280"/>
+            <a:ext cx="8046720" cy="5029200"/>
+          </a:xfrm>
+          <a:prstGeom prst="rect">
+            <a:avLst/>
+          </a:prstGeom>
+          <a:noFill/>
+        </p:spPr>
+        <p:txBody>
+          <a:bodyPr wrap="square">
+            <a:spAutoFit/>
+          </a:bodyPr>
+          <a:lstStyle/>
+          <a:p>
+            <a:pPr>
+              <a:spcAft>
+                <a:spcPts val="600"/>
+              </a:spcAft>
+              <a:defRPr sz="1400" b="1">
+                <a:solidFill>
+                  <a:srgbClr val="5A2030"/>
+                </a:solidFill>
+              </a:defRPr>
+            </a:pPr>
+            <a:r>
+              <a:t>◎ 学生さん</a:t>
+            </a:r>
+          </a:p>
+          <a:p>
+            <a:pPr lvl="1">
+              <a:spcAft>
+                <a:spcPts val="600"/>
+              </a:spcAft>
+              <a:defRPr sz="1200">
+                <a:solidFill>
+                  <a:srgbClr val="333333"/>
+                </a:solidFill>
+              </a:defRPr>
+            </a:pPr>
+            <a:r>
+              <a:t>キャリアセンターの面談が表面的で、本当に知りたいことが聞けない</a:t>
+            </a:r>
+          </a:p>
+          <a:p>
+            <a:pPr lvl="1">
+              <a:spcAft>
+                <a:spcPts val="600"/>
+              </a:spcAft>
+              <a:defRPr sz="1200">
+                <a:solidFill>
+                  <a:srgbClr val="333333"/>
+                </a:solidFill>
+              </a:defRPr>
+            </a:pPr>
+            <a:r>
+              <a:t>東京の就活塾は高すぎるし、地方から通えない</a:t>
+            </a:r>
+          </a:p>
+          <a:p>
+            <a:pPr lvl="1">
+              <a:spcAft>
+                <a:spcPts val="600"/>
+              </a:spcAft>
+              <a:defRPr sz="1200">
+                <a:solidFill>
+                  <a:srgbClr val="333333"/>
+                </a:solidFill>
+              </a:defRPr>
+            </a:pPr>
+            <a:r>
+              <a:t>面接で「結婚は？出産は？」と聞かれたとき、どう答えればいいかわからない</a:t>
+            </a:r>
+          </a:p>
+          <a:p>
+            <a:pPr lvl="1">
+              <a:spcAft>
+                <a:spcPts val="600"/>
+              </a:spcAft>
+              <a:defRPr sz="1200">
+                <a:solidFill>
+                  <a:srgbClr val="333333"/>
+                </a:solidFill>
+              </a:defRPr>
+            </a:pPr>
+            <a:r>
+              <a:t>地元に残るか東京に出るか、相談できる大人がいない</a:t>
+            </a:r>
+          </a:p>
+          <a:p>
+            <a:pPr>
+              <a:spcAft>
+                <a:spcPts val="600"/>
+              </a:spcAft>
+              <a:defRPr sz="1400">
+                <a:solidFill>
+                  <a:srgbClr val="333333"/>
+                </a:solidFill>
+              </a:defRPr>
+            </a:pPr>
+          </a:p>
+          <a:p>
+            <a:pPr>
+              <a:spcAft>
+                <a:spcPts val="600"/>
+              </a:spcAft>
+              <a:defRPr sz="1400" b="1">
+                <a:solidFill>
+                  <a:srgbClr val="5A2030"/>
+                </a:solidFill>
+              </a:defRPr>
+            </a:pPr>
+            <a:r>
+              <a:t>◎ 親御さん</a:t>
+            </a:r>
+          </a:p>
+          <a:p>
+            <a:pPr lvl="1">
+              <a:spcAft>
+                <a:spcPts val="600"/>
+              </a:spcAft>
+              <a:defRPr sz="1200">
+                <a:solidFill>
+                  <a:srgbClr val="333333"/>
+                </a:solidFill>
+              </a:defRPr>
+            </a:pPr>
+            <a:r>
+              <a:t>子供の就活状況が見えず不安（LINEで聞いても「大丈夫」としか返ってこない）</a:t>
+            </a:r>
+          </a:p>
+          <a:p>
+            <a:pPr lvl="1">
+              <a:spcAft>
+                <a:spcPts val="600"/>
+              </a:spcAft>
+              <a:defRPr sz="1200">
+                <a:solidFill>
+                  <a:srgbClr val="333333"/>
+                </a:solidFill>
+              </a:defRPr>
+            </a:pPr>
+            <a:r>
+              <a:t>自分たちの時代と就活が違いすぎて、アドバイスできない</a:t>
+            </a:r>
+          </a:p>
+          <a:p>
+            <a:pPr lvl="1">
+              <a:spcAft>
+                <a:spcPts val="600"/>
+              </a:spcAft>
+              <a:defRPr sz="1200">
+                <a:solidFill>
+                  <a:srgbClr val="333333"/>
+                </a:solidFill>
+              </a:defRPr>
+            </a:pPr>
+            <a:r>
+              <a:t>高い学費を払っているのに、キャリアセンターだけで大丈夫か心配</a:t>
+            </a:r>
+          </a:p>
+          <a:p>
+            <a:pPr>
+              <a:spcAft>
+                <a:spcPts val="600"/>
+              </a:spcAft>
+              <a:defRPr sz="1400">
+                <a:solidFill>
+                  <a:srgbClr val="333333"/>
+                </a:solidFill>
+              </a:defRPr>
+            </a:pPr>
+          </a:p>
+          <a:p>
+            <a:pPr>
+              <a:spcAft>
+                <a:spcPts val="600"/>
+              </a:spcAft>
+              <a:defRPr sz="1400" b="1">
+                <a:solidFill>
+                  <a:srgbClr val="5A2030"/>
+                </a:solidFill>
+              </a:defRPr>
+            </a:pPr>
+            <a:r>
+              <a:t>◎ 女性リーダー</a:t>
+            </a:r>
+          </a:p>
+          <a:p>
+            <a:pPr lvl="1">
+              <a:spcAft>
+                <a:spcPts val="600"/>
+              </a:spcAft>
+              <a:defRPr sz="1200">
+                <a:solidFill>
+                  <a:srgbClr val="333333"/>
+                </a:solidFill>
+              </a:defRPr>
+            </a:pPr>
+            <a:r>
+              <a:t>管理職になったが、相談できる同じ立場の人がいない</a:t>
+            </a:r>
+          </a:p>
+          <a:p>
+            <a:pPr lvl="1">
+              <a:spcAft>
+                <a:spcPts val="600"/>
+              </a:spcAft>
+              <a:defRPr sz="1200">
+                <a:solidFill>
+                  <a:srgbClr val="333333"/>
+                </a:solidFill>
+              </a:defRPr>
+            </a:pPr>
+            <a:r>
+              <a:t>チームマネジメントや社内政治で壁を感じている</a:t>
+            </a:r>
+          </a:p>
+          <a:p>
+            <a:pPr lvl="1">
+              <a:spcAft>
+                <a:spcPts val="600"/>
+              </a:spcAft>
+              <a:defRPr sz="1200">
+                <a:solidFill>
+                  <a:srgbClr val="333333"/>
+                </a:solidFill>
+              </a:defRPr>
+            </a:pPr>
+            <a:r>
+              <a:t>仕事とライフイベントの両立に悩んでいる</a:t>
+            </a:r>
+          </a:p>
+        </p:txBody>
+      </p:sp>
+    </p:spTree>
+  </p:cSld>
+  <p:clrMapOvr>
+    <a:masterClrMapping/>
+  </p:clrMapOvr>
+</p:sld>
+</file>
+
+<file path=ppt/slides/slide4.xml><?xml version="1.0" encoding="utf-8"?>
+<p:sld xmlns:a="http://schemas.openxmlformats.org/drawingml/2006/main" xmlns:p="http://schemas.openxmlformats.org/presentationml/2006/main" xmlns:r="http://schemas.openxmlformats.org/officeDocument/2006/relationships">
+  <p:cSld>
+    <p:spTree>
+      <p:nvGrpSpPr>
+        <p:cNvPr id="1" name=""/>
+        <p:cNvGrpSpPr/>
+        <p:nvPr/>
+      </p:nvGrpSpPr>
+      <p:grpSpPr/>
+      <p:sp>
+        <p:nvSpPr>
+          <p:cNvPr id="2" name="TextBox 1"/>
+          <p:cNvSpPr txBox="1"/>
+          <p:nvPr/>
+        </p:nvSpPr>
+        <p:spPr>
+          <a:xfrm>
+            <a:off x="0" y="0"/>
+            <a:ext cx="9144000" cy="914400"/>
+          </a:xfrm>
+          <a:prstGeom prst="rect">
+            <a:avLst/>
+          </a:prstGeom>
+          <a:noFill/>
+        </p:spPr>
+        <p:txBody>
+          <a:bodyPr wrap="square">
+            <a:spAutoFit/>
+          </a:bodyPr>
+          <a:lstStyle/>
+          <a:p>
+            <a:pPr algn="l">
+              <a:defRPr sz="2200" b="1">
+                <a:solidFill>
+                  <a:srgbClr val="5A2030"/>
+                </a:solidFill>
+              </a:defRPr>
+            </a:pPr>
+            <a:r>
+              <a:t>  ハナサクの3つの特徴</a:t>
+            </a:r>
+          </a:p>
+        </p:txBody>
+      </p:sp>
+      <p:sp>
+        <p:nvSpPr>
+          <p:cNvPr id="3" name="Rectangle 2"/>
           <p:cNvSpPr/>
           <p:nvPr/>
         </p:nvSpPr>
         <p:spPr>
           <a:xfrm>
-            <a:off x="7498079" y="5029200"/>
-            <a:ext cx="1645920" cy="1645920"/>
+            <a:off x="457200" y="868680"/>
+            <a:ext cx="8229600" cy="27432"/>
           </a:xfrm>
-          <a:prstGeom prst="ellipse">
+          <a:prstGeom prst="rect">
             <a:avLst/>
           </a:prstGeom>
           <a:solidFill>
-            <a:srgbClr val="FAF0F0"/>
+            <a:srgbClr val="5A2030"/>
           </a:solidFill>
           <a:ln>
             <a:noFill/>
@@ -3236,14 +4046,14 @@
       </p:sp>
       <p:sp>
         <p:nvSpPr>
-          <p:cNvPr id="5" name="TextBox 4"/>
+          <p:cNvPr id="4" name="TextBox 3"/>
           <p:cNvSpPr txBox="1"/>
           <p:nvPr/>
         </p:nvSpPr>
         <p:spPr>
           <a:xfrm>
-            <a:off x="731520" y="1828800"/>
-            <a:ext cx="6400800" cy="1097280"/>
+            <a:off x="548640" y="1097280"/>
+            <a:ext cx="8046720" cy="5029200"/>
           </a:xfrm>
           <a:prstGeom prst="rect">
             <a:avLst/>
@@ -3256,32 +4066,209 @@
           </a:bodyPr>
           <a:lstStyle/>
           <a:p>
-            <a:pPr algn="l">
-              <a:lnSpc>
-                <a:spcPts val="6600"/>
-              </a:lnSpc>
-              <a:defRPr sz="4400" b="1">
-                <a:solidFill>
-                  <a:srgbClr val="C06070"/>
-                </a:solidFill>
-              </a:defRPr>
-            </a:pPr>
-            <a:r>
-              <a:t>ハナサク</a:t>
-            </a:r>
-          </a:p>
-        </p:txBody>
-      </p:sp>
-      <p:sp>
-        <p:nvSpPr>
-          <p:cNvPr id="6" name="TextBox 5"/>
+            <a:pPr>
+              <a:spcAft>
+                <a:spcPts val="600"/>
+              </a:spcAft>
+              <a:defRPr sz="1400" b="1">
+                <a:solidFill>
+                  <a:srgbClr val="5A2030"/>
+                </a:solidFill>
+              </a:defRPr>
+            </a:pPr>
+            <a:r>
+              <a:t>★ 1. 福井出身コーチによる1on1面談</a:t>
+            </a:r>
+          </a:p>
+          <a:p>
+            <a:pPr lvl="1">
+              <a:spcAft>
+                <a:spcPts val="600"/>
+              </a:spcAft>
+              <a:defRPr sz="1200">
+                <a:solidFill>
+                  <a:srgbClr val="333333"/>
+                </a:solidFill>
+              </a:defRPr>
+            </a:pPr>
+            <a:r>
+              <a:t>福井県出身・高志高校卒のコーチが、地元の空気感を理解した上であなたの言葉を引き出します</a:t>
+            </a:r>
+          </a:p>
+          <a:p>
+            <a:pPr lvl="1">
+              <a:spcAft>
+                <a:spcPts val="600"/>
+              </a:spcAft>
+              <a:defRPr sz="1200">
+                <a:solidFill>
+                  <a:srgbClr val="333333"/>
+                </a:solidFill>
+              </a:defRPr>
+            </a:pPr>
+            <a:r>
+              <a:t>オンライン（Google Meet）なので、全国どこからでも受けられます</a:t>
+            </a:r>
+          </a:p>
+          <a:p>
+            <a:pPr>
+              <a:spcAft>
+                <a:spcPts val="600"/>
+              </a:spcAft>
+              <a:defRPr sz="1400">
+                <a:solidFill>
+                  <a:srgbClr val="333333"/>
+                </a:solidFill>
+              </a:defRPr>
+            </a:pPr>
+          </a:p>
+          <a:p>
+            <a:pPr>
+              <a:spcAft>
+                <a:spcPts val="600"/>
+              </a:spcAft>
+              <a:defRPr sz="1400" b="1">
+                <a:solidFill>
+                  <a:srgbClr val="5A2030"/>
+                </a:solidFill>
+              </a:defRPr>
+            </a:pPr>
+            <a:r>
+              <a:t>★ 2. 親子で安心の伴走型サポート</a:t>
+            </a:r>
+          </a:p>
+          <a:p>
+            <a:pPr lvl="1">
+              <a:spcAft>
+                <a:spcPts val="600"/>
+              </a:spcAft>
+              <a:defRPr sz="1200">
+                <a:solidFill>
+                  <a:srgbClr val="333333"/>
+                </a:solidFill>
+              </a:defRPr>
+            </a:pPr>
+            <a:r>
+              <a:t>長期プランでは親御さんへの月次レポートを標準提供</a:t>
+            </a:r>
+          </a:p>
+          <a:p>
+            <a:pPr lvl="1">
+              <a:spcAft>
+                <a:spcPts val="600"/>
+              </a:spcAft>
+              <a:defRPr sz="1200">
+                <a:solidFill>
+                  <a:srgbClr val="333333"/>
+                </a:solidFill>
+              </a:defRPr>
+            </a:pPr>
+            <a:r>
+              <a:t>お子さんの成長ポイント、来月の計画、親へのお願い事項をお伝えします</a:t>
+            </a:r>
+          </a:p>
+          <a:p>
+            <a:pPr lvl="1">
+              <a:spcAft>
+                <a:spcPts val="600"/>
+              </a:spcAft>
+              <a:defRPr sz="1200">
+                <a:solidFill>
+                  <a:srgbClr val="333333"/>
+                </a:solidFill>
+              </a:defRPr>
+            </a:pPr>
+            <a:r>
+              <a:t>プライバシーは厳守します</a:t>
+            </a:r>
+          </a:p>
+          <a:p>
+            <a:pPr>
+              <a:spcAft>
+                <a:spcPts val="600"/>
+              </a:spcAft>
+              <a:defRPr sz="1400">
+                <a:solidFill>
+                  <a:srgbClr val="333333"/>
+                </a:solidFill>
+              </a:defRPr>
+            </a:pPr>
+          </a:p>
+          <a:p>
+            <a:pPr>
+              <a:spcAft>
+                <a:spcPts val="600"/>
+              </a:spcAft>
+              <a:defRPr sz="1400" b="1">
+                <a:solidFill>
+                  <a:srgbClr val="5A2030"/>
+                </a:solidFill>
+              </a:defRPr>
+            </a:pPr>
+            <a:r>
+              <a:t>★ 3. 女子学生専門だからできること</a:t>
+            </a:r>
+          </a:p>
+          <a:p>
+            <a:pPr lvl="1">
+              <a:spcAft>
+                <a:spcPts val="600"/>
+              </a:spcAft>
+              <a:defRPr sz="1200">
+                <a:solidFill>
+                  <a:srgbClr val="333333"/>
+                </a:solidFill>
+              </a:defRPr>
+            </a:pPr>
+            <a:r>
+              <a:t>女性活躍推進プログラムで社外メンターを務めた経験を活かし、女子学生特有の悩みに寄り添います</a:t>
+            </a:r>
+          </a:p>
+          <a:p>
+            <a:pPr lvl="1">
+              <a:spcAft>
+                <a:spcPts val="600"/>
+              </a:spcAft>
+              <a:defRPr sz="1200">
+                <a:solidFill>
+                  <a:srgbClr val="333333"/>
+                </a:solidFill>
+              </a:defRPr>
+            </a:pPr>
+            <a:r>
+              <a:t>外見への言及、ライフプランへの圧、自己主張への抵抗感にも対応</a:t>
+            </a:r>
+          </a:p>
+        </p:txBody>
+      </p:sp>
+    </p:spTree>
+  </p:cSld>
+  <p:clrMapOvr>
+    <a:masterClrMapping/>
+  </p:clrMapOvr>
+</p:sld>
+</file>
+
+<file path=ppt/slides/slide5.xml><?xml version="1.0" encoding="utf-8"?>
+<p:sld xmlns:a="http://schemas.openxmlformats.org/drawingml/2006/main" xmlns:p="http://schemas.openxmlformats.org/presentationml/2006/main" xmlns:r="http://schemas.openxmlformats.org/officeDocument/2006/relationships">
+  <p:cSld>
+    <p:spTree>
+      <p:nvGrpSpPr>
+        <p:cNvPr id="1" name=""/>
+        <p:cNvGrpSpPr/>
+        <p:nvPr/>
+      </p:nvGrpSpPr>
+      <p:grpSpPr/>
+      <p:sp>
+        <p:nvSpPr>
+          <p:cNvPr id="2" name="TextBox 1"/>
           <p:cNvSpPr txBox="1"/>
           <p:nvPr/>
         </p:nvSpPr>
         <p:spPr>
           <a:xfrm>
-            <a:off x="731520" y="3017520"/>
-            <a:ext cx="6400800" cy="731520"/>
+            <a:off x="0" y="0"/>
+            <a:ext cx="9144000" cy="914400"/>
           </a:xfrm>
           <a:prstGeom prst="rect">
             <a:avLst/>
@@ -3289,119 +4276,40 @@
           <a:noFill/>
         </p:spPr>
         <p:txBody>
-          <a:bodyPr wrap="square">
+          <a:bodyPr wrap="none">
             <a:spAutoFit/>
           </a:bodyPr>
           <a:lstStyle/>
           <a:p>
-            <a:pPr algn="l">
-              <a:lnSpc>
-                <a:spcPts val="2400"/>
-              </a:lnSpc>
-              <a:defRPr sz="1600" b="0">
-                <a:solidFill>
-                  <a:srgbClr val="3A3A3A"/>
-                </a:solidFill>
-              </a:defRPr>
-            </a:pPr>
-            <a:r>
-              <a:t>福井の女の子が、自分の言葉で未来を語れるようになる就活伴走サービス</a:t>
-            </a:r>
-          </a:p>
-        </p:txBody>
-      </p:sp>
-      <p:sp>
-        <p:nvSpPr>
-          <p:cNvPr id="7" name="TextBox 6"/>
-          <p:cNvSpPr txBox="1"/>
+            <a:pPr>
+              <a:defRPr sz="2200" b="1">
+                <a:solidFill>
+                  <a:srgbClr val="5A2030"/>
+                </a:solidFill>
+              </a:defRPr>
+            </a:pPr>
+            <a:r>
+              <a:t>  料金プラン｜就活伴走コーチング（30分/回）</a:t>
+            </a:r>
+          </a:p>
+        </p:txBody>
+      </p:sp>
+      <p:sp>
+        <p:nvSpPr>
+          <p:cNvPr id="3" name="Rectangle 2"/>
+          <p:cNvSpPr/>
           <p:nvPr/>
         </p:nvSpPr>
         <p:spPr>
           <a:xfrm>
-            <a:off x="731520" y="4114800"/>
-            <a:ext cx="6400800" cy="457200"/>
-          </a:xfrm>
-          <a:prstGeom prst="rect">
-            <a:avLst/>
-          </a:prstGeom>
-          <a:noFill/>
-        </p:spPr>
-        <p:txBody>
-          <a:bodyPr wrap="square">
-            <a:spAutoFit/>
-          </a:bodyPr>
-          <a:lstStyle/>
-          <a:p>
-            <a:pPr algn="l">
-              <a:lnSpc>
-                <a:spcPts val="2100"/>
-              </a:lnSpc>
-              <a:defRPr sz="1400" b="0">
-                <a:solidFill>
-                  <a:srgbClr val="888888"/>
-                </a:solidFill>
-              </a:defRPr>
-            </a:pPr>
-            <a:r>
-              <a:t>サービス紹介資料</a:t>
-            </a:r>
-          </a:p>
-        </p:txBody>
-      </p:sp>
-      <p:sp>
-        <p:nvSpPr>
-          <p:cNvPr id="8" name="TextBox 7"/>
-          <p:cNvSpPr txBox="1"/>
-          <p:nvPr/>
-        </p:nvSpPr>
-        <p:spPr>
-          <a:xfrm>
-            <a:off x="731520" y="5943600"/>
-            <a:ext cx="6400800" cy="365760"/>
-          </a:xfrm>
-          <a:prstGeom prst="rect">
-            <a:avLst/>
-          </a:prstGeom>
-          <a:noFill/>
-        </p:spPr>
-        <p:txBody>
-          <a:bodyPr wrap="square">
-            <a:spAutoFit/>
-          </a:bodyPr>
-          <a:lstStyle/>
-          <a:p>
-            <a:pPr algn="l">
-              <a:lnSpc>
-                <a:spcPts val="1650"/>
-              </a:lnSpc>
-              <a:defRPr sz="1100" b="0">
-                <a:solidFill>
-                  <a:srgbClr val="888888"/>
-                </a:solidFill>
-              </a:defRPr>
-            </a:pPr>
-            <a:r>
-              <a:t>西川 舞衣子（EMKO）</a:t>
-            </a:r>
-          </a:p>
-        </p:txBody>
-      </p:sp>
-      <p:sp>
-        <p:nvSpPr>
-          <p:cNvPr id="9" name="Rectangle 8"/>
-          <p:cNvSpPr/>
-          <p:nvPr/>
-        </p:nvSpPr>
-        <p:spPr>
-          <a:xfrm>
-            <a:off x="0" y="6720840"/>
-            <a:ext cx="9144000" cy="137160"/>
+            <a:off x="457200" y="868680"/>
+            <a:ext cx="8229600" cy="27432"/>
           </a:xfrm>
           <a:prstGeom prst="rect">
             <a:avLst/>
           </a:prstGeom>
           <a:solidFill>
-            <a:srgbClr val="C06070"/>
+            <a:srgbClr val="5A2030"/>
           </a:solidFill>
           <a:ln>
             <a:noFill/>
@@ -3429,2271 +4337,6 @@
           </a:p>
         </p:txBody>
       </p:sp>
-    </p:spTree>
-  </p:cSld>
-  <p:clrMapOvr>
-    <a:masterClrMapping/>
-  </p:clrMapOvr>
-</p:sld>
-</file>
-
-<file path=ppt/slides/slide10.xml><?xml version="1.0" encoding="utf-8"?>
-<p:sld xmlns:a="http://schemas.openxmlformats.org/drawingml/2006/main" xmlns:p="http://schemas.openxmlformats.org/presentationml/2006/main" xmlns:r="http://schemas.openxmlformats.org/officeDocument/2006/relationships">
-  <p:cSld>
-    <p:bg>
-      <p:bgPr>
-        <a:solidFill>
-          <a:srgbClr val="C06070"/>
-        </a:solidFill>
-        <a:effectLst/>
-      </p:bgPr>
-    </p:bg>
-    <p:spTree>
-      <p:nvGrpSpPr>
-        <p:cNvPr id="1" name=""/>
-        <p:cNvGrpSpPr/>
-        <p:nvPr/>
-      </p:nvGrpSpPr>
-      <p:grpSpPr/>
-      <p:sp>
-        <p:nvSpPr>
-          <p:cNvPr id="2" name="TextBox 1"/>
-          <p:cNvSpPr txBox="1"/>
-          <p:nvPr/>
-        </p:nvSpPr>
-        <p:spPr>
-          <a:xfrm>
-            <a:off x="457200" y="1371600"/>
-            <a:ext cx="8229600" cy="914400"/>
-          </a:xfrm>
-          <a:prstGeom prst="rect">
-            <a:avLst/>
-          </a:prstGeom>
-          <a:noFill/>
-        </p:spPr>
-        <p:txBody>
-          <a:bodyPr wrap="square">
-            <a:spAutoFit/>
-          </a:bodyPr>
-          <a:lstStyle/>
-          <a:p>
-            <a:pPr algn="ctr">
-              <a:lnSpc>
-                <a:spcPts val="4200"/>
-              </a:lnSpc>
-              <a:defRPr sz="2800" b="1">
-                <a:solidFill>
-                  <a:srgbClr val="FFFFFF"/>
-                </a:solidFill>
-              </a:defRPr>
-            </a:pPr>
-            <a:r>
-              <a:t>まずは無料で相談してみませんか？</a:t>
-            </a:r>
-          </a:p>
-        </p:txBody>
-      </p:sp>
-      <p:sp>
-        <p:nvSpPr>
-          <p:cNvPr id="3" name="TextBox 2"/>
-          <p:cNvSpPr txBox="1"/>
-          <p:nvPr/>
-        </p:nvSpPr>
-        <p:spPr>
-          <a:xfrm>
-            <a:off x="457200" y="2560320"/>
-            <a:ext cx="8229600" cy="457200"/>
-          </a:xfrm>
-          <a:prstGeom prst="rect">
-            <a:avLst/>
-          </a:prstGeom>
-          <a:noFill/>
-        </p:spPr>
-        <p:txBody>
-          <a:bodyPr wrap="square">
-            <a:spAutoFit/>
-          </a:bodyPr>
-          <a:lstStyle/>
-          <a:p>
-            <a:pPr algn="ctr">
-              <a:lnSpc>
-                <a:spcPts val="2100"/>
-              </a:lnSpc>
-              <a:defRPr sz="1400" b="0">
-                <a:solidFill>
-                  <a:srgbClr val="F5D0D5"/>
-                </a:solidFill>
-              </a:defRPr>
-            </a:pPr>
-            <a:r>
-              <a:t>初回面談は無料です。お気軽にどうぞ。</a:t>
-            </a:r>
-          </a:p>
-        </p:txBody>
-      </p:sp>
-      <p:sp>
-        <p:nvSpPr>
-          <p:cNvPr id="4" name="Rectangle 3"/>
-          <p:cNvSpPr/>
-          <p:nvPr/>
-        </p:nvSpPr>
-        <p:spPr>
-          <a:xfrm>
-            <a:off x="1371600" y="3474720"/>
-            <a:ext cx="6400800" cy="502920"/>
-          </a:xfrm>
-          <a:prstGeom prst="rect">
-            <a:avLst/>
-          </a:prstGeom>
-          <a:solidFill>
-            <a:srgbClr val="9A4050"/>
-          </a:solidFill>
-          <a:ln>
-            <a:noFill/>
-          </a:ln>
-        </p:spPr>
-        <p:style>
-          <a:lnRef idx="1">
-            <a:schemeClr val="accent1"/>
-          </a:lnRef>
-          <a:fillRef idx="3">
-            <a:schemeClr val="accent1"/>
-          </a:fillRef>
-          <a:effectRef idx="2">
-            <a:schemeClr val="accent1"/>
-          </a:effectRef>
-          <a:fontRef idx="minor">
-            <a:schemeClr val="lt1"/>
-          </a:fontRef>
-        </p:style>
-        <p:txBody>
-          <a:bodyPr rtlCol="0" anchor="ctr"/>
-          <a:lstStyle/>
-          <a:p>
-            <a:pPr algn="ctr"/>
-          </a:p>
-        </p:txBody>
-      </p:sp>
-      <p:sp>
-        <p:nvSpPr>
-          <p:cNvPr id="5" name="TextBox 4"/>
-          <p:cNvSpPr txBox="1"/>
-          <p:nvPr/>
-        </p:nvSpPr>
-        <p:spPr>
-          <a:xfrm>
-            <a:off x="1554480" y="3520439"/>
-            <a:ext cx="2286000" cy="365760"/>
-          </a:xfrm>
-          <a:prstGeom prst="rect">
-            <a:avLst/>
-          </a:prstGeom>
-          <a:noFill/>
-        </p:spPr>
-        <p:txBody>
-          <a:bodyPr wrap="square">
-            <a:spAutoFit/>
-          </a:bodyPr>
-          <a:lstStyle/>
-          <a:p>
-            <a:pPr algn="l">
-              <a:lnSpc>
-                <a:spcPts val="1650"/>
-              </a:lnSpc>
-              <a:defRPr sz="1100" b="1">
-                <a:solidFill>
-                  <a:srgbClr val="FFFFFF"/>
-                </a:solidFill>
-              </a:defRPr>
-            </a:pPr>
-            <a:r>
-              <a:t>LP</a:t>
-            </a:r>
-          </a:p>
-        </p:txBody>
-      </p:sp>
-      <p:sp>
-        <p:nvSpPr>
-          <p:cNvPr id="6" name="TextBox 5"/>
-          <p:cNvSpPr txBox="1"/>
-          <p:nvPr/>
-        </p:nvSpPr>
-        <p:spPr>
-          <a:xfrm>
-            <a:off x="3840480" y="3520439"/>
-            <a:ext cx="3657600" cy="365760"/>
-          </a:xfrm>
-          <a:prstGeom prst="rect">
-            <a:avLst/>
-          </a:prstGeom>
-          <a:noFill/>
-        </p:spPr>
-        <p:txBody>
-          <a:bodyPr wrap="square">
-            <a:spAutoFit/>
-          </a:bodyPr>
-          <a:lstStyle/>
-          <a:p>
-            <a:pPr algn="l">
-              <a:lnSpc>
-                <a:spcPts val="1500"/>
-              </a:lnSpc>
-              <a:defRPr sz="1000" b="0">
-                <a:solidFill>
-                  <a:srgbClr val="F5D0D5"/>
-                </a:solidFill>
-              </a:defRPr>
-            </a:pPr>
-            <a:r>
-              <a:t>https://mai-san447.github.io/hanasaku-career/</a:t>
-            </a:r>
-          </a:p>
-        </p:txBody>
-      </p:sp>
-      <p:sp>
-        <p:nvSpPr>
-          <p:cNvPr id="7" name="Rectangle 6"/>
-          <p:cNvSpPr/>
-          <p:nvPr/>
-        </p:nvSpPr>
-        <p:spPr>
-          <a:xfrm>
-            <a:off x="1371600" y="4114800"/>
-            <a:ext cx="6400800" cy="502920"/>
-          </a:xfrm>
-          <a:prstGeom prst="rect">
-            <a:avLst/>
-          </a:prstGeom>
-          <a:solidFill>
-            <a:srgbClr val="9A4050"/>
-          </a:solidFill>
-          <a:ln>
-            <a:noFill/>
-          </a:ln>
-        </p:spPr>
-        <p:style>
-          <a:lnRef idx="1">
-            <a:schemeClr val="accent1"/>
-          </a:lnRef>
-          <a:fillRef idx="3">
-            <a:schemeClr val="accent1"/>
-          </a:fillRef>
-          <a:effectRef idx="2">
-            <a:schemeClr val="accent1"/>
-          </a:effectRef>
-          <a:fontRef idx="minor">
-            <a:schemeClr val="lt1"/>
-          </a:fontRef>
-        </p:style>
-        <p:txBody>
-          <a:bodyPr rtlCol="0" anchor="ctr"/>
-          <a:lstStyle/>
-          <a:p>
-            <a:pPr algn="ctr"/>
-          </a:p>
-        </p:txBody>
-      </p:sp>
-      <p:sp>
-        <p:nvSpPr>
-          <p:cNvPr id="8" name="TextBox 7"/>
-          <p:cNvSpPr txBox="1"/>
-          <p:nvPr/>
-        </p:nvSpPr>
-        <p:spPr>
-          <a:xfrm>
-            <a:off x="1554480" y="4160520"/>
-            <a:ext cx="2286000" cy="365760"/>
-          </a:xfrm>
-          <a:prstGeom prst="rect">
-            <a:avLst/>
-          </a:prstGeom>
-          <a:noFill/>
-        </p:spPr>
-        <p:txBody>
-          <a:bodyPr wrap="square">
-            <a:spAutoFit/>
-          </a:bodyPr>
-          <a:lstStyle/>
-          <a:p>
-            <a:pPr algn="l">
-              <a:lnSpc>
-                <a:spcPts val="1650"/>
-              </a:lnSpc>
-              <a:defRPr sz="1100" b="1">
-                <a:solidFill>
-                  <a:srgbClr val="FFFFFF"/>
-                </a:solidFill>
-              </a:defRPr>
-            </a:pPr>
-            <a:r>
-              <a:t>無料相談予約（Googleカレンダー）</a:t>
-            </a:r>
-          </a:p>
-        </p:txBody>
-      </p:sp>
-      <p:sp>
-        <p:nvSpPr>
-          <p:cNvPr id="9" name="TextBox 8"/>
-          <p:cNvSpPr txBox="1"/>
-          <p:nvPr/>
-        </p:nvSpPr>
-        <p:spPr>
-          <a:xfrm>
-            <a:off x="3840480" y="4160520"/>
-            <a:ext cx="3657600" cy="365760"/>
-          </a:xfrm>
-          <a:prstGeom prst="rect">
-            <a:avLst/>
-          </a:prstGeom>
-          <a:noFill/>
-        </p:spPr>
-        <p:txBody>
-          <a:bodyPr wrap="square">
-            <a:spAutoFit/>
-          </a:bodyPr>
-          <a:lstStyle/>
-          <a:p>
-            <a:pPr algn="l">
-              <a:lnSpc>
-                <a:spcPts val="1500"/>
-              </a:lnSpc>
-              <a:defRPr sz="1000" b="0">
-                <a:solidFill>
-                  <a:srgbClr val="F5D0D5"/>
-                </a:solidFill>
-              </a:defRPr>
-            </a:pPr>
-            <a:r>
-              <a:t>https://calendar.app.google/u8SkpMApaMfaRoSx6</a:t>
-            </a:r>
-          </a:p>
-        </p:txBody>
-      </p:sp>
-      <p:sp>
-        <p:nvSpPr>
-          <p:cNvPr id="10" name="Rectangle 9"/>
-          <p:cNvSpPr/>
-          <p:nvPr/>
-        </p:nvSpPr>
-        <p:spPr>
-          <a:xfrm>
-            <a:off x="1371600" y="4754879"/>
-            <a:ext cx="6400800" cy="502920"/>
-          </a:xfrm>
-          <a:prstGeom prst="rect">
-            <a:avLst/>
-          </a:prstGeom>
-          <a:solidFill>
-            <a:srgbClr val="9A4050"/>
-          </a:solidFill>
-          <a:ln>
-            <a:noFill/>
-          </a:ln>
-        </p:spPr>
-        <p:style>
-          <a:lnRef idx="1">
-            <a:schemeClr val="accent1"/>
-          </a:lnRef>
-          <a:fillRef idx="3">
-            <a:schemeClr val="accent1"/>
-          </a:fillRef>
-          <a:effectRef idx="2">
-            <a:schemeClr val="accent1"/>
-          </a:effectRef>
-          <a:fontRef idx="minor">
-            <a:schemeClr val="lt1"/>
-          </a:fontRef>
-        </p:style>
-        <p:txBody>
-          <a:bodyPr rtlCol="0" anchor="ctr"/>
-          <a:lstStyle/>
-          <a:p>
-            <a:pPr algn="ctr"/>
-          </a:p>
-        </p:txBody>
-      </p:sp>
-      <p:sp>
-        <p:nvSpPr>
-          <p:cNvPr id="11" name="TextBox 10"/>
-          <p:cNvSpPr txBox="1"/>
-          <p:nvPr/>
-        </p:nvSpPr>
-        <p:spPr>
-          <a:xfrm>
-            <a:off x="1554480" y="4800599"/>
-            <a:ext cx="2286000" cy="365760"/>
-          </a:xfrm>
-          <a:prstGeom prst="rect">
-            <a:avLst/>
-          </a:prstGeom>
-          <a:noFill/>
-        </p:spPr>
-        <p:txBody>
-          <a:bodyPr wrap="square">
-            <a:spAutoFit/>
-          </a:bodyPr>
-          <a:lstStyle/>
-          <a:p>
-            <a:pPr algn="l">
-              <a:lnSpc>
-                <a:spcPts val="1650"/>
-              </a:lnSpc>
-              <a:defRPr sz="1100" b="1">
-                <a:solidFill>
-                  <a:srgbClr val="FFFFFF"/>
-                </a:solidFill>
-              </a:defRPr>
-            </a:pPr>
-            <a:r>
-              <a:t>LINE公式アカウント</a:t>
-            </a:r>
-          </a:p>
-        </p:txBody>
-      </p:sp>
-      <p:sp>
-        <p:nvSpPr>
-          <p:cNvPr id="12" name="TextBox 11"/>
-          <p:cNvSpPr txBox="1"/>
-          <p:nvPr/>
-        </p:nvSpPr>
-        <p:spPr>
-          <a:xfrm>
-            <a:off x="3840480" y="4800599"/>
-            <a:ext cx="3657600" cy="365760"/>
-          </a:xfrm>
-          <a:prstGeom prst="rect">
-            <a:avLst/>
-          </a:prstGeom>
-          <a:noFill/>
-        </p:spPr>
-        <p:txBody>
-          <a:bodyPr wrap="square">
-            <a:spAutoFit/>
-          </a:bodyPr>
-          <a:lstStyle/>
-          <a:p>
-            <a:pPr algn="l">
-              <a:lnSpc>
-                <a:spcPts val="1500"/>
-              </a:lnSpc>
-              <a:defRPr sz="1000" b="0">
-                <a:solidFill>
-                  <a:srgbClr val="F5D0D5"/>
-                </a:solidFill>
-              </a:defRPr>
-            </a:pPr>
-            <a:r>
-              <a:t>https://lin.ee/qURXYyS</a:t>
-            </a:r>
-          </a:p>
-        </p:txBody>
-      </p:sp>
-      <p:sp>
-        <p:nvSpPr>
-          <p:cNvPr id="13" name="TextBox 12"/>
-          <p:cNvSpPr txBox="1"/>
-          <p:nvPr/>
-        </p:nvSpPr>
-        <p:spPr>
-          <a:xfrm>
-            <a:off x="457200" y="5943600"/>
-            <a:ext cx="8229600" cy="457200"/>
-          </a:xfrm>
-          <a:prstGeom prst="rect">
-            <a:avLst/>
-          </a:prstGeom>
-          <a:noFill/>
-        </p:spPr>
-        <p:txBody>
-          <a:bodyPr wrap="square">
-            <a:spAutoFit/>
-          </a:bodyPr>
-          <a:lstStyle/>
-          <a:p>
-            <a:pPr algn="ctr">
-              <a:lnSpc>
-                <a:spcPts val="1500"/>
-              </a:lnSpc>
-              <a:defRPr sz="1000" b="0">
-                <a:solidFill>
-                  <a:srgbClr val="E8A0A8"/>
-                </a:solidFill>
-              </a:defRPr>
-            </a:pPr>
-            <a:r>
-              <a:t>© 2026 ハナサク / EMKO</a:t>
-            </a:r>
-          </a:p>
-        </p:txBody>
-      </p:sp>
-    </p:spTree>
-  </p:cSld>
-  <p:clrMapOvr>
-    <a:masterClrMapping/>
-  </p:clrMapOvr>
-</p:sld>
-</file>
-
-<file path=ppt/slides/slide2.xml><?xml version="1.0" encoding="utf-8"?>
-<p:sld xmlns:a="http://schemas.openxmlformats.org/drawingml/2006/main" xmlns:p="http://schemas.openxmlformats.org/presentationml/2006/main" xmlns:r="http://schemas.openxmlformats.org/officeDocument/2006/relationships">
-  <p:cSld>
-    <p:bg>
-      <p:bgPr>
-        <a:solidFill>
-          <a:srgbClr val="FFFFFF"/>
-        </a:solidFill>
-        <a:effectLst/>
-      </p:bgPr>
-    </p:bg>
-    <p:spTree>
-      <p:nvGrpSpPr>
-        <p:cNvPr id="1" name=""/>
-        <p:cNvGrpSpPr/>
-        <p:nvPr/>
-      </p:nvGrpSpPr>
-      <p:grpSpPr/>
-      <p:sp>
-        <p:nvSpPr>
-          <p:cNvPr id="2" name="Rectangle 1"/>
-          <p:cNvSpPr/>
-          <p:nvPr/>
-        </p:nvSpPr>
-        <p:spPr>
-          <a:xfrm>
-            <a:off x="0" y="0"/>
-            <a:ext cx="9144000" cy="822960"/>
-          </a:xfrm>
-          <a:prstGeom prst="rect">
-            <a:avLst/>
-          </a:prstGeom>
-          <a:solidFill>
-            <a:srgbClr val="C06070"/>
-          </a:solidFill>
-          <a:ln>
-            <a:noFill/>
-          </a:ln>
-        </p:spPr>
-        <p:style>
-          <a:lnRef idx="1">
-            <a:schemeClr val="accent1"/>
-          </a:lnRef>
-          <a:fillRef idx="3">
-            <a:schemeClr val="accent1"/>
-          </a:fillRef>
-          <a:effectRef idx="2">
-            <a:schemeClr val="accent1"/>
-          </a:effectRef>
-          <a:fontRef idx="minor">
-            <a:schemeClr val="lt1"/>
-          </a:fontRef>
-        </p:style>
-        <p:txBody>
-          <a:bodyPr rtlCol="0" anchor="ctr"/>
-          <a:lstStyle/>
-          <a:p>
-            <a:pPr algn="ctr"/>
-          </a:p>
-        </p:txBody>
-      </p:sp>
-      <p:sp>
-        <p:nvSpPr>
-          <p:cNvPr id="3" name="TextBox 2"/>
-          <p:cNvSpPr txBox="1"/>
-          <p:nvPr/>
-        </p:nvSpPr>
-        <p:spPr>
-          <a:xfrm>
-            <a:off x="457200" y="137160"/>
-            <a:ext cx="8229600" cy="548640"/>
-          </a:xfrm>
-          <a:prstGeom prst="rect">
-            <a:avLst/>
-          </a:prstGeom>
-          <a:noFill/>
-        </p:spPr>
-        <p:txBody>
-          <a:bodyPr wrap="square">
-            <a:spAutoFit/>
-          </a:bodyPr>
-          <a:lstStyle/>
-          <a:p>
-            <a:pPr algn="l">
-              <a:lnSpc>
-                <a:spcPts val="3000"/>
-              </a:lnSpc>
-              <a:defRPr sz="2000" b="1">
-                <a:solidFill>
-                  <a:srgbClr val="FFFFFF"/>
-                </a:solidFill>
-              </a:defRPr>
-            </a:pPr>
-            <a:r>
-              <a:t>サービス概要</a:t>
-            </a:r>
-          </a:p>
-        </p:txBody>
-      </p:sp>
-      <p:sp>
-        <p:nvSpPr>
-          <p:cNvPr id="4" name="TextBox 3"/>
-          <p:cNvSpPr txBox="1"/>
-          <p:nvPr/>
-        </p:nvSpPr>
-        <p:spPr>
-          <a:xfrm>
-            <a:off x="548640" y="1188720"/>
-            <a:ext cx="8046720" cy="2286000"/>
-          </a:xfrm>
-          <a:prstGeom prst="rect">
-            <a:avLst/>
-          </a:prstGeom>
-          <a:noFill/>
-        </p:spPr>
-        <p:txBody>
-          <a:bodyPr wrap="square">
-            <a:spAutoFit/>
-          </a:bodyPr>
-          <a:lstStyle/>
-          <a:p>
-            <a:pPr algn="l">
-              <a:lnSpc>
-                <a:spcPts val="2520"/>
-              </a:lnSpc>
-              <a:defRPr sz="1400" b="0">
-                <a:solidFill>
-                  <a:srgbClr val="3A3A3A"/>
-                </a:solidFill>
-              </a:defRPr>
-            </a:pPr>
-            <a:r>
-              <a:t>「ハナサク」は、福井県の女子学生とその保護者を対象とした</a:t>
-            </a:r>
-          </a:p>
-          <a:p>
-            <a:pPr algn="l">
-              <a:lnSpc>
-                <a:spcPts val="2520"/>
-              </a:lnSpc>
-              <a:defRPr sz="1400" b="0">
-                <a:solidFill>
-                  <a:srgbClr val="3A3A3A"/>
-                </a:solidFill>
-              </a:defRPr>
-            </a:pPr>
-            <a:r>
-              <a:t>オンライン就活伴走コーチングサービスです。</a:t>
-            </a:r>
-          </a:p>
-          <a:p>
-            <a:pPr algn="l">
-              <a:lnSpc>
-                <a:spcPts val="2520"/>
-              </a:lnSpc>
-              <a:defRPr sz="1400" b="0">
-                <a:solidFill>
-                  <a:srgbClr val="3A3A3A"/>
-                </a:solidFill>
-              </a:defRPr>
-            </a:pPr>
-          </a:p>
-          <a:p>
-            <a:pPr algn="l">
-              <a:lnSpc>
-                <a:spcPts val="2520"/>
-              </a:lnSpc>
-              <a:defRPr sz="1400" b="0">
-                <a:solidFill>
-                  <a:srgbClr val="3A3A3A"/>
-                </a:solidFill>
-              </a:defRPr>
-            </a:pPr>
-            <a:r>
-              <a:t>就活塾でもエージェントでもない、あなたの「伴走者」として、</a:t>
-            </a:r>
-          </a:p>
-          <a:p>
-            <a:pPr algn="l">
-              <a:lnSpc>
-                <a:spcPts val="2520"/>
-              </a:lnSpc>
-              <a:defRPr sz="1400" b="0">
-                <a:solidFill>
-                  <a:srgbClr val="3A3A3A"/>
-                </a:solidFill>
-              </a:defRPr>
-            </a:pPr>
-            <a:r>
-              <a:t>面接対策から親御さんへの進捗レポートまで一貫してサポートします。</a:t>
-            </a:r>
-          </a:p>
-        </p:txBody>
-      </p:sp>
-      <p:sp>
-        <p:nvSpPr>
-          <p:cNvPr id="5" name="Rectangle 4"/>
-          <p:cNvSpPr/>
-          <p:nvPr/>
-        </p:nvSpPr>
-        <p:spPr>
-          <a:xfrm>
-            <a:off x="548640" y="3657600"/>
-            <a:ext cx="3657600" cy="2011680"/>
-          </a:xfrm>
-          <a:prstGeom prst="rect">
-            <a:avLst/>
-          </a:prstGeom>
-          <a:solidFill>
-            <a:srgbClr val="F5E6EA"/>
-          </a:solidFill>
-          <a:ln>
-            <a:noFill/>
-          </a:ln>
-        </p:spPr>
-        <p:style>
-          <a:lnRef idx="1">
-            <a:schemeClr val="accent1"/>
-          </a:lnRef>
-          <a:fillRef idx="3">
-            <a:schemeClr val="accent1"/>
-          </a:fillRef>
-          <a:effectRef idx="2">
-            <a:schemeClr val="accent1"/>
-          </a:effectRef>
-          <a:fontRef idx="minor">
-            <a:schemeClr val="lt1"/>
-          </a:fontRef>
-        </p:style>
-        <p:txBody>
-          <a:bodyPr rtlCol="0" anchor="ctr"/>
-          <a:lstStyle/>
-          <a:p>
-            <a:pPr algn="ctr"/>
-          </a:p>
-        </p:txBody>
-      </p:sp>
-      <p:sp>
-        <p:nvSpPr>
-          <p:cNvPr id="6" name="TextBox 5"/>
-          <p:cNvSpPr txBox="1"/>
-          <p:nvPr/>
-        </p:nvSpPr>
-        <p:spPr>
-          <a:xfrm>
-            <a:off x="822960" y="3840480"/>
-            <a:ext cx="3108960" cy="457200"/>
-          </a:xfrm>
-          <a:prstGeom prst="rect">
-            <a:avLst/>
-          </a:prstGeom>
-          <a:noFill/>
-        </p:spPr>
-        <p:txBody>
-          <a:bodyPr wrap="square">
-            <a:spAutoFit/>
-          </a:bodyPr>
-          <a:lstStyle/>
-          <a:p>
-            <a:pPr algn="l">
-              <a:lnSpc>
-                <a:spcPts val="2100"/>
-              </a:lnSpc>
-              <a:defRPr sz="1400" b="1">
-                <a:solidFill>
-                  <a:srgbClr val="9A4050"/>
-                </a:solidFill>
-              </a:defRPr>
-            </a:pPr>
-            <a:r>
-              <a:t>就活伴走コーチング</a:t>
-            </a:r>
-          </a:p>
-        </p:txBody>
-      </p:sp>
-      <p:sp>
-        <p:nvSpPr>
-          <p:cNvPr id="7" name="TextBox 6"/>
-          <p:cNvSpPr txBox="1"/>
-          <p:nvPr/>
-        </p:nvSpPr>
-        <p:spPr>
-          <a:xfrm>
-            <a:off x="822960" y="4389120"/>
-            <a:ext cx="3108960" cy="1097280"/>
-          </a:xfrm>
-          <a:prstGeom prst="rect">
-            <a:avLst/>
-          </a:prstGeom>
-          <a:noFill/>
-        </p:spPr>
-        <p:txBody>
-          <a:bodyPr wrap="square">
-            <a:spAutoFit/>
-          </a:bodyPr>
-          <a:lstStyle/>
-          <a:p>
-            <a:pPr algn="l">
-              <a:lnSpc>
-                <a:spcPts val="1980"/>
-              </a:lnSpc>
-              <a:defRPr sz="1100" b="0">
-                <a:solidFill>
-                  <a:srgbClr val="3A3A3A"/>
-                </a:solidFill>
-              </a:defRPr>
-            </a:pPr>
-            <a:r>
-              <a:t>対象: 女子学生 + 保護者</a:t>
-            </a:r>
-          </a:p>
-          <a:p>
-            <a:pPr algn="l">
-              <a:lnSpc>
-                <a:spcPts val="1980"/>
-              </a:lnSpc>
-              <a:defRPr sz="1100" b="0">
-                <a:solidFill>
-                  <a:srgbClr val="3A3A3A"/>
-                </a:solidFill>
-              </a:defRPr>
-            </a:pPr>
-            <a:r>
-              <a:t>形式: オンライン面談（30分）</a:t>
-            </a:r>
-          </a:p>
-          <a:p>
-            <a:pPr algn="l">
-              <a:lnSpc>
-                <a:spcPts val="1980"/>
-              </a:lnSpc>
-              <a:defRPr sz="1100" b="0">
-                <a:solidFill>
-                  <a:srgbClr val="3A3A3A"/>
-                </a:solidFill>
-              </a:defRPr>
-            </a:pPr>
-            <a:r>
-              <a:t>LINE質問対応・月次レポート</a:t>
-            </a:r>
-          </a:p>
-        </p:txBody>
-      </p:sp>
-      <p:sp>
-        <p:nvSpPr>
-          <p:cNvPr id="8" name="Rectangle 7"/>
-          <p:cNvSpPr/>
-          <p:nvPr/>
-        </p:nvSpPr>
-        <p:spPr>
-          <a:xfrm>
-            <a:off x="4937760" y="3657600"/>
-            <a:ext cx="3657600" cy="2011680"/>
-          </a:xfrm>
-          <a:prstGeom prst="rect">
-            <a:avLst/>
-          </a:prstGeom>
-          <a:solidFill>
-            <a:srgbClr val="F5E6EA"/>
-          </a:solidFill>
-          <a:ln>
-            <a:noFill/>
-          </a:ln>
-        </p:spPr>
-        <p:style>
-          <a:lnRef idx="1">
-            <a:schemeClr val="accent1"/>
-          </a:lnRef>
-          <a:fillRef idx="3">
-            <a:schemeClr val="accent1"/>
-          </a:fillRef>
-          <a:effectRef idx="2">
-            <a:schemeClr val="accent1"/>
-          </a:effectRef>
-          <a:fontRef idx="minor">
-            <a:schemeClr val="lt1"/>
-          </a:fontRef>
-        </p:style>
-        <p:txBody>
-          <a:bodyPr rtlCol="0" anchor="ctr"/>
-          <a:lstStyle/>
-          <a:p>
-            <a:pPr algn="ctr"/>
-          </a:p>
-        </p:txBody>
-      </p:sp>
-      <p:sp>
-        <p:nvSpPr>
-          <p:cNvPr id="9" name="TextBox 8"/>
-          <p:cNvSpPr txBox="1"/>
-          <p:nvPr/>
-        </p:nvSpPr>
-        <p:spPr>
-          <a:xfrm>
-            <a:off x="5212080" y="3840480"/>
-            <a:ext cx="3108960" cy="457200"/>
-          </a:xfrm>
-          <a:prstGeom prst="rect">
-            <a:avLst/>
-          </a:prstGeom>
-          <a:noFill/>
-        </p:spPr>
-        <p:txBody>
-          <a:bodyPr wrap="square">
-            <a:spAutoFit/>
-          </a:bodyPr>
-          <a:lstStyle/>
-          <a:p>
-            <a:pPr algn="l">
-              <a:lnSpc>
-                <a:spcPts val="2100"/>
-              </a:lnSpc>
-              <a:defRPr sz="1400" b="1">
-                <a:solidFill>
-                  <a:srgbClr val="9A4050"/>
-                </a:solidFill>
-              </a:defRPr>
-            </a:pPr>
-            <a:r>
-              <a:t>女性リーダー向けメンタリング</a:t>
-            </a:r>
-          </a:p>
-        </p:txBody>
-      </p:sp>
-      <p:sp>
-        <p:nvSpPr>
-          <p:cNvPr id="10" name="TextBox 9"/>
-          <p:cNvSpPr txBox="1"/>
-          <p:nvPr/>
-        </p:nvSpPr>
-        <p:spPr>
-          <a:xfrm>
-            <a:off x="5212080" y="4389120"/>
-            <a:ext cx="3108960" cy="1097280"/>
-          </a:xfrm>
-          <a:prstGeom prst="rect">
-            <a:avLst/>
-          </a:prstGeom>
-          <a:noFill/>
-        </p:spPr>
-        <p:txBody>
-          <a:bodyPr wrap="square">
-            <a:spAutoFit/>
-          </a:bodyPr>
-          <a:lstStyle/>
-          <a:p>
-            <a:pPr algn="l">
-              <a:lnSpc>
-                <a:spcPts val="1980"/>
-              </a:lnSpc>
-              <a:defRPr sz="1100" b="0">
-                <a:solidFill>
-                  <a:srgbClr val="3A3A3A"/>
-                </a:solidFill>
-              </a:defRPr>
-            </a:pPr>
-            <a:r>
-              <a:t>対象: 管理職・リーダー候補の女性</a:t>
-            </a:r>
-          </a:p>
-          <a:p>
-            <a:pPr algn="l">
-              <a:lnSpc>
-                <a:spcPts val="1980"/>
-              </a:lnSpc>
-              <a:defRPr sz="1100" b="0">
-                <a:solidFill>
-                  <a:srgbClr val="3A3A3A"/>
-                </a:solidFill>
-              </a:defRPr>
-            </a:pPr>
-            <a:r>
-              <a:t>形式: オンライン1on1（45分）</a:t>
-            </a:r>
-          </a:p>
-          <a:p>
-            <a:pPr algn="l">
-              <a:lnSpc>
-                <a:spcPts val="1980"/>
-              </a:lnSpc>
-              <a:defRPr sz="1100" b="0">
-                <a:solidFill>
-                  <a:srgbClr val="3A3A3A"/>
-                </a:solidFill>
-              </a:defRPr>
-            </a:pPr>
-            <a:r>
-              <a:t>キャリア相談・壁打ち</a:t>
-            </a:r>
-          </a:p>
-        </p:txBody>
-      </p:sp>
-    </p:spTree>
-  </p:cSld>
-  <p:clrMapOvr>
-    <a:masterClrMapping/>
-  </p:clrMapOvr>
-</p:sld>
-</file>
-
-<file path=ppt/slides/slide3.xml><?xml version="1.0" encoding="utf-8"?>
-<p:sld xmlns:a="http://schemas.openxmlformats.org/drawingml/2006/main" xmlns:p="http://schemas.openxmlformats.org/presentationml/2006/main" xmlns:r="http://schemas.openxmlformats.org/officeDocument/2006/relationships">
-  <p:cSld>
-    <p:bg>
-      <p:bgPr>
-        <a:solidFill>
-          <a:srgbClr val="FFFFFF"/>
-        </a:solidFill>
-        <a:effectLst/>
-      </p:bgPr>
-    </p:bg>
-    <p:spTree>
-      <p:nvGrpSpPr>
-        <p:cNvPr id="1" name=""/>
-        <p:cNvGrpSpPr/>
-        <p:nvPr/>
-      </p:nvGrpSpPr>
-      <p:grpSpPr/>
-      <p:sp>
-        <p:nvSpPr>
-          <p:cNvPr id="2" name="Rectangle 1"/>
-          <p:cNvSpPr/>
-          <p:nvPr/>
-        </p:nvSpPr>
-        <p:spPr>
-          <a:xfrm>
-            <a:off x="0" y="0"/>
-            <a:ext cx="9144000" cy="822960"/>
-          </a:xfrm>
-          <a:prstGeom prst="rect">
-            <a:avLst/>
-          </a:prstGeom>
-          <a:solidFill>
-            <a:srgbClr val="C06070"/>
-          </a:solidFill>
-          <a:ln>
-            <a:noFill/>
-          </a:ln>
-        </p:spPr>
-        <p:style>
-          <a:lnRef idx="1">
-            <a:schemeClr val="accent1"/>
-          </a:lnRef>
-          <a:fillRef idx="3">
-            <a:schemeClr val="accent1"/>
-          </a:fillRef>
-          <a:effectRef idx="2">
-            <a:schemeClr val="accent1"/>
-          </a:effectRef>
-          <a:fontRef idx="minor">
-            <a:schemeClr val="lt1"/>
-          </a:fontRef>
-        </p:style>
-        <p:txBody>
-          <a:bodyPr rtlCol="0" anchor="ctr"/>
-          <a:lstStyle/>
-          <a:p>
-            <a:pPr algn="ctr"/>
-          </a:p>
-        </p:txBody>
-      </p:sp>
-      <p:sp>
-        <p:nvSpPr>
-          <p:cNvPr id="3" name="TextBox 2"/>
-          <p:cNvSpPr txBox="1"/>
-          <p:nvPr/>
-        </p:nvSpPr>
-        <p:spPr>
-          <a:xfrm>
-            <a:off x="457200" y="137160"/>
-            <a:ext cx="8229600" cy="548640"/>
-          </a:xfrm>
-          <a:prstGeom prst="rect">
-            <a:avLst/>
-          </a:prstGeom>
-          <a:noFill/>
-        </p:spPr>
-        <p:txBody>
-          <a:bodyPr wrap="square">
-            <a:spAutoFit/>
-          </a:bodyPr>
-          <a:lstStyle/>
-          <a:p>
-            <a:pPr algn="l">
-              <a:lnSpc>
-                <a:spcPts val="3000"/>
-              </a:lnSpc>
-              <a:defRPr sz="2000" b="1">
-                <a:solidFill>
-                  <a:srgbClr val="FFFFFF"/>
-                </a:solidFill>
-              </a:defRPr>
-            </a:pPr>
-            <a:r>
-              <a:t>こんな悩み、ありませんか？</a:t>
-            </a:r>
-          </a:p>
-        </p:txBody>
-      </p:sp>
-      <p:sp>
-        <p:nvSpPr>
-          <p:cNvPr id="4" name="Rectangle 3"/>
-          <p:cNvSpPr/>
-          <p:nvPr/>
-        </p:nvSpPr>
-        <p:spPr>
-          <a:xfrm>
-            <a:off x="365760" y="1097280"/>
-            <a:ext cx="3931920" cy="2377440"/>
-          </a:xfrm>
-          <a:prstGeom prst="rect">
-            <a:avLst/>
-          </a:prstGeom>
-          <a:solidFill>
-            <a:srgbClr val="FDF0F2"/>
-          </a:solidFill>
-          <a:ln>
-            <a:noFill/>
-          </a:ln>
-        </p:spPr>
-        <p:style>
-          <a:lnRef idx="1">
-            <a:schemeClr val="accent1"/>
-          </a:lnRef>
-          <a:fillRef idx="3">
-            <a:schemeClr val="accent1"/>
-          </a:fillRef>
-          <a:effectRef idx="2">
-            <a:schemeClr val="accent1"/>
-          </a:effectRef>
-          <a:fontRef idx="minor">
-            <a:schemeClr val="lt1"/>
-          </a:fontRef>
-        </p:style>
-        <p:txBody>
-          <a:bodyPr rtlCol="0" anchor="ctr"/>
-          <a:lstStyle/>
-          <a:p>
-            <a:pPr algn="ctr"/>
-          </a:p>
-        </p:txBody>
-      </p:sp>
-      <p:sp>
-        <p:nvSpPr>
-          <p:cNvPr id="5" name="TextBox 4"/>
-          <p:cNvSpPr txBox="1"/>
-          <p:nvPr/>
-        </p:nvSpPr>
-        <p:spPr>
-          <a:xfrm>
-            <a:off x="548640" y="1234440"/>
-            <a:ext cx="3566160" cy="365760"/>
-          </a:xfrm>
-          <a:prstGeom prst="rect">
-            <a:avLst/>
-          </a:prstGeom>
-          <a:noFill/>
-        </p:spPr>
-        <p:txBody>
-          <a:bodyPr wrap="square">
-            <a:spAutoFit/>
-          </a:bodyPr>
-          <a:lstStyle/>
-          <a:p>
-            <a:pPr algn="l">
-              <a:lnSpc>
-                <a:spcPts val="1950"/>
-              </a:lnSpc>
-              <a:defRPr sz="1300" b="1">
-                <a:solidFill>
-                  <a:srgbClr val="C06070"/>
-                </a:solidFill>
-              </a:defRPr>
-            </a:pPr>
-            <a:r>
-              <a:t>学生さん</a:t>
-            </a:r>
-          </a:p>
-        </p:txBody>
-      </p:sp>
-      <p:sp>
-        <p:nvSpPr>
-          <p:cNvPr id="6" name="TextBox 5"/>
-          <p:cNvSpPr txBox="1"/>
-          <p:nvPr/>
-        </p:nvSpPr>
-        <p:spPr>
-          <a:xfrm>
-            <a:off x="548640" y="1645920"/>
-            <a:ext cx="3566160" cy="1828800"/>
-          </a:xfrm>
-          <a:prstGeom prst="rect">
-            <a:avLst/>
-          </a:prstGeom>
-          <a:noFill/>
-        </p:spPr>
-        <p:txBody>
-          <a:bodyPr wrap="square">
-            <a:spAutoFit/>
-          </a:bodyPr>
-          <a:lstStyle/>
-          <a:p>
-            <a:pPr algn="l">
-              <a:lnSpc>
-                <a:spcPts val="1980"/>
-              </a:lnSpc>
-              <a:defRPr sz="1100" b="0">
-                <a:solidFill>
-                  <a:srgbClr val="3A3A3A"/>
-                </a:solidFill>
-              </a:defRPr>
-            </a:pPr>
-            <a:r>
-              <a:t>・キャリアセンターの面談が表面的</a:t>
-            </a:r>
-          </a:p>
-          <a:p>
-            <a:pPr algn="l">
-              <a:lnSpc>
-                <a:spcPts val="1980"/>
-              </a:lnSpc>
-              <a:defRPr sz="1100" b="0">
-                <a:solidFill>
-                  <a:srgbClr val="3A3A3A"/>
-                </a:solidFill>
-              </a:defRPr>
-            </a:pPr>
-            <a:r>
-              <a:t>・東京の就活塾は高すぎて通えない</a:t>
-            </a:r>
-          </a:p>
-          <a:p>
-            <a:pPr algn="l">
-              <a:lnSpc>
-                <a:spcPts val="1980"/>
-              </a:lnSpc>
-              <a:defRPr sz="1100" b="0">
-                <a:solidFill>
-                  <a:srgbClr val="3A3A3A"/>
-                </a:solidFill>
-              </a:defRPr>
-            </a:pPr>
-            <a:r>
-              <a:t>・面接で「結婚は？」と聞かれたら…</a:t>
-            </a:r>
-          </a:p>
-          <a:p>
-            <a:pPr algn="l">
-              <a:lnSpc>
-                <a:spcPts val="1980"/>
-              </a:lnSpc>
-              <a:defRPr sz="1100" b="0">
-                <a:solidFill>
-                  <a:srgbClr val="3A3A3A"/>
-                </a:solidFill>
-              </a:defRPr>
-            </a:pPr>
-            <a:r>
-              <a:t>・地元に残るか東京に出るか相談できない</a:t>
-            </a:r>
-          </a:p>
-        </p:txBody>
-      </p:sp>
-      <p:sp>
-        <p:nvSpPr>
-          <p:cNvPr id="7" name="Rectangle 6"/>
-          <p:cNvSpPr/>
-          <p:nvPr/>
-        </p:nvSpPr>
-        <p:spPr>
-          <a:xfrm>
-            <a:off x="4846320" y="1097280"/>
-            <a:ext cx="3931920" cy="2377440"/>
-          </a:xfrm>
-          <a:prstGeom prst="rect">
-            <a:avLst/>
-          </a:prstGeom>
-          <a:solidFill>
-            <a:srgbClr val="E6F0EA"/>
-          </a:solidFill>
-          <a:ln>
-            <a:noFill/>
-          </a:ln>
-        </p:spPr>
-        <p:style>
-          <a:lnRef idx="1">
-            <a:schemeClr val="accent1"/>
-          </a:lnRef>
-          <a:fillRef idx="3">
-            <a:schemeClr val="accent1"/>
-          </a:fillRef>
-          <a:effectRef idx="2">
-            <a:schemeClr val="accent1"/>
-          </a:effectRef>
-          <a:fontRef idx="minor">
-            <a:schemeClr val="lt1"/>
-          </a:fontRef>
-        </p:style>
-        <p:txBody>
-          <a:bodyPr rtlCol="0" anchor="ctr"/>
-          <a:lstStyle/>
-          <a:p>
-            <a:pPr algn="ctr"/>
-          </a:p>
-        </p:txBody>
-      </p:sp>
-      <p:sp>
-        <p:nvSpPr>
-          <p:cNvPr id="8" name="TextBox 7"/>
-          <p:cNvSpPr txBox="1"/>
-          <p:nvPr/>
-        </p:nvSpPr>
-        <p:spPr>
-          <a:xfrm>
-            <a:off x="5029200" y="1234440"/>
-            <a:ext cx="3566160" cy="365760"/>
-          </a:xfrm>
-          <a:prstGeom prst="rect">
-            <a:avLst/>
-          </a:prstGeom>
-          <a:noFill/>
-        </p:spPr>
-        <p:txBody>
-          <a:bodyPr wrap="square">
-            <a:spAutoFit/>
-          </a:bodyPr>
-          <a:lstStyle/>
-          <a:p>
-            <a:pPr algn="l">
-              <a:lnSpc>
-                <a:spcPts val="1950"/>
-              </a:lnSpc>
-              <a:defRPr sz="1300" b="1">
-                <a:solidFill>
-                  <a:srgbClr val="5A7A6A"/>
-                </a:solidFill>
-              </a:defRPr>
-            </a:pPr>
-            <a:r>
-              <a:t>親御さん</a:t>
-            </a:r>
-          </a:p>
-        </p:txBody>
-      </p:sp>
-      <p:sp>
-        <p:nvSpPr>
-          <p:cNvPr id="9" name="TextBox 8"/>
-          <p:cNvSpPr txBox="1"/>
-          <p:nvPr/>
-        </p:nvSpPr>
-        <p:spPr>
-          <a:xfrm>
-            <a:off x="5029200" y="1645920"/>
-            <a:ext cx="3566160" cy="1828800"/>
-          </a:xfrm>
-          <a:prstGeom prst="rect">
-            <a:avLst/>
-          </a:prstGeom>
-          <a:noFill/>
-        </p:spPr>
-        <p:txBody>
-          <a:bodyPr wrap="square">
-            <a:spAutoFit/>
-          </a:bodyPr>
-          <a:lstStyle/>
-          <a:p>
-            <a:pPr algn="l">
-              <a:lnSpc>
-                <a:spcPts val="1980"/>
-              </a:lnSpc>
-              <a:defRPr sz="1100" b="0">
-                <a:solidFill>
-                  <a:srgbClr val="3A3A3A"/>
-                </a:solidFill>
-              </a:defRPr>
-            </a:pPr>
-            <a:r>
-              <a:t>・子供の就活状況が見えず不安</a:t>
-            </a:r>
-          </a:p>
-          <a:p>
-            <a:pPr algn="l">
-              <a:lnSpc>
-                <a:spcPts val="1980"/>
-              </a:lnSpc>
-              <a:defRPr sz="1100" b="0">
-                <a:solidFill>
-                  <a:srgbClr val="3A3A3A"/>
-                </a:solidFill>
-              </a:defRPr>
-            </a:pPr>
-            <a:r>
-              <a:t>・自分たちの時代と就活が違いすぎる</a:t>
-            </a:r>
-          </a:p>
-          <a:p>
-            <a:pPr algn="l">
-              <a:lnSpc>
-                <a:spcPts val="1980"/>
-              </a:lnSpc>
-              <a:defRPr sz="1100" b="0">
-                <a:solidFill>
-                  <a:srgbClr val="3A3A3A"/>
-                </a:solidFill>
-              </a:defRPr>
-            </a:pPr>
-            <a:r>
-              <a:t>・キャリアセンターだけで大丈夫？</a:t>
-            </a:r>
-          </a:p>
-          <a:p>
-            <a:pPr algn="l">
-              <a:lnSpc>
-                <a:spcPts val="1980"/>
-              </a:lnSpc>
-              <a:defRPr sz="1100" b="0">
-                <a:solidFill>
-                  <a:srgbClr val="3A3A3A"/>
-                </a:solidFill>
-              </a:defRPr>
-            </a:pPr>
-            <a:r>
-              <a:t>・「オヤカク」文化、どう関わるべき？</a:t>
-            </a:r>
-          </a:p>
-        </p:txBody>
-      </p:sp>
-      <p:sp>
-        <p:nvSpPr>
-          <p:cNvPr id="10" name="Rectangle 9"/>
-          <p:cNvSpPr/>
-          <p:nvPr/>
-        </p:nvSpPr>
-        <p:spPr>
-          <a:xfrm>
-            <a:off x="365760" y="3840480"/>
-            <a:ext cx="8412480" cy="2011680"/>
-          </a:xfrm>
-          <a:prstGeom prst="rect">
-            <a:avLst/>
-          </a:prstGeom>
-          <a:solidFill>
-            <a:srgbClr val="F0E8F5"/>
-          </a:solidFill>
-          <a:ln>
-            <a:noFill/>
-          </a:ln>
-        </p:spPr>
-        <p:style>
-          <a:lnRef idx="1">
-            <a:schemeClr val="accent1"/>
-          </a:lnRef>
-          <a:fillRef idx="3">
-            <a:schemeClr val="accent1"/>
-          </a:fillRef>
-          <a:effectRef idx="2">
-            <a:schemeClr val="accent1"/>
-          </a:effectRef>
-          <a:fontRef idx="minor">
-            <a:schemeClr val="lt1"/>
-          </a:fontRef>
-        </p:style>
-        <p:txBody>
-          <a:bodyPr rtlCol="0" anchor="ctr"/>
-          <a:lstStyle/>
-          <a:p>
-            <a:pPr algn="ctr"/>
-          </a:p>
-        </p:txBody>
-      </p:sp>
-      <p:sp>
-        <p:nvSpPr>
-          <p:cNvPr id="11" name="TextBox 10"/>
-          <p:cNvSpPr txBox="1"/>
-          <p:nvPr/>
-        </p:nvSpPr>
-        <p:spPr>
-          <a:xfrm>
-            <a:off x="548640" y="3977639"/>
-            <a:ext cx="8046720" cy="365760"/>
-          </a:xfrm>
-          <a:prstGeom prst="rect">
-            <a:avLst/>
-          </a:prstGeom>
-          <a:noFill/>
-        </p:spPr>
-        <p:txBody>
-          <a:bodyPr wrap="square">
-            <a:spAutoFit/>
-          </a:bodyPr>
-          <a:lstStyle/>
-          <a:p>
-            <a:pPr algn="l">
-              <a:lnSpc>
-                <a:spcPts val="1950"/>
-              </a:lnSpc>
-              <a:defRPr sz="1300" b="1">
-                <a:solidFill>
-                  <a:srgbClr val="7A5A8A"/>
-                </a:solidFill>
-              </a:defRPr>
-            </a:pPr>
-            <a:r>
-              <a:t>女性リーダー</a:t>
-            </a:r>
-          </a:p>
-        </p:txBody>
-      </p:sp>
-      <p:sp>
-        <p:nvSpPr>
-          <p:cNvPr id="12" name="TextBox 11"/>
-          <p:cNvSpPr txBox="1"/>
-          <p:nvPr/>
-        </p:nvSpPr>
-        <p:spPr>
-          <a:xfrm>
-            <a:off x="548640" y="4389120"/>
-            <a:ext cx="3657600" cy="1371600"/>
-          </a:xfrm>
-          <a:prstGeom prst="rect">
-            <a:avLst/>
-          </a:prstGeom>
-          <a:noFill/>
-        </p:spPr>
-        <p:txBody>
-          <a:bodyPr wrap="square">
-            <a:spAutoFit/>
-          </a:bodyPr>
-          <a:lstStyle/>
-          <a:p>
-            <a:pPr algn="l">
-              <a:lnSpc>
-                <a:spcPts val="1980"/>
-              </a:lnSpc>
-              <a:defRPr sz="1100" b="0">
-                <a:solidFill>
-                  <a:srgbClr val="3A3A3A"/>
-                </a:solidFill>
-              </a:defRPr>
-            </a:pPr>
-            <a:r>
-              <a:t>・管理職になったが相談相手がいない</a:t>
-            </a:r>
-          </a:p>
-          <a:p>
-            <a:pPr algn="l">
-              <a:lnSpc>
-                <a:spcPts val="1980"/>
-              </a:lnSpc>
-              <a:defRPr sz="1100" b="0">
-                <a:solidFill>
-                  <a:srgbClr val="3A3A3A"/>
-                </a:solidFill>
-              </a:defRPr>
-            </a:pPr>
-            <a:r>
-              <a:t>・チームマネジメントや社内政治で壁を感じる</a:t>
-            </a:r>
-          </a:p>
-        </p:txBody>
-      </p:sp>
-      <p:sp>
-        <p:nvSpPr>
-          <p:cNvPr id="13" name="TextBox 12"/>
-          <p:cNvSpPr txBox="1"/>
-          <p:nvPr/>
-        </p:nvSpPr>
-        <p:spPr>
-          <a:xfrm>
-            <a:off x="4572000" y="4389120"/>
-            <a:ext cx="3657600" cy="1371600"/>
-          </a:xfrm>
-          <a:prstGeom prst="rect">
-            <a:avLst/>
-          </a:prstGeom>
-          <a:noFill/>
-        </p:spPr>
-        <p:txBody>
-          <a:bodyPr wrap="square">
-            <a:spAutoFit/>
-          </a:bodyPr>
-          <a:lstStyle/>
-          <a:p>
-            <a:pPr algn="l">
-              <a:lnSpc>
-                <a:spcPts val="1980"/>
-              </a:lnSpc>
-              <a:defRPr sz="1100" b="0">
-                <a:solidFill>
-                  <a:srgbClr val="3A3A3A"/>
-                </a:solidFill>
-              </a:defRPr>
-            </a:pPr>
-            <a:r>
-              <a:t>・仕事とライフイベントの両立に悩んでいる</a:t>
-            </a:r>
-          </a:p>
-          <a:p>
-            <a:pPr algn="l">
-              <a:lnSpc>
-                <a:spcPts val="1980"/>
-              </a:lnSpc>
-              <a:defRPr sz="1100" b="0">
-                <a:solidFill>
-                  <a:srgbClr val="3A3A3A"/>
-                </a:solidFill>
-              </a:defRPr>
-            </a:pPr>
-            <a:r>
-              <a:t>・女性リーダーとしてのロールモデルが少ない</a:t>
-            </a:r>
-          </a:p>
-        </p:txBody>
-      </p:sp>
-    </p:spTree>
-  </p:cSld>
-  <p:clrMapOvr>
-    <a:masterClrMapping/>
-  </p:clrMapOvr>
-</p:sld>
-</file>
-
-<file path=ppt/slides/slide4.xml><?xml version="1.0" encoding="utf-8"?>
-<p:sld xmlns:a="http://schemas.openxmlformats.org/drawingml/2006/main" xmlns:p="http://schemas.openxmlformats.org/presentationml/2006/main" xmlns:r="http://schemas.openxmlformats.org/officeDocument/2006/relationships">
-  <p:cSld>
-    <p:bg>
-      <p:bgPr>
-        <a:solidFill>
-          <a:srgbClr val="FFFFFF"/>
-        </a:solidFill>
-        <a:effectLst/>
-      </p:bgPr>
-    </p:bg>
-    <p:spTree>
-      <p:nvGrpSpPr>
-        <p:cNvPr id="1" name=""/>
-        <p:cNvGrpSpPr/>
-        <p:nvPr/>
-      </p:nvGrpSpPr>
-      <p:grpSpPr/>
-      <p:sp>
-        <p:nvSpPr>
-          <p:cNvPr id="2" name="Rectangle 1"/>
-          <p:cNvSpPr/>
-          <p:nvPr/>
-        </p:nvSpPr>
-        <p:spPr>
-          <a:xfrm>
-            <a:off x="0" y="0"/>
-            <a:ext cx="9144000" cy="822960"/>
-          </a:xfrm>
-          <a:prstGeom prst="rect">
-            <a:avLst/>
-          </a:prstGeom>
-          <a:solidFill>
-            <a:srgbClr val="C06070"/>
-          </a:solidFill>
-          <a:ln>
-            <a:noFill/>
-          </a:ln>
-        </p:spPr>
-        <p:style>
-          <a:lnRef idx="1">
-            <a:schemeClr val="accent1"/>
-          </a:lnRef>
-          <a:fillRef idx="3">
-            <a:schemeClr val="accent1"/>
-          </a:fillRef>
-          <a:effectRef idx="2">
-            <a:schemeClr val="accent1"/>
-          </a:effectRef>
-          <a:fontRef idx="minor">
-            <a:schemeClr val="lt1"/>
-          </a:fontRef>
-        </p:style>
-        <p:txBody>
-          <a:bodyPr rtlCol="0" anchor="ctr"/>
-          <a:lstStyle/>
-          <a:p>
-            <a:pPr algn="ctr"/>
-          </a:p>
-        </p:txBody>
-      </p:sp>
-      <p:sp>
-        <p:nvSpPr>
-          <p:cNvPr id="3" name="TextBox 2"/>
-          <p:cNvSpPr txBox="1"/>
-          <p:nvPr/>
-        </p:nvSpPr>
-        <p:spPr>
-          <a:xfrm>
-            <a:off x="457200" y="137160"/>
-            <a:ext cx="8229600" cy="548640"/>
-          </a:xfrm>
-          <a:prstGeom prst="rect">
-            <a:avLst/>
-          </a:prstGeom>
-          <a:noFill/>
-        </p:spPr>
-        <p:txBody>
-          <a:bodyPr wrap="square">
-            <a:spAutoFit/>
-          </a:bodyPr>
-          <a:lstStyle/>
-          <a:p>
-            <a:pPr algn="l">
-              <a:lnSpc>
-                <a:spcPts val="3000"/>
-              </a:lnSpc>
-              <a:defRPr sz="2000" b="1">
-                <a:solidFill>
-                  <a:srgbClr val="FFFFFF"/>
-                </a:solidFill>
-              </a:defRPr>
-            </a:pPr>
-            <a:r>
-              <a:t>ハナサクの3つの特徴</a:t>
-            </a:r>
-          </a:p>
-        </p:txBody>
-      </p:sp>
-      <p:sp>
-        <p:nvSpPr>
-          <p:cNvPr id="4" name="Oval 3"/>
-          <p:cNvSpPr/>
-          <p:nvPr/>
-        </p:nvSpPr>
-        <p:spPr>
-          <a:xfrm>
-            <a:off x="1188720" y="1097280"/>
-            <a:ext cx="640080" cy="640080"/>
-          </a:xfrm>
-          <a:prstGeom prst="ellipse">
-            <a:avLst/>
-          </a:prstGeom>
-          <a:solidFill>
-            <a:srgbClr val="C06070"/>
-          </a:solidFill>
-          <a:ln>
-            <a:noFill/>
-          </a:ln>
-        </p:spPr>
-        <p:style>
-          <a:lnRef idx="1">
-            <a:schemeClr val="accent1"/>
-          </a:lnRef>
-          <a:fillRef idx="3">
-            <a:schemeClr val="accent1"/>
-          </a:fillRef>
-          <a:effectRef idx="2">
-            <a:schemeClr val="accent1"/>
-          </a:effectRef>
-          <a:fontRef idx="minor">
-            <a:schemeClr val="lt1"/>
-          </a:fontRef>
-        </p:style>
-        <p:txBody>
-          <a:bodyPr rtlCol="0" anchor="ctr"/>
-          <a:lstStyle/>
-          <a:p>
-            <a:pPr algn="ctr">
-              <a:defRPr sz="1800" b="1">
-                <a:solidFill>
-                  <a:srgbClr val="FFFFFF"/>
-                </a:solidFill>
-              </a:defRPr>
-            </a:pPr>
-            <a:r>
-              <a:t>01</a:t>
-            </a:r>
-          </a:p>
-        </p:txBody>
-      </p:sp>
-      <p:sp>
-        <p:nvSpPr>
-          <p:cNvPr id="5" name="TextBox 4"/>
-          <p:cNvSpPr txBox="1"/>
-          <p:nvPr/>
-        </p:nvSpPr>
-        <p:spPr>
-          <a:xfrm>
-            <a:off x="365760" y="2011680"/>
-            <a:ext cx="2560320" cy="822960"/>
-          </a:xfrm>
-          <a:prstGeom prst="rect">
-            <a:avLst/>
-          </a:prstGeom>
-          <a:noFill/>
-        </p:spPr>
-        <p:txBody>
-          <a:bodyPr wrap="square">
-            <a:spAutoFit/>
-          </a:bodyPr>
-          <a:lstStyle/>
-          <a:p>
-            <a:pPr algn="ctr">
-              <a:lnSpc>
-                <a:spcPts val="1950"/>
-              </a:lnSpc>
-              <a:defRPr sz="1300" b="1">
-                <a:solidFill>
-                  <a:srgbClr val="9A4050"/>
-                </a:solidFill>
-              </a:defRPr>
-            </a:pPr>
-            <a:r>
-              <a:t>福井出身コーチによる</a:t>
-            </a:r>
-            <a:br/>
-            <a:r>
-              <a:t>1on1面談</a:t>
-            </a:r>
-          </a:p>
-        </p:txBody>
-      </p:sp>
-      <p:sp>
-        <p:nvSpPr>
-          <p:cNvPr id="6" name="TextBox 5"/>
-          <p:cNvSpPr txBox="1"/>
-          <p:nvPr/>
-        </p:nvSpPr>
-        <p:spPr>
-          <a:xfrm>
-            <a:off x="365760" y="3017520"/>
-            <a:ext cx="2560320" cy="2743200"/>
-          </a:xfrm>
-          <a:prstGeom prst="rect">
-            <a:avLst/>
-          </a:prstGeom>
-          <a:noFill/>
-        </p:spPr>
-        <p:txBody>
-          <a:bodyPr wrap="square">
-            <a:spAutoFit/>
-          </a:bodyPr>
-          <a:lstStyle/>
-          <a:p>
-            <a:pPr algn="ctr">
-              <a:lnSpc>
-                <a:spcPts val="1800"/>
-              </a:lnSpc>
-              <a:defRPr sz="1000" b="0">
-                <a:solidFill>
-                  <a:srgbClr val="3A3A3A"/>
-                </a:solidFill>
-              </a:defRPr>
-            </a:pPr>
-            <a:r>
-              <a:t>福井県出身・高志高校卒のコーチが、</a:t>
-            </a:r>
-            <a:br/>
-            <a:r>
-              <a:t>地元の空気感を理解した上で</a:t>
-            </a:r>
-            <a:br/>
-            <a:r>
-              <a:t>あなたの言葉を引き出します。</a:t>
-            </a:r>
-            <a:br/>
-            <a:r>
-              <a:t>オンライン（Google Meet）で全国対応。</a:t>
-            </a:r>
-          </a:p>
-        </p:txBody>
-      </p:sp>
-      <p:sp>
-        <p:nvSpPr>
-          <p:cNvPr id="7" name="Oval 6"/>
-          <p:cNvSpPr/>
-          <p:nvPr/>
-        </p:nvSpPr>
-        <p:spPr>
-          <a:xfrm>
-            <a:off x="4023360" y="1097280"/>
-            <a:ext cx="640080" cy="640080"/>
-          </a:xfrm>
-          <a:prstGeom prst="ellipse">
-            <a:avLst/>
-          </a:prstGeom>
-          <a:solidFill>
-            <a:srgbClr val="C06070"/>
-          </a:solidFill>
-          <a:ln>
-            <a:noFill/>
-          </a:ln>
-        </p:spPr>
-        <p:style>
-          <a:lnRef idx="1">
-            <a:schemeClr val="accent1"/>
-          </a:lnRef>
-          <a:fillRef idx="3">
-            <a:schemeClr val="accent1"/>
-          </a:fillRef>
-          <a:effectRef idx="2">
-            <a:schemeClr val="accent1"/>
-          </a:effectRef>
-          <a:fontRef idx="minor">
-            <a:schemeClr val="lt1"/>
-          </a:fontRef>
-        </p:style>
-        <p:txBody>
-          <a:bodyPr rtlCol="0" anchor="ctr"/>
-          <a:lstStyle/>
-          <a:p>
-            <a:pPr algn="ctr">
-              <a:defRPr sz="1800" b="1">
-                <a:solidFill>
-                  <a:srgbClr val="FFFFFF"/>
-                </a:solidFill>
-              </a:defRPr>
-            </a:pPr>
-            <a:r>
-              <a:t>02</a:t>
-            </a:r>
-          </a:p>
-        </p:txBody>
-      </p:sp>
-      <p:sp>
-        <p:nvSpPr>
-          <p:cNvPr id="8" name="TextBox 7"/>
-          <p:cNvSpPr txBox="1"/>
-          <p:nvPr/>
-        </p:nvSpPr>
-        <p:spPr>
-          <a:xfrm>
-            <a:off x="3200400" y="2011680"/>
-            <a:ext cx="2560320" cy="822960"/>
-          </a:xfrm>
-          <a:prstGeom prst="rect">
-            <a:avLst/>
-          </a:prstGeom>
-          <a:noFill/>
-        </p:spPr>
-        <p:txBody>
-          <a:bodyPr wrap="square">
-            <a:spAutoFit/>
-          </a:bodyPr>
-          <a:lstStyle/>
-          <a:p>
-            <a:pPr algn="ctr">
-              <a:lnSpc>
-                <a:spcPts val="1950"/>
-              </a:lnSpc>
-              <a:defRPr sz="1300" b="1">
-                <a:solidFill>
-                  <a:srgbClr val="9A4050"/>
-                </a:solidFill>
-              </a:defRPr>
-            </a:pPr>
-            <a:r>
-              <a:t>親子で安心の</a:t>
-            </a:r>
-            <a:br/>
-            <a:r>
-              <a:t>伴走型サポート</a:t>
-            </a:r>
-          </a:p>
-        </p:txBody>
-      </p:sp>
-      <p:sp>
-        <p:nvSpPr>
-          <p:cNvPr id="9" name="TextBox 8"/>
-          <p:cNvSpPr txBox="1"/>
-          <p:nvPr/>
-        </p:nvSpPr>
-        <p:spPr>
-          <a:xfrm>
-            <a:off x="3200400" y="3017520"/>
-            <a:ext cx="2560320" cy="2743200"/>
-          </a:xfrm>
-          <a:prstGeom prst="rect">
-            <a:avLst/>
-          </a:prstGeom>
-          <a:noFill/>
-        </p:spPr>
-        <p:txBody>
-          <a:bodyPr wrap="square">
-            <a:spAutoFit/>
-          </a:bodyPr>
-          <a:lstStyle/>
-          <a:p>
-            <a:pPr algn="ctr">
-              <a:lnSpc>
-                <a:spcPts val="1800"/>
-              </a:lnSpc>
-              <a:defRPr sz="1000" b="0">
-                <a:solidFill>
-                  <a:srgbClr val="3A3A3A"/>
-                </a:solidFill>
-              </a:defRPr>
-            </a:pPr>
-            <a:r>
-              <a:t>長期プランでは親御さんへの</a:t>
-            </a:r>
-            <a:br/>
-            <a:r>
-              <a:t>月次レポートを標準提供。</a:t>
-            </a:r>
-            <a:br/>
-            <a:r>
-              <a:t>お子さんの成長・計画・お願い事項を</a:t>
-            </a:r>
-            <a:br/>
-            <a:r>
-              <a:t>お伝えします。プライバシーは厳守。</a:t>
-            </a:r>
-          </a:p>
-        </p:txBody>
-      </p:sp>
-      <p:sp>
-        <p:nvSpPr>
-          <p:cNvPr id="10" name="Oval 9"/>
-          <p:cNvSpPr/>
-          <p:nvPr/>
-        </p:nvSpPr>
-        <p:spPr>
-          <a:xfrm>
-            <a:off x="6858000" y="1097280"/>
-            <a:ext cx="640080" cy="640080"/>
-          </a:xfrm>
-          <a:prstGeom prst="ellipse">
-            <a:avLst/>
-          </a:prstGeom>
-          <a:solidFill>
-            <a:srgbClr val="C06070"/>
-          </a:solidFill>
-          <a:ln>
-            <a:noFill/>
-          </a:ln>
-        </p:spPr>
-        <p:style>
-          <a:lnRef idx="1">
-            <a:schemeClr val="accent1"/>
-          </a:lnRef>
-          <a:fillRef idx="3">
-            <a:schemeClr val="accent1"/>
-          </a:fillRef>
-          <a:effectRef idx="2">
-            <a:schemeClr val="accent1"/>
-          </a:effectRef>
-          <a:fontRef idx="minor">
-            <a:schemeClr val="lt1"/>
-          </a:fontRef>
-        </p:style>
-        <p:txBody>
-          <a:bodyPr rtlCol="0" anchor="ctr"/>
-          <a:lstStyle/>
-          <a:p>
-            <a:pPr algn="ctr">
-              <a:defRPr sz="1800" b="1">
-                <a:solidFill>
-                  <a:srgbClr val="FFFFFF"/>
-                </a:solidFill>
-              </a:defRPr>
-            </a:pPr>
-            <a:r>
-              <a:t>03</a:t>
-            </a:r>
-          </a:p>
-        </p:txBody>
-      </p:sp>
-      <p:sp>
-        <p:nvSpPr>
-          <p:cNvPr id="11" name="TextBox 10"/>
-          <p:cNvSpPr txBox="1"/>
-          <p:nvPr/>
-        </p:nvSpPr>
-        <p:spPr>
-          <a:xfrm>
-            <a:off x="6035040" y="2011680"/>
-            <a:ext cx="2560320" cy="822960"/>
-          </a:xfrm>
-          <a:prstGeom prst="rect">
-            <a:avLst/>
-          </a:prstGeom>
-          <a:noFill/>
-        </p:spPr>
-        <p:txBody>
-          <a:bodyPr wrap="square">
-            <a:spAutoFit/>
-          </a:bodyPr>
-          <a:lstStyle/>
-          <a:p>
-            <a:pPr algn="ctr">
-              <a:lnSpc>
-                <a:spcPts val="1950"/>
-              </a:lnSpc>
-              <a:defRPr sz="1300" b="1">
-                <a:solidFill>
-                  <a:srgbClr val="9A4050"/>
-                </a:solidFill>
-              </a:defRPr>
-            </a:pPr>
-            <a:r>
-              <a:t>女子学生専門</a:t>
-            </a:r>
-            <a:br/>
-            <a:r>
-              <a:t>だからできること</a:t>
-            </a:r>
-          </a:p>
-        </p:txBody>
-      </p:sp>
-      <p:sp>
-        <p:nvSpPr>
-          <p:cNvPr id="12" name="TextBox 11"/>
-          <p:cNvSpPr txBox="1"/>
-          <p:nvPr/>
-        </p:nvSpPr>
-        <p:spPr>
-          <a:xfrm>
-            <a:off x="6035040" y="3017520"/>
-            <a:ext cx="2560320" cy="2743200"/>
-          </a:xfrm>
-          <a:prstGeom prst="rect">
-            <a:avLst/>
-          </a:prstGeom>
-          <a:noFill/>
-        </p:spPr>
-        <p:txBody>
-          <a:bodyPr wrap="square">
-            <a:spAutoFit/>
-          </a:bodyPr>
-          <a:lstStyle/>
-          <a:p>
-            <a:pPr algn="ctr">
-              <a:lnSpc>
-                <a:spcPts val="1800"/>
-              </a:lnSpc>
-              <a:defRPr sz="1000" b="0">
-                <a:solidFill>
-                  <a:srgbClr val="3A3A3A"/>
-                </a:solidFill>
-              </a:defRPr>
-            </a:pPr>
-            <a:r>
-              <a:t>社外メンター経験を活かし、</a:t>
-            </a:r>
-            <a:br/>
-            <a:r>
-              <a:t>女子学生特有の悩みに寄り添います。</a:t>
-            </a:r>
-            <a:br/>
-            <a:r>
-              <a:t>外見への言及、ライフプランへの圧、</a:t>
-            </a:r>
-            <a:br/>
-            <a:r>
-              <a:t>自己主張への抵抗感にも対応。</a:t>
-            </a:r>
-          </a:p>
-        </p:txBody>
-      </p:sp>
-    </p:spTree>
-  </p:cSld>
-  <p:clrMapOvr>
-    <a:masterClrMapping/>
-  </p:clrMapOvr>
-</p:sld>
-</file>
-
-<file path=ppt/slides/slide5.xml><?xml version="1.0" encoding="utf-8"?>
-<p:sld xmlns:a="http://schemas.openxmlformats.org/drawingml/2006/main" xmlns:p="http://schemas.openxmlformats.org/presentationml/2006/main" xmlns:r="http://schemas.openxmlformats.org/officeDocument/2006/relationships">
-  <p:cSld>
-    <p:bg>
-      <p:bgPr>
-        <a:solidFill>
-          <a:srgbClr val="FFFFFF"/>
-        </a:solidFill>
-        <a:effectLst/>
-      </p:bgPr>
-    </p:bg>
-    <p:spTree>
-      <p:nvGrpSpPr>
-        <p:cNvPr id="1" name=""/>
-        <p:cNvGrpSpPr/>
-        <p:nvPr/>
-      </p:nvGrpSpPr>
-      <p:grpSpPr/>
-      <p:sp>
-        <p:nvSpPr>
-          <p:cNvPr id="2" name="Rectangle 1"/>
-          <p:cNvSpPr/>
-          <p:nvPr/>
-        </p:nvSpPr>
-        <p:spPr>
-          <a:xfrm>
-            <a:off x="0" y="0"/>
-            <a:ext cx="9144000" cy="822960"/>
-          </a:xfrm>
-          <a:prstGeom prst="rect">
-            <a:avLst/>
-          </a:prstGeom>
-          <a:solidFill>
-            <a:srgbClr val="C06070"/>
-          </a:solidFill>
-          <a:ln>
-            <a:noFill/>
-          </a:ln>
-        </p:spPr>
-        <p:style>
-          <a:lnRef idx="1">
-            <a:schemeClr val="accent1"/>
-          </a:lnRef>
-          <a:fillRef idx="3">
-            <a:schemeClr val="accent1"/>
-          </a:fillRef>
-          <a:effectRef idx="2">
-            <a:schemeClr val="accent1"/>
-          </a:effectRef>
-          <a:fontRef idx="minor">
-            <a:schemeClr val="lt1"/>
-          </a:fontRef>
-        </p:style>
-        <p:txBody>
-          <a:bodyPr rtlCol="0" anchor="ctr"/>
-          <a:lstStyle/>
-          <a:p>
-            <a:pPr algn="ctr"/>
-          </a:p>
-        </p:txBody>
-      </p:sp>
-      <p:sp>
-        <p:nvSpPr>
-          <p:cNvPr id="3" name="TextBox 2"/>
-          <p:cNvSpPr txBox="1"/>
-          <p:nvPr/>
-        </p:nvSpPr>
-        <p:spPr>
-          <a:xfrm>
-            <a:off x="457200" y="137160"/>
-            <a:ext cx="8229600" cy="548640"/>
-          </a:xfrm>
-          <a:prstGeom prst="rect">
-            <a:avLst/>
-          </a:prstGeom>
-          <a:noFill/>
-        </p:spPr>
-        <p:txBody>
-          <a:bodyPr wrap="square">
-            <a:spAutoFit/>
-          </a:bodyPr>
-          <a:lstStyle/>
-          <a:p>
-            <a:pPr algn="l">
-              <a:lnSpc>
-                <a:spcPts val="3000"/>
-              </a:lnSpc>
-              <a:defRPr sz="2000" b="1">
-                <a:solidFill>
-                  <a:srgbClr val="FFFFFF"/>
-                </a:solidFill>
-              </a:defRPr>
-            </a:pPr>
-            <a:r>
-              <a:t>料金プラン｜就活伴走コーチング（30分/回）</a:t>
-            </a:r>
-          </a:p>
-        </p:txBody>
-      </p:sp>
       <p:graphicFrame>
         <p:nvGraphicFramePr>
           <p:cNvPr id="4" name="Table 3"/>
@@ -5703,8 +4346,8 @@
           <p:nvPr/>
         </p:nvGraphicFramePr>
         <p:xfrm>
-          <a:off x="365760" y="1097280"/>
-          <a:ext cx="7955280" cy="1828800"/>
+          <a:off x="457200" y="1188720"/>
+          <a:ext cx="8229600" cy="1828800"/>
         </p:xfrm>
         <a:graphic>
           <a:graphicData uri="http://schemas.openxmlformats.org/drawingml/2006/table">
@@ -5713,10 +4356,10 @@
                 <a:tableStyleId>{5C22544A-7EE6-4342-B048-85BDC9FD1C3A}</a:tableStyleId>
               </a:tblPr>
               <a:tblGrid>
-                <a:gridCol w="1828800"/>
-                <a:gridCol w="1371600"/>
-                <a:gridCol w="3383280"/>
-                <a:gridCol w="1371600"/>
+                <a:gridCol w="2057400"/>
+                <a:gridCol w="2057400"/>
+                <a:gridCol w="2057400"/>
+                <a:gridCol w="2057400"/>
               </a:tblGrid>
               <a:tr h="365760">
                 <a:tc>
@@ -5724,8 +4367,8 @@
                     <a:bodyPr/>
                     <a:lstStyle/>
                     <a:p>
-                      <a:pPr algn="ctr">
-                        <a:defRPr sz="1000" b="1">
+                      <a:pPr>
+                        <a:defRPr sz="1100" b="1">
                           <a:solidFill>
                             <a:srgbClr val="FFFFFF"/>
                           </a:solidFill>
@@ -5738,7 +4381,7 @@
                   </a:txBody>
                   <a:tcPr>
                     <a:solidFill>
-                      <a:srgbClr val="C06070"/>
+                      <a:srgbClr val="5A2030"/>
                     </a:solidFill>
                   </a:tcPr>
                 </a:tc>
@@ -5747,8 +4390,8 @@
                     <a:bodyPr/>
                     <a:lstStyle/>
                     <a:p>
-                      <a:pPr algn="ctr">
-                        <a:defRPr sz="1000" b="1">
+                      <a:pPr>
+                        <a:defRPr sz="1100" b="1">
                           <a:solidFill>
                             <a:srgbClr val="FFFFFF"/>
                           </a:solidFill>
@@ -5761,7 +4404,7 @@
                   </a:txBody>
                   <a:tcPr>
                     <a:solidFill>
-                      <a:srgbClr val="C06070"/>
+                      <a:srgbClr val="5A2030"/>
                     </a:solidFill>
                   </a:tcPr>
                 </a:tc>
@@ -5770,8 +4413,8 @@
                     <a:bodyPr/>
                     <a:lstStyle/>
                     <a:p>
-                      <a:pPr algn="ctr">
-                        <a:defRPr sz="1000" b="1">
+                      <a:pPr>
+                        <a:defRPr sz="1100" b="1">
                           <a:solidFill>
                             <a:srgbClr val="FFFFFF"/>
                           </a:solidFill>
@@ -5784,7 +4427,7 @@
                   </a:txBody>
                   <a:tcPr>
                     <a:solidFill>
-                      <a:srgbClr val="C06070"/>
+                      <a:srgbClr val="5A2030"/>
                     </a:solidFill>
                   </a:tcPr>
                 </a:tc>
@@ -5793,8 +4436,8 @@
                     <a:bodyPr/>
                     <a:lstStyle/>
                     <a:p>
-                      <a:pPr algn="ctr">
-                        <a:defRPr sz="1000" b="1">
+                      <a:pPr>
+                        <a:defRPr sz="1100" b="1">
                           <a:solidFill>
                             <a:srgbClr val="FFFFFF"/>
                           </a:solidFill>
@@ -5807,7 +4450,7 @@
                   </a:txBody>
                   <a:tcPr>
                     <a:solidFill>
-                      <a:srgbClr val="C06070"/>
+                      <a:srgbClr val="5A2030"/>
                     </a:solidFill>
                   </a:tcPr>
                 </a:tc>
@@ -5818,10 +4461,10 @@
                     <a:bodyPr/>
                     <a:lstStyle/>
                     <a:p>
-                      <a:pPr algn="l">
-                        <a:defRPr sz="900">
+                      <a:pPr>
+                        <a:defRPr sz="1000">
                           <a:solidFill>
-                            <a:srgbClr val="3A3A3A"/>
+                            <a:srgbClr val="333333"/>
                           </a:solidFill>
                         </a:defRPr>
                       </a:pPr>
@@ -5841,10 +4484,10 @@
                     <a:bodyPr/>
                     <a:lstStyle/>
                     <a:p>
-                      <a:pPr algn="ctr">
-                        <a:defRPr sz="900">
+                      <a:pPr>
+                        <a:defRPr sz="1000">
                           <a:solidFill>
-                            <a:srgbClr val="3A3A3A"/>
+                            <a:srgbClr val="333333"/>
                           </a:solidFill>
                         </a:defRPr>
                       </a:pPr>
@@ -5864,10 +4507,10 @@
                     <a:bodyPr/>
                     <a:lstStyle/>
                     <a:p>
-                      <a:pPr algn="ctr">
-                        <a:defRPr sz="900">
+                      <a:pPr>
+                        <a:defRPr sz="1000">
                           <a:solidFill>
-                            <a:srgbClr val="3A3A3A"/>
+                            <a:srgbClr val="333333"/>
                           </a:solidFill>
                         </a:defRPr>
                       </a:pPr>
@@ -5887,10 +4530,10 @@
                     <a:bodyPr/>
                     <a:lstStyle/>
                     <a:p>
-                      <a:pPr algn="ctr">
-                        <a:defRPr sz="900">
+                      <a:pPr>
+                        <a:defRPr sz="1000">
                           <a:solidFill>
-                            <a:srgbClr val="3A3A3A"/>
+                            <a:srgbClr val="333333"/>
                           </a:solidFill>
                         </a:defRPr>
                       </a:pPr>
@@ -5912,10 +4555,10 @@
                     <a:bodyPr/>
                     <a:lstStyle/>
                     <a:p>
-                      <a:pPr algn="l">
-                        <a:defRPr sz="900">
+                      <a:pPr>
+                        <a:defRPr sz="1000">
                           <a:solidFill>
-                            <a:srgbClr val="3A3A3A"/>
+                            <a:srgbClr val="333333"/>
                           </a:solidFill>
                         </a:defRPr>
                       </a:pPr>
@@ -5924,21 +4567,17 @@
                       </a:r>
                     </a:p>
                   </a:txBody>
-                  <a:tcPr>
-                    <a:solidFill>
-                      <a:srgbClr val="FFFFFF"/>
-                    </a:solidFill>
-                  </a:tcPr>
+                  <a:tcPr/>
                 </a:tc>
                 <a:tc>
                   <a:txBody>
                     <a:bodyPr/>
                     <a:lstStyle/>
                     <a:p>
-                      <a:pPr algn="ctr">
-                        <a:defRPr sz="900">
+                      <a:pPr>
+                        <a:defRPr sz="1000">
                           <a:solidFill>
-                            <a:srgbClr val="3A3A3A"/>
+                            <a:srgbClr val="333333"/>
                           </a:solidFill>
                         </a:defRPr>
                       </a:pPr>
@@ -5947,21 +4586,17 @@
                       </a:r>
                     </a:p>
                   </a:txBody>
-                  <a:tcPr>
-                    <a:solidFill>
-                      <a:srgbClr val="FFFFFF"/>
-                    </a:solidFill>
-                  </a:tcPr>
+                  <a:tcPr/>
                 </a:tc>
                 <a:tc>
                   <a:txBody>
                     <a:bodyPr/>
                     <a:lstStyle/>
                     <a:p>
-                      <a:pPr algn="ctr">
-                        <a:defRPr sz="900">
+                      <a:pPr>
+                        <a:defRPr sz="1000">
                           <a:solidFill>
-                            <a:srgbClr val="3A3A3A"/>
+                            <a:srgbClr val="333333"/>
                           </a:solidFill>
                         </a:defRPr>
                       </a:pPr>
@@ -5970,21 +4605,17 @@
                       </a:r>
                     </a:p>
                   </a:txBody>
-                  <a:tcPr>
-                    <a:solidFill>
-                      <a:srgbClr val="FFFFFF"/>
-                    </a:solidFill>
-                  </a:tcPr>
+                  <a:tcPr/>
                 </a:tc>
                 <a:tc>
                   <a:txBody>
                     <a:bodyPr/>
                     <a:lstStyle/>
                     <a:p>
-                      <a:pPr algn="ctr">
-                        <a:defRPr sz="900">
+                      <a:pPr>
+                        <a:defRPr sz="1000">
                           <a:solidFill>
-                            <a:srgbClr val="3A3A3A"/>
+                            <a:srgbClr val="333333"/>
                           </a:solidFill>
                         </a:defRPr>
                       </a:pPr>
@@ -5993,11 +4624,7 @@
                       </a:r>
                     </a:p>
                   </a:txBody>
-                  <a:tcPr>
-                    <a:solidFill>
-                      <a:srgbClr val="FFFFFF"/>
-                    </a:solidFill>
-                  </a:tcPr>
+                  <a:tcPr/>
                 </a:tc>
               </a:tr>
               <a:tr h="365760">
@@ -6006,10 +4633,10 @@
                     <a:bodyPr/>
                     <a:lstStyle/>
                     <a:p>
-                      <a:pPr algn="l">
-                        <a:defRPr sz="900">
+                      <a:pPr>
+                        <a:defRPr sz="1000">
                           <a:solidFill>
-                            <a:srgbClr val="3A3A3A"/>
+                            <a:srgbClr val="333333"/>
                           </a:solidFill>
                         </a:defRPr>
                       </a:pPr>
@@ -6029,10 +4656,10 @@
                     <a:bodyPr/>
                     <a:lstStyle/>
                     <a:p>
-                      <a:pPr algn="ctr">
-                        <a:defRPr sz="900">
+                      <a:pPr>
+                        <a:defRPr sz="1000">
                           <a:solidFill>
-                            <a:srgbClr val="3A3A3A"/>
+                            <a:srgbClr val="333333"/>
                           </a:solidFill>
                         </a:defRPr>
                       </a:pPr>
@@ -6052,10 +4679,10 @@
                     <a:bodyPr/>
                     <a:lstStyle/>
                     <a:p>
-                      <a:pPr algn="ctr">
-                        <a:defRPr sz="900">
+                      <a:pPr>
+                        <a:defRPr sz="1000">
                           <a:solidFill>
-                            <a:srgbClr val="3A3A3A"/>
+                            <a:srgbClr val="333333"/>
                           </a:solidFill>
                         </a:defRPr>
                       </a:pPr>
@@ -6075,10 +4702,10 @@
                     <a:bodyPr/>
                     <a:lstStyle/>
                     <a:p>
-                      <a:pPr algn="ctr">
-                        <a:defRPr sz="900">
+                      <a:pPr>
+                        <a:defRPr sz="1000">
                           <a:solidFill>
-                            <a:srgbClr val="3A3A3A"/>
+                            <a:srgbClr val="333333"/>
                           </a:solidFill>
                         </a:defRPr>
                       </a:pPr>
@@ -6100,10 +4727,10 @@
                     <a:bodyPr/>
                     <a:lstStyle/>
                     <a:p>
-                      <a:pPr algn="l">
-                        <a:defRPr sz="900">
+                      <a:pPr>
+                        <a:defRPr sz="1000">
                           <a:solidFill>
-                            <a:srgbClr val="3A3A3A"/>
+                            <a:srgbClr val="333333"/>
                           </a:solidFill>
                         </a:defRPr>
                       </a:pPr>
@@ -6112,21 +4739,17 @@
                       </a:r>
                     </a:p>
                   </a:txBody>
-                  <a:tcPr>
-                    <a:solidFill>
-                      <a:srgbClr val="FFFFFF"/>
-                    </a:solidFill>
-                  </a:tcPr>
+                  <a:tcPr/>
                 </a:tc>
                 <a:tc>
                   <a:txBody>
                     <a:bodyPr/>
                     <a:lstStyle/>
                     <a:p>
-                      <a:pPr algn="ctr">
-                        <a:defRPr sz="900">
+                      <a:pPr>
+                        <a:defRPr sz="1000">
                           <a:solidFill>
-                            <a:srgbClr val="3A3A3A"/>
+                            <a:srgbClr val="333333"/>
                           </a:solidFill>
                         </a:defRPr>
                       </a:pPr>
@@ -6135,21 +4758,17 @@
                       </a:r>
                     </a:p>
                   </a:txBody>
-                  <a:tcPr>
-                    <a:solidFill>
-                      <a:srgbClr val="FFFFFF"/>
-                    </a:solidFill>
-                  </a:tcPr>
+                  <a:tcPr/>
                 </a:tc>
                 <a:tc>
                   <a:txBody>
                     <a:bodyPr/>
                     <a:lstStyle/>
                     <a:p>
-                      <a:pPr algn="ctr">
-                        <a:defRPr sz="900">
+                      <a:pPr>
+                        <a:defRPr sz="1000">
                           <a:solidFill>
-                            <a:srgbClr val="3A3A3A"/>
+                            <a:srgbClr val="333333"/>
                           </a:solidFill>
                         </a:defRPr>
                       </a:pPr>
@@ -6158,21 +4777,17 @@
                       </a:r>
                     </a:p>
                   </a:txBody>
-                  <a:tcPr>
-                    <a:solidFill>
-                      <a:srgbClr val="FFFFFF"/>
-                    </a:solidFill>
-                  </a:tcPr>
+                  <a:tcPr/>
                 </a:tc>
                 <a:tc>
                   <a:txBody>
                     <a:bodyPr/>
                     <a:lstStyle/>
                     <a:p>
-                      <a:pPr algn="ctr">
-                        <a:defRPr sz="900">
+                      <a:pPr>
+                        <a:defRPr sz="1000">
                           <a:solidFill>
-                            <a:srgbClr val="3A3A3A"/>
+                            <a:srgbClr val="333333"/>
                           </a:solidFill>
                         </a:defRPr>
                       </a:pPr>
@@ -6181,11 +4796,7 @@
                       </a:r>
                     </a:p>
                   </a:txBody>
-                  <a:tcPr>
-                    <a:solidFill>
-                      <a:srgbClr val="FFFFFF"/>
-                    </a:solidFill>
-                  </a:tcPr>
+                  <a:tcPr/>
                 </a:tc>
               </a:tr>
             </a:tbl>
@@ -6203,14 +4814,6 @@
 <file path=ppt/slides/slide6.xml><?xml version="1.0" encoding="utf-8"?>
 <p:sld xmlns:a="http://schemas.openxmlformats.org/drawingml/2006/main" xmlns:p="http://schemas.openxmlformats.org/presentationml/2006/main" xmlns:r="http://schemas.openxmlformats.org/officeDocument/2006/relationships">
   <p:cSld>
-    <p:bg>
-      <p:bgPr>
-        <a:solidFill>
-          <a:srgbClr val="FFFFFF"/>
-        </a:solidFill>
-        <a:effectLst/>
-      </p:bgPr>
-    </p:bg>
     <p:spTree>
       <p:nvGrpSpPr>
         <p:cNvPr id="1" name=""/>
@@ -6220,20 +4823,55 @@
       <p:grpSpPr/>
       <p:sp>
         <p:nvSpPr>
-          <p:cNvPr id="2" name="Rectangle 1"/>
-          <p:cNvSpPr/>
+          <p:cNvPr id="2" name="TextBox 1"/>
+          <p:cNvSpPr txBox="1"/>
           <p:nvPr/>
         </p:nvSpPr>
         <p:spPr>
           <a:xfrm>
             <a:off x="0" y="0"/>
-            <a:ext cx="9144000" cy="822960"/>
+            <a:ext cx="9144000" cy="914400"/>
+          </a:xfrm>
+          <a:prstGeom prst="rect">
+            <a:avLst/>
+          </a:prstGeom>
+          <a:noFill/>
+        </p:spPr>
+        <p:txBody>
+          <a:bodyPr wrap="none">
+            <a:spAutoFit/>
+          </a:bodyPr>
+          <a:lstStyle/>
+          <a:p>
+            <a:pPr>
+              <a:defRPr sz="2200" b="1">
+                <a:solidFill>
+                  <a:srgbClr val="5A2030"/>
+                </a:solidFill>
+              </a:defRPr>
+            </a:pPr>
+            <a:r>
+              <a:t>  料金プラン｜女性リーダー向けメンタリング（45分/回）</a:t>
+            </a:r>
+          </a:p>
+        </p:txBody>
+      </p:sp>
+      <p:sp>
+        <p:nvSpPr>
+          <p:cNvPr id="3" name="Rectangle 2"/>
+          <p:cNvSpPr/>
+          <p:nvPr/>
+        </p:nvSpPr>
+        <p:spPr>
+          <a:xfrm>
+            <a:off x="457200" y="868680"/>
+            <a:ext cx="8229600" cy="27432"/>
           </a:xfrm>
           <a:prstGeom prst="rect">
             <a:avLst/>
           </a:prstGeom>
           <a:solidFill>
-            <a:srgbClr val="C06070"/>
+            <a:srgbClr val="5A2030"/>
           </a:solidFill>
           <a:ln>
             <a:noFill/>
@@ -6261,44 +4899,6 @@
           </a:p>
         </p:txBody>
       </p:sp>
-      <p:sp>
-        <p:nvSpPr>
-          <p:cNvPr id="3" name="TextBox 2"/>
-          <p:cNvSpPr txBox="1"/>
-          <p:nvPr/>
-        </p:nvSpPr>
-        <p:spPr>
-          <a:xfrm>
-            <a:off x="457200" y="137160"/>
-            <a:ext cx="8229600" cy="548640"/>
-          </a:xfrm>
-          <a:prstGeom prst="rect">
-            <a:avLst/>
-          </a:prstGeom>
-          <a:noFill/>
-        </p:spPr>
-        <p:txBody>
-          <a:bodyPr wrap="square">
-            <a:spAutoFit/>
-          </a:bodyPr>
-          <a:lstStyle/>
-          <a:p>
-            <a:pPr algn="l">
-              <a:lnSpc>
-                <a:spcPts val="3000"/>
-              </a:lnSpc>
-              <a:defRPr sz="2000" b="1">
-                <a:solidFill>
-                  <a:srgbClr val="FFFFFF"/>
-                </a:solidFill>
-              </a:defRPr>
-            </a:pPr>
-            <a:r>
-              <a:t>料金プラン｜女性リーダー向けメンタリング（45分/回）</a:t>
-            </a:r>
-          </a:p>
-        </p:txBody>
-      </p:sp>
       <p:graphicFrame>
         <p:nvGraphicFramePr>
           <p:cNvPr id="4" name="Table 3"/>
@@ -6308,8 +4908,8 @@
           <p:nvPr/>
         </p:nvGraphicFramePr>
         <p:xfrm>
-          <a:off x="365760" y="1097280"/>
-          <a:ext cx="7955280" cy="1097280"/>
+          <a:off x="457200" y="1188720"/>
+          <a:ext cx="8229600" cy="1097280"/>
         </p:xfrm>
         <a:graphic>
           <a:graphicData uri="http://schemas.openxmlformats.org/drawingml/2006/table">
@@ -6318,10 +4918,10 @@
                 <a:tableStyleId>{5C22544A-7EE6-4342-B048-85BDC9FD1C3A}</a:tableStyleId>
               </a:tblPr>
               <a:tblGrid>
-                <a:gridCol w="1828800"/>
-                <a:gridCol w="1371600"/>
-                <a:gridCol w="3383280"/>
-                <a:gridCol w="1371600"/>
+                <a:gridCol w="2057400"/>
+                <a:gridCol w="2057400"/>
+                <a:gridCol w="2057400"/>
+                <a:gridCol w="2057400"/>
               </a:tblGrid>
               <a:tr h="365760">
                 <a:tc>
@@ -6329,8 +4929,8 @@
                     <a:bodyPr/>
                     <a:lstStyle/>
                     <a:p>
-                      <a:pPr algn="ctr">
-                        <a:defRPr sz="1000" b="1">
+                      <a:pPr>
+                        <a:defRPr sz="1100" b="1">
                           <a:solidFill>
                             <a:srgbClr val="FFFFFF"/>
                           </a:solidFill>
@@ -6343,7 +4943,7 @@
                   </a:txBody>
                   <a:tcPr>
                     <a:solidFill>
-                      <a:srgbClr val="C06070"/>
+                      <a:srgbClr val="5A2030"/>
                     </a:solidFill>
                   </a:tcPr>
                 </a:tc>
@@ -6352,8 +4952,8 @@
                     <a:bodyPr/>
                     <a:lstStyle/>
                     <a:p>
-                      <a:pPr algn="ctr">
-                        <a:defRPr sz="1000" b="1">
+                      <a:pPr>
+                        <a:defRPr sz="1100" b="1">
                           <a:solidFill>
                             <a:srgbClr val="FFFFFF"/>
                           </a:solidFill>
@@ -6366,7 +4966,7 @@
                   </a:txBody>
                   <a:tcPr>
                     <a:solidFill>
-                      <a:srgbClr val="C06070"/>
+                      <a:srgbClr val="5A2030"/>
                     </a:solidFill>
                   </a:tcPr>
                 </a:tc>
@@ -6375,8 +4975,8 @@
                     <a:bodyPr/>
                     <a:lstStyle/>
                     <a:p>
-                      <a:pPr algn="ctr">
-                        <a:defRPr sz="1000" b="1">
+                      <a:pPr>
+                        <a:defRPr sz="1100" b="1">
                           <a:solidFill>
                             <a:srgbClr val="FFFFFF"/>
                           </a:solidFill>
@@ -6389,7 +4989,7 @@
                   </a:txBody>
                   <a:tcPr>
                     <a:solidFill>
-                      <a:srgbClr val="C06070"/>
+                      <a:srgbClr val="5A2030"/>
                     </a:solidFill>
                   </a:tcPr>
                 </a:tc>
@@ -6398,8 +4998,8 @@
                     <a:bodyPr/>
                     <a:lstStyle/>
                     <a:p>
-                      <a:pPr algn="ctr">
-                        <a:defRPr sz="1000" b="1">
+                      <a:pPr>
+                        <a:defRPr sz="1100" b="1">
                           <a:solidFill>
                             <a:srgbClr val="FFFFFF"/>
                           </a:solidFill>
@@ -6412,7 +5012,7 @@
                   </a:txBody>
                   <a:tcPr>
                     <a:solidFill>
-                      <a:srgbClr val="C06070"/>
+                      <a:srgbClr val="5A2030"/>
                     </a:solidFill>
                   </a:tcPr>
                 </a:tc>
@@ -6423,10 +5023,10 @@
                     <a:bodyPr/>
                     <a:lstStyle/>
                     <a:p>
-                      <a:pPr algn="l">
-                        <a:defRPr sz="900">
+                      <a:pPr>
+                        <a:defRPr sz="1000">
                           <a:solidFill>
-                            <a:srgbClr val="3A3A3A"/>
+                            <a:srgbClr val="333333"/>
                           </a:solidFill>
                         </a:defRPr>
                       </a:pPr>
@@ -6446,10 +5046,10 @@
                     <a:bodyPr/>
                     <a:lstStyle/>
                     <a:p>
-                      <a:pPr algn="ctr">
-                        <a:defRPr sz="900">
+                      <a:pPr>
+                        <a:defRPr sz="1000">
                           <a:solidFill>
-                            <a:srgbClr val="3A3A3A"/>
+                            <a:srgbClr val="333333"/>
                           </a:solidFill>
                         </a:defRPr>
                       </a:pPr>
@@ -6469,10 +5069,10 @@
                     <a:bodyPr/>
                     <a:lstStyle/>
                     <a:p>
-                      <a:pPr algn="ctr">
-                        <a:defRPr sz="900">
+                      <a:pPr>
+                        <a:defRPr sz="1000">
                           <a:solidFill>
-                            <a:srgbClr val="3A3A3A"/>
+                            <a:srgbClr val="333333"/>
                           </a:solidFill>
                         </a:defRPr>
                       </a:pPr>
@@ -6492,10 +5092,10 @@
                     <a:bodyPr/>
                     <a:lstStyle/>
                     <a:p>
-                      <a:pPr algn="ctr">
-                        <a:defRPr sz="900">
+                      <a:pPr>
+                        <a:defRPr sz="1000">
                           <a:solidFill>
-                            <a:srgbClr val="3A3A3A"/>
+                            <a:srgbClr val="333333"/>
                           </a:solidFill>
                         </a:defRPr>
                       </a:pPr>
@@ -6517,10 +5117,10 @@
                     <a:bodyPr/>
                     <a:lstStyle/>
                     <a:p>
-                      <a:pPr algn="l">
-                        <a:defRPr sz="900">
+                      <a:pPr>
+                        <a:defRPr sz="1000">
                           <a:solidFill>
-                            <a:srgbClr val="3A3A3A"/>
+                            <a:srgbClr val="333333"/>
                           </a:solidFill>
                         </a:defRPr>
                       </a:pPr>
@@ -6529,21 +5129,17 @@
                       </a:r>
                     </a:p>
                   </a:txBody>
-                  <a:tcPr>
-                    <a:solidFill>
-                      <a:srgbClr val="FFFFFF"/>
-                    </a:solidFill>
-                  </a:tcPr>
+                  <a:tcPr/>
                 </a:tc>
                 <a:tc>
                   <a:txBody>
                     <a:bodyPr/>
                     <a:lstStyle/>
                     <a:p>
-                      <a:pPr algn="ctr">
-                        <a:defRPr sz="900">
+                      <a:pPr>
+                        <a:defRPr sz="1000">
                           <a:solidFill>
-                            <a:srgbClr val="3A3A3A"/>
+                            <a:srgbClr val="333333"/>
                           </a:solidFill>
                         </a:defRPr>
                       </a:pPr>
@@ -6552,21 +5148,17 @@
                       </a:r>
                     </a:p>
                   </a:txBody>
-                  <a:tcPr>
-                    <a:solidFill>
-                      <a:srgbClr val="FFFFFF"/>
-                    </a:solidFill>
-                  </a:tcPr>
+                  <a:tcPr/>
                 </a:tc>
                 <a:tc>
                   <a:txBody>
                     <a:bodyPr/>
                     <a:lstStyle/>
                     <a:p>
-                      <a:pPr algn="ctr">
-                        <a:defRPr sz="900">
+                      <a:pPr>
+                        <a:defRPr sz="1000">
                           <a:solidFill>
-                            <a:srgbClr val="3A3A3A"/>
+                            <a:srgbClr val="333333"/>
                           </a:solidFill>
                         </a:defRPr>
                       </a:pPr>
@@ -6575,21 +5167,17 @@
                       </a:r>
                     </a:p>
                   </a:txBody>
-                  <a:tcPr>
-                    <a:solidFill>
-                      <a:srgbClr val="FFFFFF"/>
-                    </a:solidFill>
-                  </a:tcPr>
+                  <a:tcPr/>
                 </a:tc>
                 <a:tc>
                   <a:txBody>
                     <a:bodyPr/>
                     <a:lstStyle/>
                     <a:p>
-                      <a:pPr algn="ctr">
-                        <a:defRPr sz="900">
+                      <a:pPr>
+                        <a:defRPr sz="1000">
                           <a:solidFill>
-                            <a:srgbClr val="3A3A3A"/>
+                            <a:srgbClr val="333333"/>
                           </a:solidFill>
                         </a:defRPr>
                       </a:pPr>
@@ -6598,11 +5186,7 @@
                       </a:r>
                     </a:p>
                   </a:txBody>
-                  <a:tcPr>
-                    <a:solidFill>
-                      <a:srgbClr val="FFFFFF"/>
-                    </a:solidFill>
-                  </a:tcPr>
+                  <a:tcPr/>
                 </a:tc>
               </a:tr>
             </a:tbl>
@@ -6631,33 +5215,33 @@
           </a:bodyPr>
           <a:lstStyle/>
           <a:p>
-            <a:pPr algn="l">
-              <a:lnSpc>
-                <a:spcPts val="2400"/>
-              </a:lnSpc>
-              <a:defRPr sz="1200" b="1">
-                <a:solidFill>
-                  <a:srgbClr val="9A4050"/>
-                </a:solidFill>
-              </a:defRPr>
-            </a:pPr>
-            <a:r>
-              <a:t>・初回面談は無料</a:t>
-            </a:r>
-          </a:p>
-          <a:p>
-            <a:pPr algn="l">
-              <a:lnSpc>
-                <a:spcPts val="2400"/>
-              </a:lnSpc>
-              <a:defRPr sz="1200" b="1">
-                <a:solidFill>
-                  <a:srgbClr val="9A4050"/>
-                </a:solidFill>
-              </a:defRPr>
-            </a:pPr>
-            <a:r>
-              <a:t>・お友達紹介で、紹介した方・された方どちらも次回1,000円OFF</a:t>
+            <a:pPr>
+              <a:spcAft>
+                <a:spcPts val="800"/>
+              </a:spcAft>
+              <a:defRPr sz="1300" b="1">
+                <a:solidFill>
+                  <a:srgbClr val="5A2030"/>
+                </a:solidFill>
+              </a:defRPr>
+            </a:pPr>
+            <a:r>
+              <a:t>★ 初回面談は無料</a:t>
+            </a:r>
+          </a:p>
+          <a:p>
+            <a:pPr>
+              <a:spcAft>
+                <a:spcPts val="800"/>
+              </a:spcAft>
+              <a:defRPr sz="1300" b="1">
+                <a:solidFill>
+                  <a:srgbClr val="5A2030"/>
+                </a:solidFill>
+              </a:defRPr>
+            </a:pPr>
+            <a:r>
+              <a:t>★ お友達紹介で、紹介した方・された方どちらも次回1,000円OFF</a:t>
             </a:r>
           </a:p>
         </p:txBody>
@@ -6673,14 +5257,6 @@
 <file path=ppt/slides/slide7.xml><?xml version="1.0" encoding="utf-8"?>
 <p:sld xmlns:a="http://schemas.openxmlformats.org/drawingml/2006/main" xmlns:p="http://schemas.openxmlformats.org/presentationml/2006/main" xmlns:r="http://schemas.openxmlformats.org/officeDocument/2006/relationships">
   <p:cSld>
-    <p:bg>
-      <p:bgPr>
-        <a:solidFill>
-          <a:srgbClr val="FFFFFF"/>
-        </a:solidFill>
-        <a:effectLst/>
-      </p:bgPr>
-    </p:bg>
     <p:spTree>
       <p:nvGrpSpPr>
         <p:cNvPr id="1" name=""/>
@@ -6690,20 +5266,55 @@
       <p:grpSpPr/>
       <p:sp>
         <p:nvSpPr>
-          <p:cNvPr id="2" name="Rectangle 1"/>
-          <p:cNvSpPr/>
+          <p:cNvPr id="2" name="TextBox 1"/>
+          <p:cNvSpPr txBox="1"/>
           <p:nvPr/>
         </p:nvSpPr>
         <p:spPr>
           <a:xfrm>
             <a:off x="0" y="0"/>
-            <a:ext cx="9144000" cy="822960"/>
+            <a:ext cx="9144000" cy="914400"/>
+          </a:xfrm>
+          <a:prstGeom prst="rect">
+            <a:avLst/>
+          </a:prstGeom>
+          <a:noFill/>
+        </p:spPr>
+        <p:txBody>
+          <a:bodyPr wrap="none">
+            <a:spAutoFit/>
+          </a:bodyPr>
+          <a:lstStyle/>
+          <a:p>
+            <a:pPr>
+              <a:defRPr sz="2200" b="1">
+                <a:solidFill>
+                  <a:srgbClr val="5A2030"/>
+                </a:solidFill>
+              </a:defRPr>
+            </a:pPr>
+            <a:r>
+              <a:t>  他の就活サービスとの違い</a:t>
+            </a:r>
+          </a:p>
+        </p:txBody>
+      </p:sp>
+      <p:sp>
+        <p:nvSpPr>
+          <p:cNvPr id="3" name="Rectangle 2"/>
+          <p:cNvSpPr/>
+          <p:nvPr/>
+        </p:nvSpPr>
+        <p:spPr>
+          <a:xfrm>
+            <a:off x="457200" y="868680"/>
+            <a:ext cx="8229600" cy="27432"/>
           </a:xfrm>
           <a:prstGeom prst="rect">
             <a:avLst/>
           </a:prstGeom>
           <a:solidFill>
-            <a:srgbClr val="C06070"/>
+            <a:srgbClr val="5A2030"/>
           </a:solidFill>
           <a:ln>
             <a:noFill/>
@@ -6731,44 +5342,6 @@
           </a:p>
         </p:txBody>
       </p:sp>
-      <p:sp>
-        <p:nvSpPr>
-          <p:cNvPr id="3" name="TextBox 2"/>
-          <p:cNvSpPr txBox="1"/>
-          <p:nvPr/>
-        </p:nvSpPr>
-        <p:spPr>
-          <a:xfrm>
-            <a:off x="457200" y="137160"/>
-            <a:ext cx="8229600" cy="548640"/>
-          </a:xfrm>
-          <a:prstGeom prst="rect">
-            <a:avLst/>
-          </a:prstGeom>
-          <a:noFill/>
-        </p:spPr>
-        <p:txBody>
-          <a:bodyPr wrap="square">
-            <a:spAutoFit/>
-          </a:bodyPr>
-          <a:lstStyle/>
-          <a:p>
-            <a:pPr algn="l">
-              <a:lnSpc>
-                <a:spcPts val="3000"/>
-              </a:lnSpc>
-              <a:defRPr sz="2000" b="1">
-                <a:solidFill>
-                  <a:srgbClr val="FFFFFF"/>
-                </a:solidFill>
-              </a:defRPr>
-            </a:pPr>
-            <a:r>
-              <a:t>他の就活サービスとの違い</a:t>
-            </a:r>
-          </a:p>
-        </p:txBody>
-      </p:sp>
       <p:graphicFrame>
         <p:nvGraphicFramePr>
           <p:cNvPr id="4" name="Table 3"/>
@@ -6778,8 +5351,8 @@
           <p:nvPr/>
         </p:nvGraphicFramePr>
         <p:xfrm>
-          <a:off x="365760" y="1097280"/>
-          <a:ext cx="8412480" cy="2560320"/>
+          <a:off x="457200" y="1188720"/>
+          <a:ext cx="8229600" cy="2560320"/>
         </p:xfrm>
         <a:graphic>
           <a:graphicData uri="http://schemas.openxmlformats.org/drawingml/2006/table">
@@ -6788,11 +5361,11 @@
                 <a:tableStyleId>{5C22544A-7EE6-4342-B048-85BDC9FD1C3A}</a:tableStyleId>
               </a:tblPr>
               <a:tblGrid>
-                <a:gridCol w="1097280"/>
-                <a:gridCol w="1828800"/>
-                <a:gridCol w="1828800"/>
-                <a:gridCol w="1828800"/>
-                <a:gridCol w="1828800"/>
+                <a:gridCol w="1645920"/>
+                <a:gridCol w="1645920"/>
+                <a:gridCol w="1645920"/>
+                <a:gridCol w="1645920"/>
+                <a:gridCol w="1645920"/>
               </a:tblGrid>
               <a:tr h="365760">
                 <a:tc>
@@ -6800,8 +5373,8 @@
                     <a:bodyPr/>
                     <a:lstStyle/>
                     <a:p>
-                      <a:pPr algn="ctr">
-                        <a:defRPr sz="1000" b="1">
+                      <a:pPr>
+                        <a:defRPr sz="1100" b="1">
                           <a:solidFill>
                             <a:srgbClr val="FFFFFF"/>
                           </a:solidFill>
@@ -6811,7 +5384,7 @@
                   </a:txBody>
                   <a:tcPr>
                     <a:solidFill>
-                      <a:srgbClr val="C06070"/>
+                      <a:srgbClr val="5A2030"/>
                     </a:solidFill>
                   </a:tcPr>
                 </a:tc>
@@ -6820,8 +5393,8 @@
                     <a:bodyPr/>
                     <a:lstStyle/>
                     <a:p>
-                      <a:pPr algn="ctr">
-                        <a:defRPr sz="1000" b="1">
+                      <a:pPr>
+                        <a:defRPr sz="1100" b="1">
                           <a:solidFill>
                             <a:srgbClr val="FFFFFF"/>
                           </a:solidFill>
@@ -6834,7 +5407,7 @@
                   </a:txBody>
                   <a:tcPr>
                     <a:solidFill>
-                      <a:srgbClr val="C06070"/>
+                      <a:srgbClr val="5A2030"/>
                     </a:solidFill>
                   </a:tcPr>
                 </a:tc>
@@ -6843,8 +5416,8 @@
                     <a:bodyPr/>
                     <a:lstStyle/>
                     <a:p>
-                      <a:pPr algn="ctr">
-                        <a:defRPr sz="1000" b="1">
+                      <a:pPr>
+                        <a:defRPr sz="1100" b="1">
                           <a:solidFill>
                             <a:srgbClr val="FFFFFF"/>
                           </a:solidFill>
@@ -6857,7 +5430,7 @@
                   </a:txBody>
                   <a:tcPr>
                     <a:solidFill>
-                      <a:srgbClr val="C06070"/>
+                      <a:srgbClr val="5A2030"/>
                     </a:solidFill>
                   </a:tcPr>
                 </a:tc>
@@ -6866,8 +5439,8 @@
                     <a:bodyPr/>
                     <a:lstStyle/>
                     <a:p>
-                      <a:pPr algn="ctr">
-                        <a:defRPr sz="1000" b="1">
+                      <a:pPr>
+                        <a:defRPr sz="1100" b="1">
                           <a:solidFill>
                             <a:srgbClr val="FFFFFF"/>
                           </a:solidFill>
@@ -6880,7 +5453,7 @@
                   </a:txBody>
                   <a:tcPr>
                     <a:solidFill>
-                      <a:srgbClr val="C06070"/>
+                      <a:srgbClr val="5A2030"/>
                     </a:solidFill>
                   </a:tcPr>
                 </a:tc>
@@ -6889,8 +5462,8 @@
                     <a:bodyPr/>
                     <a:lstStyle/>
                     <a:p>
-                      <a:pPr algn="ctr">
-                        <a:defRPr sz="1000" b="1">
+                      <a:pPr>
+                        <a:defRPr sz="1100" b="1">
                           <a:solidFill>
                             <a:srgbClr val="FFFFFF"/>
                           </a:solidFill>
@@ -6903,7 +5476,7 @@
                   </a:txBody>
                   <a:tcPr>
                     <a:solidFill>
-                      <a:srgbClr val="C06070"/>
+                      <a:srgbClr val="5A2030"/>
                     </a:solidFill>
                   </a:tcPr>
                 </a:tc>
@@ -6914,10 +5487,10 @@
                     <a:bodyPr/>
                     <a:lstStyle/>
                     <a:p>
-                      <a:pPr algn="l">
-                        <a:defRPr sz="900">
+                      <a:pPr>
+                        <a:defRPr sz="1000">
                           <a:solidFill>
-                            <a:srgbClr val="3A3A3A"/>
+                            <a:srgbClr val="333333"/>
                           </a:solidFill>
                         </a:defRPr>
                       </a:pPr>
@@ -6937,10 +5510,10 @@
                     <a:bodyPr/>
                     <a:lstStyle/>
                     <a:p>
-                      <a:pPr algn="ctr">
-                        <a:defRPr sz="900">
+                      <a:pPr>
+                        <a:defRPr sz="1000">
                           <a:solidFill>
-                            <a:srgbClr val="3A3A3A"/>
+                            <a:srgbClr val="333333"/>
                           </a:solidFill>
                         </a:defRPr>
                       </a:pPr>
@@ -6960,10 +5533,10 @@
                     <a:bodyPr/>
                     <a:lstStyle/>
                     <a:p>
-                      <a:pPr algn="ctr">
-                        <a:defRPr sz="900">
+                      <a:pPr>
+                        <a:defRPr sz="1000">
                           <a:solidFill>
-                            <a:srgbClr val="3A3A3A"/>
+                            <a:srgbClr val="333333"/>
                           </a:solidFill>
                         </a:defRPr>
                       </a:pPr>
@@ -6983,10 +5556,10 @@
                     <a:bodyPr/>
                     <a:lstStyle/>
                     <a:p>
-                      <a:pPr algn="ctr">
-                        <a:defRPr sz="900">
+                      <a:pPr>
+                        <a:defRPr sz="1000">
                           <a:solidFill>
-                            <a:srgbClr val="3A3A3A"/>
+                            <a:srgbClr val="333333"/>
                           </a:solidFill>
                         </a:defRPr>
                       </a:pPr>
@@ -7006,10 +5579,10 @@
                     <a:bodyPr/>
                     <a:lstStyle/>
                     <a:p>
-                      <a:pPr algn="ctr">
-                        <a:defRPr sz="900">
+                      <a:pPr>
+                        <a:defRPr sz="1000">
                           <a:solidFill>
-                            <a:srgbClr val="3A3A3A"/>
+                            <a:srgbClr val="333333"/>
                           </a:solidFill>
                         </a:defRPr>
                       </a:pPr>
@@ -7031,10 +5604,10 @@
                     <a:bodyPr/>
                     <a:lstStyle/>
                     <a:p>
-                      <a:pPr algn="l">
-                        <a:defRPr sz="900">
+                      <a:pPr>
+                        <a:defRPr sz="1000">
                           <a:solidFill>
-                            <a:srgbClr val="3A3A3A"/>
+                            <a:srgbClr val="333333"/>
                           </a:solidFill>
                         </a:defRPr>
                       </a:pPr>
@@ -7043,21 +5616,17 @@
                       </a:r>
                     </a:p>
                   </a:txBody>
-                  <a:tcPr>
-                    <a:solidFill>
-                      <a:srgbClr val="FFFFFF"/>
-                    </a:solidFill>
-                  </a:tcPr>
+                  <a:tcPr/>
                 </a:tc>
                 <a:tc>
                   <a:txBody>
                     <a:bodyPr/>
                     <a:lstStyle/>
                     <a:p>
-                      <a:pPr algn="ctr">
-                        <a:defRPr sz="900">
+                      <a:pPr>
+                        <a:defRPr sz="1000">
                           <a:solidFill>
-                            <a:srgbClr val="3A3A3A"/>
+                            <a:srgbClr val="333333"/>
                           </a:solidFill>
                         </a:defRPr>
                       </a:pPr>
@@ -7066,21 +5635,17 @@
                       </a:r>
                     </a:p>
                   </a:txBody>
-                  <a:tcPr>
-                    <a:solidFill>
-                      <a:srgbClr val="FFFFFF"/>
-                    </a:solidFill>
-                  </a:tcPr>
+                  <a:tcPr/>
                 </a:tc>
                 <a:tc>
                   <a:txBody>
                     <a:bodyPr/>
                     <a:lstStyle/>
                     <a:p>
-                      <a:pPr algn="ctr">
-                        <a:defRPr sz="900">
+                      <a:pPr>
+                        <a:defRPr sz="1000">
                           <a:solidFill>
-                            <a:srgbClr val="3A3A3A"/>
+                            <a:srgbClr val="333333"/>
                           </a:solidFill>
                         </a:defRPr>
                       </a:pPr>
@@ -7089,21 +5654,17 @@
                       </a:r>
                     </a:p>
                   </a:txBody>
-                  <a:tcPr>
-                    <a:solidFill>
-                      <a:srgbClr val="FFFFFF"/>
-                    </a:solidFill>
-                  </a:tcPr>
+                  <a:tcPr/>
                 </a:tc>
                 <a:tc>
                   <a:txBody>
                     <a:bodyPr/>
                     <a:lstStyle/>
                     <a:p>
-                      <a:pPr algn="ctr">
-                        <a:defRPr sz="900">
+                      <a:pPr>
+                        <a:defRPr sz="1000">
                           <a:solidFill>
-                            <a:srgbClr val="3A3A3A"/>
+                            <a:srgbClr val="333333"/>
                           </a:solidFill>
                         </a:defRPr>
                       </a:pPr>
@@ -7112,21 +5673,17 @@
                       </a:r>
                     </a:p>
                   </a:txBody>
-                  <a:tcPr>
-                    <a:solidFill>
-                      <a:srgbClr val="FFFFFF"/>
-                    </a:solidFill>
-                  </a:tcPr>
+                  <a:tcPr/>
                 </a:tc>
                 <a:tc>
                   <a:txBody>
                     <a:bodyPr/>
                     <a:lstStyle/>
                     <a:p>
-                      <a:pPr algn="ctr">
-                        <a:defRPr sz="900">
+                      <a:pPr>
+                        <a:defRPr sz="1000">
                           <a:solidFill>
-                            <a:srgbClr val="3A3A3A"/>
+                            <a:srgbClr val="333333"/>
                           </a:solidFill>
                         </a:defRPr>
                       </a:pPr>
@@ -7135,11 +5692,7 @@
                       </a:r>
                     </a:p>
                   </a:txBody>
-                  <a:tcPr>
-                    <a:solidFill>
-                      <a:srgbClr val="FFFFFF"/>
-                    </a:solidFill>
-                  </a:tcPr>
+                  <a:tcPr/>
                 </a:tc>
               </a:tr>
               <a:tr h="365760">
@@ -7148,10 +5701,10 @@
                     <a:bodyPr/>
                     <a:lstStyle/>
                     <a:p>
-                      <a:pPr algn="l">
-                        <a:defRPr sz="900">
+                      <a:pPr>
+                        <a:defRPr sz="1000">
                           <a:solidFill>
-                            <a:srgbClr val="3A3A3A"/>
+                            <a:srgbClr val="333333"/>
                           </a:solidFill>
                         </a:defRPr>
                       </a:pPr>
@@ -7171,10 +5724,10 @@
                     <a:bodyPr/>
                     <a:lstStyle/>
                     <a:p>
-                      <a:pPr algn="ctr">
-                        <a:defRPr sz="900">
+                      <a:pPr>
+                        <a:defRPr sz="1000">
                           <a:solidFill>
-                            <a:srgbClr val="3A3A3A"/>
+                            <a:srgbClr val="333333"/>
                           </a:solidFill>
                         </a:defRPr>
                       </a:pPr>
@@ -7194,10 +5747,10 @@
                     <a:bodyPr/>
                     <a:lstStyle/>
                     <a:p>
-                      <a:pPr algn="ctr">
-                        <a:defRPr sz="900">
+                      <a:pPr>
+                        <a:defRPr sz="1000">
                           <a:solidFill>
-                            <a:srgbClr val="3A3A3A"/>
+                            <a:srgbClr val="333333"/>
                           </a:solidFill>
                         </a:defRPr>
                       </a:pPr>
@@ -7217,10 +5770,10 @@
                     <a:bodyPr/>
                     <a:lstStyle/>
                     <a:p>
-                      <a:pPr algn="ctr">
-                        <a:defRPr sz="900">
+                      <a:pPr>
+                        <a:defRPr sz="1000">
                           <a:solidFill>
-                            <a:srgbClr val="3A3A3A"/>
+                            <a:srgbClr val="333333"/>
                           </a:solidFill>
                         </a:defRPr>
                       </a:pPr>
@@ -7240,10 +5793,10 @@
                     <a:bodyPr/>
                     <a:lstStyle/>
                     <a:p>
-                      <a:pPr algn="ctr">
-                        <a:defRPr sz="900">
+                      <a:pPr>
+                        <a:defRPr sz="1000">
                           <a:solidFill>
-                            <a:srgbClr val="3A3A3A"/>
+                            <a:srgbClr val="333333"/>
                           </a:solidFill>
                         </a:defRPr>
                       </a:pPr>
@@ -7265,10 +5818,10 @@
                     <a:bodyPr/>
                     <a:lstStyle/>
                     <a:p>
-                      <a:pPr algn="l">
-                        <a:defRPr sz="900">
+                      <a:pPr>
+                        <a:defRPr sz="1000">
                           <a:solidFill>
-                            <a:srgbClr val="3A3A3A"/>
+                            <a:srgbClr val="333333"/>
                           </a:solidFill>
                         </a:defRPr>
                       </a:pPr>
@@ -7277,21 +5830,17 @@
                       </a:r>
                     </a:p>
                   </a:txBody>
-                  <a:tcPr>
-                    <a:solidFill>
-                      <a:srgbClr val="FFFFFF"/>
-                    </a:solidFill>
-                  </a:tcPr>
+                  <a:tcPr/>
                 </a:tc>
                 <a:tc>
                   <a:txBody>
                     <a:bodyPr/>
                     <a:lstStyle/>
                     <a:p>
-                      <a:pPr algn="ctr">
-                        <a:defRPr sz="900">
+                      <a:pPr>
+                        <a:defRPr sz="1000">
                           <a:solidFill>
-                            <a:srgbClr val="3A3A3A"/>
+                            <a:srgbClr val="333333"/>
                           </a:solidFill>
                         </a:defRPr>
                       </a:pPr>
@@ -7300,21 +5849,17 @@
                       </a:r>
                     </a:p>
                   </a:txBody>
-                  <a:tcPr>
-                    <a:solidFill>
-                      <a:srgbClr val="FFFFFF"/>
-                    </a:solidFill>
-                  </a:tcPr>
+                  <a:tcPr/>
                 </a:tc>
                 <a:tc>
                   <a:txBody>
                     <a:bodyPr/>
                     <a:lstStyle/>
                     <a:p>
-                      <a:pPr algn="ctr">
-                        <a:defRPr sz="900">
+                      <a:pPr>
+                        <a:defRPr sz="1000">
                           <a:solidFill>
-                            <a:srgbClr val="3A3A3A"/>
+                            <a:srgbClr val="333333"/>
                           </a:solidFill>
                         </a:defRPr>
                       </a:pPr>
@@ -7323,21 +5868,17 @@
                       </a:r>
                     </a:p>
                   </a:txBody>
-                  <a:tcPr>
-                    <a:solidFill>
-                      <a:srgbClr val="FFFFFF"/>
-                    </a:solidFill>
-                  </a:tcPr>
+                  <a:tcPr/>
                 </a:tc>
                 <a:tc>
                   <a:txBody>
                     <a:bodyPr/>
                     <a:lstStyle/>
                     <a:p>
-                      <a:pPr algn="ctr">
-                        <a:defRPr sz="900">
+                      <a:pPr>
+                        <a:defRPr sz="1000">
                           <a:solidFill>
-                            <a:srgbClr val="3A3A3A"/>
+                            <a:srgbClr val="333333"/>
                           </a:solidFill>
                         </a:defRPr>
                       </a:pPr>
@@ -7346,21 +5887,17 @@
                       </a:r>
                     </a:p>
                   </a:txBody>
-                  <a:tcPr>
-                    <a:solidFill>
-                      <a:srgbClr val="FFFFFF"/>
-                    </a:solidFill>
-                  </a:tcPr>
+                  <a:tcPr/>
                 </a:tc>
                 <a:tc>
                   <a:txBody>
                     <a:bodyPr/>
                     <a:lstStyle/>
                     <a:p>
-                      <a:pPr algn="ctr">
-                        <a:defRPr sz="900">
+                      <a:pPr>
+                        <a:defRPr sz="1000">
                           <a:solidFill>
-                            <a:srgbClr val="3A3A3A"/>
+                            <a:srgbClr val="333333"/>
                           </a:solidFill>
                         </a:defRPr>
                       </a:pPr>
@@ -7369,11 +5906,7 @@
                       </a:r>
                     </a:p>
                   </a:txBody>
-                  <a:tcPr>
-                    <a:solidFill>
-                      <a:srgbClr val="FFFFFF"/>
-                    </a:solidFill>
-                  </a:tcPr>
+                  <a:tcPr/>
                 </a:tc>
               </a:tr>
               <a:tr h="365760">
@@ -7382,10 +5915,10 @@
                     <a:bodyPr/>
                     <a:lstStyle/>
                     <a:p>
-                      <a:pPr algn="l">
-                        <a:defRPr sz="900">
+                      <a:pPr>
+                        <a:defRPr sz="1000">
                           <a:solidFill>
-                            <a:srgbClr val="3A3A3A"/>
+                            <a:srgbClr val="333333"/>
                           </a:solidFill>
                         </a:defRPr>
                       </a:pPr>
@@ -7405,10 +5938,10 @@
                     <a:bodyPr/>
                     <a:lstStyle/>
                     <a:p>
-                      <a:pPr algn="ctr">
-                        <a:defRPr sz="900">
+                      <a:pPr>
+                        <a:defRPr sz="1000">
                           <a:solidFill>
-                            <a:srgbClr val="3A3A3A"/>
+                            <a:srgbClr val="333333"/>
                           </a:solidFill>
                         </a:defRPr>
                       </a:pPr>
@@ -7428,10 +5961,10 @@
                     <a:bodyPr/>
                     <a:lstStyle/>
                     <a:p>
-                      <a:pPr algn="ctr">
-                        <a:defRPr sz="900">
+                      <a:pPr>
+                        <a:defRPr sz="1000">
                           <a:solidFill>
-                            <a:srgbClr val="3A3A3A"/>
+                            <a:srgbClr val="333333"/>
                           </a:solidFill>
                         </a:defRPr>
                       </a:pPr>
@@ -7451,10 +5984,10 @@
                     <a:bodyPr/>
                     <a:lstStyle/>
                     <a:p>
-                      <a:pPr algn="ctr">
-                        <a:defRPr sz="900">
+                      <a:pPr>
+                        <a:defRPr sz="1000">
                           <a:solidFill>
-                            <a:srgbClr val="3A3A3A"/>
+                            <a:srgbClr val="333333"/>
                           </a:solidFill>
                         </a:defRPr>
                       </a:pPr>
@@ -7474,10 +6007,10 @@
                     <a:bodyPr/>
                     <a:lstStyle/>
                     <a:p>
-                      <a:pPr algn="ctr">
-                        <a:defRPr sz="900">
+                      <a:pPr>
+                        <a:defRPr sz="1000">
                           <a:solidFill>
-                            <a:srgbClr val="3A3A3A"/>
+                            <a:srgbClr val="333333"/>
                           </a:solidFill>
                         </a:defRPr>
                       </a:pPr>
@@ -7499,10 +6032,10 @@
                     <a:bodyPr/>
                     <a:lstStyle/>
                     <a:p>
-                      <a:pPr algn="l">
-                        <a:defRPr sz="900">
+                      <a:pPr>
+                        <a:defRPr sz="1000">
                           <a:solidFill>
-                            <a:srgbClr val="3A3A3A"/>
+                            <a:srgbClr val="333333"/>
                           </a:solidFill>
                         </a:defRPr>
                       </a:pPr>
@@ -7511,21 +6044,17 @@
                       </a:r>
                     </a:p>
                   </a:txBody>
-                  <a:tcPr>
-                    <a:solidFill>
-                      <a:srgbClr val="FFFFFF"/>
-                    </a:solidFill>
-                  </a:tcPr>
+                  <a:tcPr/>
                 </a:tc>
                 <a:tc>
                   <a:txBody>
                     <a:bodyPr/>
                     <a:lstStyle/>
                     <a:p>
-                      <a:pPr algn="ctr">
-                        <a:defRPr sz="900">
+                      <a:pPr>
+                        <a:defRPr sz="1000">
                           <a:solidFill>
-                            <a:srgbClr val="3A3A3A"/>
+                            <a:srgbClr val="333333"/>
                           </a:solidFill>
                         </a:defRPr>
                       </a:pPr>
@@ -7534,21 +6063,17 @@
                       </a:r>
                     </a:p>
                   </a:txBody>
-                  <a:tcPr>
-                    <a:solidFill>
-                      <a:srgbClr val="FFFFFF"/>
-                    </a:solidFill>
-                  </a:tcPr>
+                  <a:tcPr/>
                 </a:tc>
                 <a:tc>
                   <a:txBody>
                     <a:bodyPr/>
                     <a:lstStyle/>
                     <a:p>
-                      <a:pPr algn="ctr">
-                        <a:defRPr sz="900">
+                      <a:pPr>
+                        <a:defRPr sz="1000">
                           <a:solidFill>
-                            <a:srgbClr val="3A3A3A"/>
+                            <a:srgbClr val="333333"/>
                           </a:solidFill>
                         </a:defRPr>
                       </a:pPr>
@@ -7557,21 +6082,17 @@
                       </a:r>
                     </a:p>
                   </a:txBody>
-                  <a:tcPr>
-                    <a:solidFill>
-                      <a:srgbClr val="FFFFFF"/>
-                    </a:solidFill>
-                  </a:tcPr>
+                  <a:tcPr/>
                 </a:tc>
                 <a:tc>
                   <a:txBody>
                     <a:bodyPr/>
                     <a:lstStyle/>
                     <a:p>
-                      <a:pPr algn="ctr">
-                        <a:defRPr sz="900">
+                      <a:pPr>
+                        <a:defRPr sz="1000">
                           <a:solidFill>
-                            <a:srgbClr val="3A3A3A"/>
+                            <a:srgbClr val="333333"/>
                           </a:solidFill>
                         </a:defRPr>
                       </a:pPr>
@@ -7580,21 +6101,17 @@
                       </a:r>
                     </a:p>
                   </a:txBody>
-                  <a:tcPr>
-                    <a:solidFill>
-                      <a:srgbClr val="FFFFFF"/>
-                    </a:solidFill>
-                  </a:tcPr>
+                  <a:tcPr/>
                 </a:tc>
                 <a:tc>
                   <a:txBody>
                     <a:bodyPr/>
                     <a:lstStyle/>
                     <a:p>
-                      <a:pPr algn="ctr">
-                        <a:defRPr sz="900">
+                      <a:pPr>
+                        <a:defRPr sz="1000">
                           <a:solidFill>
-                            <a:srgbClr val="3A3A3A"/>
+                            <a:srgbClr val="333333"/>
                           </a:solidFill>
                         </a:defRPr>
                       </a:pPr>
@@ -7603,11 +6120,7 @@
                       </a:r>
                     </a:p>
                   </a:txBody>
-                  <a:tcPr>
-                    <a:solidFill>
-                      <a:srgbClr val="FFFFFF"/>
-                    </a:solidFill>
-                  </a:tcPr>
+                  <a:tcPr/>
                 </a:tc>
               </a:tr>
             </a:tbl>
@@ -7625,14 +6138,6 @@
 <file path=ppt/slides/slide8.xml><?xml version="1.0" encoding="utf-8"?>
 <p:sld xmlns:a="http://schemas.openxmlformats.org/drawingml/2006/main" xmlns:p="http://schemas.openxmlformats.org/presentationml/2006/main" xmlns:r="http://schemas.openxmlformats.org/officeDocument/2006/relationships">
   <p:cSld>
-    <p:bg>
-      <p:bgPr>
-        <a:solidFill>
-          <a:srgbClr val="FFFFFF"/>
-        </a:solidFill>
-        <a:effectLst/>
-      </p:bgPr>
-    </p:bg>
     <p:spTree>
       <p:nvGrpSpPr>
         <p:cNvPr id="1" name=""/>
@@ -7642,20 +6147,55 @@
       <p:grpSpPr/>
       <p:sp>
         <p:nvSpPr>
-          <p:cNvPr id="2" name="Rectangle 1"/>
-          <p:cNvSpPr/>
+          <p:cNvPr id="2" name="TextBox 1"/>
+          <p:cNvSpPr txBox="1"/>
           <p:nvPr/>
         </p:nvSpPr>
         <p:spPr>
           <a:xfrm>
             <a:off x="0" y="0"/>
-            <a:ext cx="9144000" cy="822960"/>
+            <a:ext cx="9144000" cy="914400"/>
+          </a:xfrm>
+          <a:prstGeom prst="rect">
+            <a:avLst/>
+          </a:prstGeom>
+          <a:noFill/>
+        </p:spPr>
+        <p:txBody>
+          <a:bodyPr wrap="square">
+            <a:spAutoFit/>
+          </a:bodyPr>
+          <a:lstStyle/>
+          <a:p>
+            <a:pPr algn="l">
+              <a:defRPr sz="2200" b="1">
+                <a:solidFill>
+                  <a:srgbClr val="5A2030"/>
+                </a:solidFill>
+              </a:defRPr>
+            </a:pPr>
+            <a:r>
+              <a:t>  コーチ紹介</a:t>
+            </a:r>
+          </a:p>
+        </p:txBody>
+      </p:sp>
+      <p:sp>
+        <p:nvSpPr>
+          <p:cNvPr id="3" name="Rectangle 2"/>
+          <p:cNvSpPr/>
+          <p:nvPr/>
+        </p:nvSpPr>
+        <p:spPr>
+          <a:xfrm>
+            <a:off x="457200" y="868680"/>
+            <a:ext cx="8229600" cy="27432"/>
           </a:xfrm>
           <a:prstGeom prst="rect">
             <a:avLst/>
           </a:prstGeom>
           <a:solidFill>
-            <a:srgbClr val="C06070"/>
+            <a:srgbClr val="5A2030"/>
           </a:solidFill>
           <a:ln>
             <a:noFill/>
@@ -7685,14 +6225,14 @@
       </p:sp>
       <p:sp>
         <p:nvSpPr>
-          <p:cNvPr id="3" name="TextBox 2"/>
+          <p:cNvPr id="4" name="TextBox 3"/>
           <p:cNvSpPr txBox="1"/>
           <p:nvPr/>
         </p:nvSpPr>
         <p:spPr>
           <a:xfrm>
-            <a:off x="457200" y="137160"/>
-            <a:ext cx="8229600" cy="548640"/>
+            <a:off x="548640" y="1097280"/>
+            <a:ext cx="8046720" cy="5029200"/>
           </a:xfrm>
           <a:prstGeom prst="rect">
             <a:avLst/>
@@ -7705,38 +6245,220 @@
           </a:bodyPr>
           <a:lstStyle/>
           <a:p>
+            <a:pPr>
+              <a:spcAft>
+                <a:spcPts val="600"/>
+              </a:spcAft>
+              <a:defRPr sz="1400" b="1">
+                <a:solidFill>
+                  <a:srgbClr val="5A2030"/>
+                </a:solidFill>
+              </a:defRPr>
+            </a:pPr>
+            <a:r>
+              <a:t>◎ 西川 舞衣子（にしかわ まいこ）</a:t>
+            </a:r>
+          </a:p>
+          <a:p>
+            <a:pPr>
+              <a:spcAft>
+                <a:spcPts val="600"/>
+              </a:spcAft>
+              <a:defRPr sz="1400">
+                <a:solidFill>
+                  <a:srgbClr val="333333"/>
+                </a:solidFill>
+              </a:defRPr>
+            </a:pPr>
+          </a:p>
+          <a:p>
+            <a:pPr>
+              <a:spcAft>
+                <a:spcPts val="600"/>
+              </a:spcAft>
+              <a:defRPr sz="1400">
+                <a:solidFill>
+                  <a:srgbClr val="333333"/>
+                </a:solidFill>
+              </a:defRPr>
+            </a:pPr>
+            <a:r>
+              <a:t>福井県出身 / 高志高校卒</a:t>
+            </a:r>
+          </a:p>
+          <a:p>
+            <a:pPr>
+              <a:spcAft>
+                <a:spcPts val="600"/>
+              </a:spcAft>
+              <a:defRPr sz="1400">
+                <a:solidFill>
+                  <a:srgbClr val="333333"/>
+                </a:solidFill>
+              </a:defRPr>
+            </a:pPr>
+            <a:r>
+              <a:t>デジタルハリウッド大学大学院修了</a:t>
+            </a:r>
+          </a:p>
+          <a:p>
+            <a:pPr>
+              <a:spcAft>
+                <a:spcPts val="600"/>
+              </a:spcAft>
+              <a:defRPr sz="1400">
+                <a:solidFill>
+                  <a:srgbClr val="333333"/>
+                </a:solidFill>
+              </a:defRPr>
+            </a:pPr>
+            <a:r>
+              <a:t>労働市場などの調査を行うシンクタンクに勤務</a:t>
+            </a:r>
+          </a:p>
+          <a:p>
+            <a:pPr>
+              <a:spcAft>
+                <a:spcPts val="600"/>
+              </a:spcAft>
+              <a:defRPr sz="1400">
+                <a:solidFill>
+                  <a:srgbClr val="333333"/>
+                </a:solidFill>
+              </a:defRPr>
+            </a:pPr>
+            <a:r>
+              <a:t>大手企業の女性活躍推進プログラムで社外メンターを務めた経験</a:t>
+            </a:r>
+          </a:p>
+          <a:p>
+            <a:pPr>
+              <a:spcAft>
+                <a:spcPts val="600"/>
+              </a:spcAft>
+              <a:defRPr sz="1400">
+                <a:solidFill>
+                  <a:srgbClr val="333333"/>
+                </a:solidFill>
+              </a:defRPr>
+            </a:pPr>
+            <a:r>
+              <a:t>2児の母</a:t>
+            </a:r>
+          </a:p>
+          <a:p>
+            <a:pPr>
+              <a:spcAft>
+                <a:spcPts val="600"/>
+              </a:spcAft>
+              <a:defRPr sz="1400">
+                <a:solidFill>
+                  <a:srgbClr val="333333"/>
+                </a:solidFill>
+              </a:defRPr>
+            </a:pPr>
+          </a:p>
+          <a:p>
+            <a:pPr>
+              <a:spcAft>
+                <a:spcPts val="600"/>
+              </a:spcAft>
+              <a:defRPr sz="1400" b="1">
+                <a:solidFill>
+                  <a:srgbClr val="5A2030"/>
+                </a:solidFill>
+              </a:defRPr>
+            </a:pPr>
+            <a:r>
+              <a:t>→ 福井の風土を知り、東京の就活事情も知る立場から、</a:t>
+            </a:r>
+          </a:p>
+          <a:p>
+            <a:pPr lvl="1">
+              <a:spcAft>
+                <a:spcPts val="600"/>
+              </a:spcAft>
+              <a:defRPr sz="1200">
+                <a:solidFill>
+                  <a:srgbClr val="333333"/>
+                </a:solidFill>
+              </a:defRPr>
+            </a:pPr>
+            <a:r>
+              <a:t>地方の女子学生が「私はこう生きたい」と自分の言葉で語れるようになることを目指しています。</a:t>
+            </a:r>
+          </a:p>
+        </p:txBody>
+      </p:sp>
+    </p:spTree>
+  </p:cSld>
+  <p:clrMapOvr>
+    <a:masterClrMapping/>
+  </p:clrMapOvr>
+</p:sld>
+</file>
+
+<file path=ppt/slides/slide9.xml><?xml version="1.0" encoding="utf-8"?>
+<p:sld xmlns:a="http://schemas.openxmlformats.org/drawingml/2006/main" xmlns:p="http://schemas.openxmlformats.org/presentationml/2006/main" xmlns:r="http://schemas.openxmlformats.org/officeDocument/2006/relationships">
+  <p:cSld>
+    <p:spTree>
+      <p:nvGrpSpPr>
+        <p:cNvPr id="1" name=""/>
+        <p:cNvGrpSpPr/>
+        <p:nvPr/>
+      </p:nvGrpSpPr>
+      <p:grpSpPr/>
+      <p:sp>
+        <p:nvSpPr>
+          <p:cNvPr id="2" name="TextBox 1"/>
+          <p:cNvSpPr txBox="1"/>
+          <p:nvPr/>
+        </p:nvSpPr>
+        <p:spPr>
+          <a:xfrm>
+            <a:off x="0" y="0"/>
+            <a:ext cx="9144000" cy="914400"/>
+          </a:xfrm>
+          <a:prstGeom prst="rect">
+            <a:avLst/>
+          </a:prstGeom>
+          <a:noFill/>
+        </p:spPr>
+        <p:txBody>
+          <a:bodyPr wrap="square">
+            <a:spAutoFit/>
+          </a:bodyPr>
+          <a:lstStyle/>
+          <a:p>
             <a:pPr algn="l">
-              <a:lnSpc>
-                <a:spcPts val="3000"/>
-              </a:lnSpc>
-              <a:defRPr sz="2000" b="1">
-                <a:solidFill>
-                  <a:srgbClr val="FFFFFF"/>
-                </a:solidFill>
-              </a:defRPr>
-            </a:pPr>
-            <a:r>
-              <a:t>コーチ紹介</a:t>
-            </a:r>
-          </a:p>
-        </p:txBody>
-      </p:sp>
-      <p:sp>
-        <p:nvSpPr>
-          <p:cNvPr id="4" name="Rectangle 3"/>
+              <a:defRPr sz="2200" b="1">
+                <a:solidFill>
+                  <a:srgbClr val="5A2030"/>
+                </a:solidFill>
+              </a:defRPr>
+            </a:pPr>
+            <a:r>
+              <a:t>  ご利用の流れ</a:t>
+            </a:r>
+          </a:p>
+        </p:txBody>
+      </p:sp>
+      <p:sp>
+        <p:nvSpPr>
+          <p:cNvPr id="3" name="Rectangle 2"/>
           <p:cNvSpPr/>
           <p:nvPr/>
         </p:nvSpPr>
         <p:spPr>
           <a:xfrm>
-            <a:off x="548640" y="1371600"/>
-            <a:ext cx="8046720" cy="4114800"/>
+            <a:off x="457200" y="868680"/>
+            <a:ext cx="8229600" cy="27432"/>
           </a:xfrm>
           <a:prstGeom prst="rect">
             <a:avLst/>
           </a:prstGeom>
           <a:solidFill>
-            <a:srgbClr val="FDF8F6"/>
+            <a:srgbClr val="5A2030"/>
           </a:solidFill>
           <a:ln>
             <a:noFill/>
@@ -7766,14 +6488,14 @@
       </p:sp>
       <p:sp>
         <p:nvSpPr>
-          <p:cNvPr id="5" name="TextBox 4"/>
+          <p:cNvPr id="4" name="TextBox 3"/>
           <p:cNvSpPr txBox="1"/>
           <p:nvPr/>
         </p:nvSpPr>
         <p:spPr>
           <a:xfrm>
-            <a:off x="914400" y="1645920"/>
-            <a:ext cx="6400800" cy="548640"/>
+            <a:off x="548640" y="1097280"/>
+            <a:ext cx="8046720" cy="5029200"/>
           </a:xfrm>
           <a:prstGeom prst="rect">
             <a:avLst/>
@@ -7786,1583 +6508,165 @@
           </a:bodyPr>
           <a:lstStyle/>
           <a:p>
-            <a:pPr algn="l">
-              <a:lnSpc>
-                <a:spcPts val="3000"/>
-              </a:lnSpc>
-              <a:defRPr sz="2000" b="1">
-                <a:solidFill>
-                  <a:srgbClr val="9A4050"/>
-                </a:solidFill>
-              </a:defRPr>
-            </a:pPr>
-            <a:r>
-              <a:t>西川 舞衣子（にしかわ まいこ）</a:t>
-            </a:r>
-          </a:p>
-        </p:txBody>
-      </p:sp>
-      <p:sp>
-        <p:nvSpPr>
-          <p:cNvPr id="6" name="TextBox 5"/>
-          <p:cNvSpPr txBox="1"/>
-          <p:nvPr/>
-        </p:nvSpPr>
-        <p:spPr>
-          <a:xfrm>
-            <a:off x="914400" y="2286000"/>
-            <a:ext cx="6400800" cy="365760"/>
-          </a:xfrm>
-          <a:prstGeom prst="rect">
-            <a:avLst/>
-          </a:prstGeom>
-          <a:noFill/>
-        </p:spPr>
-        <p:txBody>
-          <a:bodyPr wrap="square">
-            <a:spAutoFit/>
-          </a:bodyPr>
-          <a:lstStyle/>
-          <a:p>
-            <a:pPr algn="l">
-              <a:lnSpc>
-                <a:spcPts val="1800"/>
-              </a:lnSpc>
-              <a:defRPr sz="1200" b="0">
-                <a:solidFill>
-                  <a:srgbClr val="888888"/>
-                </a:solidFill>
-              </a:defRPr>
-            </a:pPr>
-            <a:r>
-              <a:t>ハナサク代表 / EMKO</a:t>
-            </a:r>
-          </a:p>
-        </p:txBody>
-      </p:sp>
-      <p:sp>
-        <p:nvSpPr>
-          <p:cNvPr id="7" name="TextBox 6"/>
-          <p:cNvSpPr txBox="1"/>
-          <p:nvPr/>
-        </p:nvSpPr>
-        <p:spPr>
-          <a:xfrm>
-            <a:off x="914400" y="2926080"/>
-            <a:ext cx="7315200" cy="2286000"/>
-          </a:xfrm>
-          <a:prstGeom prst="rect">
-            <a:avLst/>
-          </a:prstGeom>
-          <a:noFill/>
-        </p:spPr>
-        <p:txBody>
-          <a:bodyPr wrap="square">
-            <a:spAutoFit/>
-          </a:bodyPr>
-          <a:lstStyle/>
-          <a:p>
-            <a:pPr algn="l">
-              <a:lnSpc>
-                <a:spcPts val="1980"/>
-              </a:lnSpc>
-              <a:defRPr sz="1100" b="0">
-                <a:solidFill>
-                  <a:srgbClr val="3A3A3A"/>
-                </a:solidFill>
-              </a:defRPr>
-            </a:pPr>
-            <a:r>
-              <a:t>福井県出身。高志高校卒業後、東京でキャリアを積み、</a:t>
-            </a:r>
-          </a:p>
-          <a:p>
-            <a:pPr algn="l">
-              <a:lnSpc>
-                <a:spcPts val="1980"/>
-              </a:lnSpc>
-              <a:defRPr sz="1100" b="0">
-                <a:solidFill>
-                  <a:srgbClr val="3A3A3A"/>
-                </a:solidFill>
-              </a:defRPr>
-            </a:pPr>
-            <a:r>
-              <a:t>デジタルハリウッド大学大学院修了。</a:t>
-            </a:r>
-          </a:p>
-          <a:p>
-            <a:pPr algn="l">
-              <a:lnSpc>
-                <a:spcPts val="1980"/>
-              </a:lnSpc>
-              <a:defRPr sz="1100" b="0">
-                <a:solidFill>
-                  <a:srgbClr val="3A3A3A"/>
-                </a:solidFill>
-              </a:defRPr>
-            </a:pPr>
-          </a:p>
-          <a:p>
-            <a:pPr algn="l">
-              <a:lnSpc>
-                <a:spcPts val="1980"/>
-              </a:lnSpc>
-              <a:defRPr sz="1100" b="0">
-                <a:solidFill>
-                  <a:srgbClr val="3A3A3A"/>
-                </a:solidFill>
-              </a:defRPr>
-            </a:pPr>
-            <a:r>
-              <a:t>労働市場などの調査を行うシンクタンクに勤務。</a:t>
-            </a:r>
-          </a:p>
-          <a:p>
-            <a:pPr algn="l">
-              <a:lnSpc>
-                <a:spcPts val="1980"/>
-              </a:lnSpc>
-              <a:defRPr sz="1100" b="0">
-                <a:solidFill>
-                  <a:srgbClr val="3A3A3A"/>
-                </a:solidFill>
-              </a:defRPr>
-            </a:pPr>
-            <a:r>
-              <a:t>大手企業の女性活躍推進プログラムで社外メンターを務めた経験を持つ。2児の母。</a:t>
-            </a:r>
-          </a:p>
-          <a:p>
-            <a:pPr algn="l">
-              <a:lnSpc>
-                <a:spcPts val="1980"/>
-              </a:lnSpc>
-              <a:defRPr sz="1100" b="0">
-                <a:solidFill>
-                  <a:srgbClr val="3A3A3A"/>
-                </a:solidFill>
-              </a:defRPr>
-            </a:pPr>
-          </a:p>
-          <a:p>
-            <a:pPr algn="l">
-              <a:lnSpc>
-                <a:spcPts val="1980"/>
-              </a:lnSpc>
-              <a:defRPr sz="1100" b="0">
-                <a:solidFill>
-                  <a:srgbClr val="3A3A3A"/>
-                </a:solidFill>
-              </a:defRPr>
-            </a:pPr>
-            <a:r>
-              <a:t>福井の風土を知り、東京の就活事情も知る立場から、地方の女子学生が</a:t>
-            </a:r>
-          </a:p>
-          <a:p>
-            <a:pPr algn="l">
-              <a:lnSpc>
-                <a:spcPts val="1980"/>
-              </a:lnSpc>
-              <a:defRPr sz="1100" b="0">
-                <a:solidFill>
-                  <a:srgbClr val="3A3A3A"/>
-                </a:solidFill>
-              </a:defRPr>
-            </a:pPr>
-            <a:r>
-              <a:t>「私はこう生きたい」と自分の言葉で語れるようになることを目指しています。</a:t>
-            </a:r>
-          </a:p>
-        </p:txBody>
-      </p:sp>
-      <p:sp>
-        <p:nvSpPr>
-          <p:cNvPr id="8" name="Rectangle 7"/>
-          <p:cNvSpPr/>
-          <p:nvPr/>
-        </p:nvSpPr>
-        <p:spPr>
-          <a:xfrm>
-            <a:off x="914400" y="4846320"/>
-            <a:ext cx="1143000" cy="320040"/>
-          </a:xfrm>
-          <a:prstGeom prst="rect">
-            <a:avLst/>
-          </a:prstGeom>
-          <a:solidFill>
-            <a:srgbClr val="F5E6EA"/>
-          </a:solidFill>
-          <a:ln>
-            <a:noFill/>
-          </a:ln>
-        </p:spPr>
-        <p:style>
-          <a:lnRef idx="1">
-            <a:schemeClr val="accent1"/>
-          </a:lnRef>
-          <a:fillRef idx="3">
-            <a:schemeClr val="accent1"/>
-          </a:fillRef>
-          <a:effectRef idx="2">
-            <a:schemeClr val="accent1"/>
-          </a:effectRef>
-          <a:fontRef idx="minor">
-            <a:schemeClr val="lt1"/>
-          </a:fontRef>
-        </p:style>
-        <p:txBody>
-          <a:bodyPr rtlCol="0" anchor="ctr"/>
-          <a:lstStyle/>
-          <a:p>
-            <a:pPr algn="ctr"/>
-          </a:p>
-        </p:txBody>
-      </p:sp>
-      <p:sp>
-        <p:nvSpPr>
-          <p:cNvPr id="9" name="TextBox 8"/>
-          <p:cNvSpPr txBox="1"/>
-          <p:nvPr/>
-        </p:nvSpPr>
-        <p:spPr>
-          <a:xfrm>
-            <a:off x="914400" y="4873752"/>
-            <a:ext cx="1143000" cy="274320"/>
-          </a:xfrm>
-          <a:prstGeom prst="rect">
-            <a:avLst/>
-          </a:prstGeom>
-          <a:noFill/>
-        </p:spPr>
-        <p:txBody>
-          <a:bodyPr wrap="square">
-            <a:spAutoFit/>
-          </a:bodyPr>
-          <a:lstStyle/>
-          <a:p>
-            <a:pPr algn="ctr">
-              <a:lnSpc>
-                <a:spcPts val="1200"/>
-              </a:lnSpc>
-              <a:defRPr sz="800" b="1">
-                <a:solidFill>
-                  <a:srgbClr val="9A4050"/>
-                </a:solidFill>
-              </a:defRPr>
-            </a:pPr>
-            <a:r>
-              <a:t>福井出身</a:t>
-            </a:r>
-          </a:p>
-        </p:txBody>
-      </p:sp>
-      <p:sp>
-        <p:nvSpPr>
-          <p:cNvPr id="10" name="Rectangle 9"/>
-          <p:cNvSpPr/>
-          <p:nvPr/>
-        </p:nvSpPr>
-        <p:spPr>
-          <a:xfrm>
-            <a:off x="2194560" y="4846320"/>
-            <a:ext cx="1143000" cy="320040"/>
-          </a:xfrm>
-          <a:prstGeom prst="rect">
-            <a:avLst/>
-          </a:prstGeom>
-          <a:solidFill>
-            <a:srgbClr val="F5E6EA"/>
-          </a:solidFill>
-          <a:ln>
-            <a:noFill/>
-          </a:ln>
-        </p:spPr>
-        <p:style>
-          <a:lnRef idx="1">
-            <a:schemeClr val="accent1"/>
-          </a:lnRef>
-          <a:fillRef idx="3">
-            <a:schemeClr val="accent1"/>
-          </a:fillRef>
-          <a:effectRef idx="2">
-            <a:schemeClr val="accent1"/>
-          </a:effectRef>
-          <a:fontRef idx="minor">
-            <a:schemeClr val="lt1"/>
-          </a:fontRef>
-        </p:style>
-        <p:txBody>
-          <a:bodyPr rtlCol="0" anchor="ctr"/>
-          <a:lstStyle/>
-          <a:p>
-            <a:pPr algn="ctr"/>
-          </a:p>
-        </p:txBody>
-      </p:sp>
-      <p:sp>
-        <p:nvSpPr>
-          <p:cNvPr id="11" name="TextBox 10"/>
-          <p:cNvSpPr txBox="1"/>
-          <p:nvPr/>
-        </p:nvSpPr>
-        <p:spPr>
-          <a:xfrm>
-            <a:off x="2194560" y="4873752"/>
-            <a:ext cx="1143000" cy="274320"/>
-          </a:xfrm>
-          <a:prstGeom prst="rect">
-            <a:avLst/>
-          </a:prstGeom>
-          <a:noFill/>
-        </p:spPr>
-        <p:txBody>
-          <a:bodyPr wrap="square">
-            <a:spAutoFit/>
-          </a:bodyPr>
-          <a:lstStyle/>
-          <a:p>
-            <a:pPr algn="ctr">
-              <a:lnSpc>
-                <a:spcPts val="1200"/>
-              </a:lnSpc>
-              <a:defRPr sz="800" b="1">
-                <a:solidFill>
-                  <a:srgbClr val="9A4050"/>
-                </a:solidFill>
-              </a:defRPr>
-            </a:pPr>
-            <a:r>
-              <a:t>高志高校卒</a:t>
-            </a:r>
-          </a:p>
-        </p:txBody>
-      </p:sp>
-      <p:sp>
-        <p:nvSpPr>
-          <p:cNvPr id="12" name="Rectangle 11"/>
-          <p:cNvSpPr/>
-          <p:nvPr/>
-        </p:nvSpPr>
-        <p:spPr>
-          <a:xfrm>
-            <a:off x="3474720" y="4846320"/>
-            <a:ext cx="1143000" cy="320040"/>
-          </a:xfrm>
-          <a:prstGeom prst="rect">
-            <a:avLst/>
-          </a:prstGeom>
-          <a:solidFill>
-            <a:srgbClr val="F5E6EA"/>
-          </a:solidFill>
-          <a:ln>
-            <a:noFill/>
-          </a:ln>
-        </p:spPr>
-        <p:style>
-          <a:lnRef idx="1">
-            <a:schemeClr val="accent1"/>
-          </a:lnRef>
-          <a:fillRef idx="3">
-            <a:schemeClr val="accent1"/>
-          </a:fillRef>
-          <a:effectRef idx="2">
-            <a:schemeClr val="accent1"/>
-          </a:effectRef>
-          <a:fontRef idx="minor">
-            <a:schemeClr val="lt1"/>
-          </a:fontRef>
-        </p:style>
-        <p:txBody>
-          <a:bodyPr rtlCol="0" anchor="ctr"/>
-          <a:lstStyle/>
-          <a:p>
-            <a:pPr algn="ctr"/>
-          </a:p>
-        </p:txBody>
-      </p:sp>
-      <p:sp>
-        <p:nvSpPr>
-          <p:cNvPr id="13" name="TextBox 12"/>
-          <p:cNvSpPr txBox="1"/>
-          <p:nvPr/>
-        </p:nvSpPr>
-        <p:spPr>
-          <a:xfrm>
-            <a:off x="3474720" y="4873752"/>
-            <a:ext cx="1143000" cy="274320"/>
-          </a:xfrm>
-          <a:prstGeom prst="rect">
-            <a:avLst/>
-          </a:prstGeom>
-          <a:noFill/>
-        </p:spPr>
-        <p:txBody>
-          <a:bodyPr wrap="square">
-            <a:spAutoFit/>
-          </a:bodyPr>
-          <a:lstStyle/>
-          <a:p>
-            <a:pPr algn="ctr">
-              <a:lnSpc>
-                <a:spcPts val="1200"/>
-              </a:lnSpc>
-              <a:defRPr sz="800" b="1">
-                <a:solidFill>
-                  <a:srgbClr val="9A4050"/>
-                </a:solidFill>
-              </a:defRPr>
-            </a:pPr>
-            <a:r>
-              <a:t>シンクタンク勤務</a:t>
-            </a:r>
-          </a:p>
-        </p:txBody>
-      </p:sp>
-      <p:sp>
-        <p:nvSpPr>
-          <p:cNvPr id="14" name="Rectangle 13"/>
-          <p:cNvSpPr/>
-          <p:nvPr/>
-        </p:nvSpPr>
-        <p:spPr>
-          <a:xfrm>
-            <a:off x="4754879" y="4846320"/>
-            <a:ext cx="1143000" cy="320040"/>
-          </a:xfrm>
-          <a:prstGeom prst="rect">
-            <a:avLst/>
-          </a:prstGeom>
-          <a:solidFill>
-            <a:srgbClr val="F5E6EA"/>
-          </a:solidFill>
-          <a:ln>
-            <a:noFill/>
-          </a:ln>
-        </p:spPr>
-        <p:style>
-          <a:lnRef idx="1">
-            <a:schemeClr val="accent1"/>
-          </a:lnRef>
-          <a:fillRef idx="3">
-            <a:schemeClr val="accent1"/>
-          </a:fillRef>
-          <a:effectRef idx="2">
-            <a:schemeClr val="accent1"/>
-          </a:effectRef>
-          <a:fontRef idx="minor">
-            <a:schemeClr val="lt1"/>
-          </a:fontRef>
-        </p:style>
-        <p:txBody>
-          <a:bodyPr rtlCol="0" anchor="ctr"/>
-          <a:lstStyle/>
-          <a:p>
-            <a:pPr algn="ctr"/>
-          </a:p>
-        </p:txBody>
-      </p:sp>
-      <p:sp>
-        <p:nvSpPr>
-          <p:cNvPr id="15" name="TextBox 14"/>
-          <p:cNvSpPr txBox="1"/>
-          <p:nvPr/>
-        </p:nvSpPr>
-        <p:spPr>
-          <a:xfrm>
-            <a:off x="4754879" y="4873752"/>
-            <a:ext cx="1143000" cy="274320"/>
-          </a:xfrm>
-          <a:prstGeom prst="rect">
-            <a:avLst/>
-          </a:prstGeom>
-          <a:noFill/>
-        </p:spPr>
-        <p:txBody>
-          <a:bodyPr wrap="square">
-            <a:spAutoFit/>
-          </a:bodyPr>
-          <a:lstStyle/>
-          <a:p>
-            <a:pPr algn="ctr">
-              <a:lnSpc>
-                <a:spcPts val="1200"/>
-              </a:lnSpc>
-              <a:defRPr sz="800" b="1">
-                <a:solidFill>
-                  <a:srgbClr val="9A4050"/>
-                </a:solidFill>
-              </a:defRPr>
-            </a:pPr>
-            <a:r>
-              <a:t>社外メンター</a:t>
-            </a:r>
-          </a:p>
-        </p:txBody>
-      </p:sp>
-      <p:sp>
-        <p:nvSpPr>
-          <p:cNvPr id="16" name="Rectangle 15"/>
-          <p:cNvSpPr/>
-          <p:nvPr/>
-        </p:nvSpPr>
-        <p:spPr>
-          <a:xfrm>
-            <a:off x="6035040" y="4846320"/>
-            <a:ext cx="1143000" cy="320040"/>
-          </a:xfrm>
-          <a:prstGeom prst="rect">
-            <a:avLst/>
-          </a:prstGeom>
-          <a:solidFill>
-            <a:srgbClr val="F5E6EA"/>
-          </a:solidFill>
-          <a:ln>
-            <a:noFill/>
-          </a:ln>
-        </p:spPr>
-        <p:style>
-          <a:lnRef idx="1">
-            <a:schemeClr val="accent1"/>
-          </a:lnRef>
-          <a:fillRef idx="3">
-            <a:schemeClr val="accent1"/>
-          </a:fillRef>
-          <a:effectRef idx="2">
-            <a:schemeClr val="accent1"/>
-          </a:effectRef>
-          <a:fontRef idx="minor">
-            <a:schemeClr val="lt1"/>
-          </a:fontRef>
-        </p:style>
-        <p:txBody>
-          <a:bodyPr rtlCol="0" anchor="ctr"/>
-          <a:lstStyle/>
-          <a:p>
-            <a:pPr algn="ctr"/>
-          </a:p>
-        </p:txBody>
-      </p:sp>
-      <p:sp>
-        <p:nvSpPr>
-          <p:cNvPr id="17" name="TextBox 16"/>
-          <p:cNvSpPr txBox="1"/>
-          <p:nvPr/>
-        </p:nvSpPr>
-        <p:spPr>
-          <a:xfrm>
-            <a:off x="6035040" y="4873752"/>
-            <a:ext cx="1143000" cy="274320"/>
-          </a:xfrm>
-          <a:prstGeom prst="rect">
-            <a:avLst/>
-          </a:prstGeom>
-          <a:noFill/>
-        </p:spPr>
-        <p:txBody>
-          <a:bodyPr wrap="square">
-            <a:spAutoFit/>
-          </a:bodyPr>
-          <a:lstStyle/>
-          <a:p>
-            <a:pPr algn="ctr">
-              <a:lnSpc>
-                <a:spcPts val="1200"/>
-              </a:lnSpc>
-              <a:defRPr sz="800" b="1">
-                <a:solidFill>
-                  <a:srgbClr val="9A4050"/>
-                </a:solidFill>
-              </a:defRPr>
-            </a:pPr>
-            <a:r>
-              <a:t>2児の母</a:t>
-            </a:r>
-          </a:p>
-        </p:txBody>
-      </p:sp>
-      <p:sp>
-        <p:nvSpPr>
-          <p:cNvPr id="18" name="Rectangle 17"/>
-          <p:cNvSpPr/>
-          <p:nvPr/>
-        </p:nvSpPr>
-        <p:spPr>
-          <a:xfrm>
-            <a:off x="7315200" y="4846320"/>
-            <a:ext cx="1143000" cy="320040"/>
-          </a:xfrm>
-          <a:prstGeom prst="rect">
-            <a:avLst/>
-          </a:prstGeom>
-          <a:solidFill>
-            <a:srgbClr val="F5E6EA"/>
-          </a:solidFill>
-          <a:ln>
-            <a:noFill/>
-          </a:ln>
-        </p:spPr>
-        <p:style>
-          <a:lnRef idx="1">
-            <a:schemeClr val="accent1"/>
-          </a:lnRef>
-          <a:fillRef idx="3">
-            <a:schemeClr val="accent1"/>
-          </a:fillRef>
-          <a:effectRef idx="2">
-            <a:schemeClr val="accent1"/>
-          </a:effectRef>
-          <a:fontRef idx="minor">
-            <a:schemeClr val="lt1"/>
-          </a:fontRef>
-        </p:style>
-        <p:txBody>
-          <a:bodyPr rtlCol="0" anchor="ctr"/>
-          <a:lstStyle/>
-          <a:p>
-            <a:pPr algn="ctr"/>
-          </a:p>
-        </p:txBody>
-      </p:sp>
-      <p:sp>
-        <p:nvSpPr>
-          <p:cNvPr id="19" name="TextBox 18"/>
-          <p:cNvSpPr txBox="1"/>
-          <p:nvPr/>
-        </p:nvSpPr>
-        <p:spPr>
-          <a:xfrm>
-            <a:off x="7315200" y="4873752"/>
-            <a:ext cx="1143000" cy="274320"/>
-          </a:xfrm>
-          <a:prstGeom prst="rect">
-            <a:avLst/>
-          </a:prstGeom>
-          <a:noFill/>
-        </p:spPr>
-        <p:txBody>
-          <a:bodyPr wrap="square">
-            <a:spAutoFit/>
-          </a:bodyPr>
-          <a:lstStyle/>
-          <a:p>
-            <a:pPr algn="ctr">
-              <a:lnSpc>
-                <a:spcPts val="1200"/>
-              </a:lnSpc>
-              <a:defRPr sz="800" b="1">
-                <a:solidFill>
-                  <a:srgbClr val="9A4050"/>
-                </a:solidFill>
-              </a:defRPr>
-            </a:pPr>
-            <a:r>
-              <a:t>DHU大学院修了</a:t>
-            </a:r>
-          </a:p>
-        </p:txBody>
-      </p:sp>
-    </p:spTree>
-  </p:cSld>
-  <p:clrMapOvr>
-    <a:masterClrMapping/>
-  </p:clrMapOvr>
-</p:sld>
-</file>
-
-<file path=ppt/slides/slide9.xml><?xml version="1.0" encoding="utf-8"?>
-<p:sld xmlns:a="http://schemas.openxmlformats.org/drawingml/2006/main" xmlns:p="http://schemas.openxmlformats.org/presentationml/2006/main" xmlns:r="http://schemas.openxmlformats.org/officeDocument/2006/relationships">
-  <p:cSld>
-    <p:bg>
-      <p:bgPr>
-        <a:solidFill>
-          <a:srgbClr val="FFFFFF"/>
-        </a:solidFill>
-        <a:effectLst/>
-      </p:bgPr>
-    </p:bg>
-    <p:spTree>
-      <p:nvGrpSpPr>
-        <p:cNvPr id="1" name=""/>
-        <p:cNvGrpSpPr/>
-        <p:nvPr/>
-      </p:nvGrpSpPr>
-      <p:grpSpPr/>
-      <p:sp>
-        <p:nvSpPr>
-          <p:cNvPr id="2" name="Rectangle 1"/>
-          <p:cNvSpPr/>
-          <p:nvPr/>
-        </p:nvSpPr>
-        <p:spPr>
-          <a:xfrm>
-            <a:off x="0" y="0"/>
-            <a:ext cx="9144000" cy="822960"/>
-          </a:xfrm>
-          <a:prstGeom prst="rect">
-            <a:avLst/>
-          </a:prstGeom>
-          <a:solidFill>
-            <a:srgbClr val="C06070"/>
-          </a:solidFill>
-          <a:ln>
-            <a:noFill/>
-          </a:ln>
-        </p:spPr>
-        <p:style>
-          <a:lnRef idx="1">
-            <a:schemeClr val="accent1"/>
-          </a:lnRef>
-          <a:fillRef idx="3">
-            <a:schemeClr val="accent1"/>
-          </a:fillRef>
-          <a:effectRef idx="2">
-            <a:schemeClr val="accent1"/>
-          </a:effectRef>
-          <a:fontRef idx="minor">
-            <a:schemeClr val="lt1"/>
-          </a:fontRef>
-        </p:style>
-        <p:txBody>
-          <a:bodyPr rtlCol="0" anchor="ctr"/>
-          <a:lstStyle/>
-          <a:p>
-            <a:pPr algn="ctr"/>
-          </a:p>
-        </p:txBody>
-      </p:sp>
-      <p:sp>
-        <p:nvSpPr>
-          <p:cNvPr id="3" name="TextBox 2"/>
-          <p:cNvSpPr txBox="1"/>
-          <p:nvPr/>
-        </p:nvSpPr>
-        <p:spPr>
-          <a:xfrm>
-            <a:off x="457200" y="137160"/>
-            <a:ext cx="8229600" cy="548640"/>
-          </a:xfrm>
-          <a:prstGeom prst="rect">
-            <a:avLst/>
-          </a:prstGeom>
-          <a:noFill/>
-        </p:spPr>
-        <p:txBody>
-          <a:bodyPr wrap="square">
-            <a:spAutoFit/>
-          </a:bodyPr>
-          <a:lstStyle/>
-          <a:p>
-            <a:pPr algn="l">
-              <a:lnSpc>
-                <a:spcPts val="3000"/>
-              </a:lnSpc>
-              <a:defRPr sz="2000" b="1">
-                <a:solidFill>
-                  <a:srgbClr val="FFFFFF"/>
-                </a:solidFill>
-              </a:defRPr>
-            </a:pPr>
-            <a:r>
-              <a:t>ご利用の流れ</a:t>
-            </a:r>
-          </a:p>
-        </p:txBody>
-      </p:sp>
-      <p:sp>
-        <p:nvSpPr>
-          <p:cNvPr id="4" name="Rectangle 3"/>
-          <p:cNvSpPr/>
-          <p:nvPr/>
-        </p:nvSpPr>
-        <p:spPr>
-          <a:xfrm>
-            <a:off x="548640" y="1188720"/>
-            <a:ext cx="1371600" cy="320040"/>
-          </a:xfrm>
-          <a:prstGeom prst="rect">
-            <a:avLst/>
-          </a:prstGeom>
-          <a:solidFill>
-            <a:srgbClr val="C06070"/>
-          </a:solidFill>
-          <a:ln>
-            <a:noFill/>
-          </a:ln>
-        </p:spPr>
-        <p:style>
-          <a:lnRef idx="1">
-            <a:schemeClr val="accent1"/>
-          </a:lnRef>
-          <a:fillRef idx="3">
-            <a:schemeClr val="accent1"/>
-          </a:fillRef>
-          <a:effectRef idx="2">
-            <a:schemeClr val="accent1"/>
-          </a:effectRef>
-          <a:fontRef idx="minor">
-            <a:schemeClr val="lt1"/>
-          </a:fontRef>
-        </p:style>
-        <p:txBody>
-          <a:bodyPr rtlCol="0" anchor="ctr"/>
-          <a:lstStyle/>
-          <a:p>
-            <a:pPr algn="ctr"/>
-          </a:p>
-        </p:txBody>
-      </p:sp>
-      <p:sp>
-        <p:nvSpPr>
-          <p:cNvPr id="5" name="TextBox 4"/>
-          <p:cNvSpPr txBox="1"/>
-          <p:nvPr/>
-        </p:nvSpPr>
-        <p:spPr>
-          <a:xfrm>
-            <a:off x="548640" y="1207008"/>
-            <a:ext cx="1371600" cy="274320"/>
-          </a:xfrm>
-          <a:prstGeom prst="rect">
-            <a:avLst/>
-          </a:prstGeom>
-          <a:noFill/>
-        </p:spPr>
-        <p:txBody>
-          <a:bodyPr wrap="square">
-            <a:spAutoFit/>
-          </a:bodyPr>
-          <a:lstStyle/>
-          <a:p>
-            <a:pPr algn="ctr">
-              <a:lnSpc>
-                <a:spcPts val="1500"/>
-              </a:lnSpc>
-              <a:defRPr sz="1000" b="1">
-                <a:solidFill>
-                  <a:srgbClr val="FFFFFF"/>
-                </a:solidFill>
-              </a:defRPr>
-            </a:pPr>
-            <a:r>
-              <a:t>STEP 1</a:t>
-            </a:r>
-          </a:p>
-        </p:txBody>
-      </p:sp>
-      <p:sp>
-        <p:nvSpPr>
-          <p:cNvPr id="6" name="TextBox 5"/>
-          <p:cNvSpPr txBox="1"/>
-          <p:nvPr/>
-        </p:nvSpPr>
-        <p:spPr>
-          <a:xfrm>
-            <a:off x="274320" y="1737360"/>
-            <a:ext cx="1920240" cy="731520"/>
-          </a:xfrm>
-          <a:prstGeom prst="rect">
-            <a:avLst/>
-          </a:prstGeom>
-          <a:noFill/>
-        </p:spPr>
-        <p:txBody>
-          <a:bodyPr wrap="square">
-            <a:spAutoFit/>
-          </a:bodyPr>
-          <a:lstStyle/>
-          <a:p>
-            <a:pPr algn="ctr">
-              <a:lnSpc>
-                <a:spcPts val="1950"/>
-              </a:lnSpc>
-              <a:defRPr sz="1300" b="1">
-                <a:solidFill>
-                  <a:srgbClr val="9A4050"/>
-                </a:solidFill>
-              </a:defRPr>
-            </a:pPr>
-            <a:r>
-              <a:t>無料相談を予約</a:t>
-            </a:r>
-          </a:p>
-        </p:txBody>
-      </p:sp>
-      <p:sp>
-        <p:nvSpPr>
-          <p:cNvPr id="7" name="TextBox 6"/>
-          <p:cNvSpPr txBox="1"/>
-          <p:nvPr/>
-        </p:nvSpPr>
-        <p:spPr>
-          <a:xfrm>
-            <a:off x="274320" y="2651760"/>
-            <a:ext cx="1920240" cy="1371600"/>
-          </a:xfrm>
-          <a:prstGeom prst="rect">
-            <a:avLst/>
-          </a:prstGeom>
-          <a:noFill/>
-        </p:spPr>
-        <p:txBody>
-          <a:bodyPr wrap="square">
-            <a:spAutoFit/>
-          </a:bodyPr>
-          <a:lstStyle/>
-          <a:p>
-            <a:pPr algn="ctr">
-              <a:lnSpc>
-                <a:spcPts val="1800"/>
-              </a:lnSpc>
-              <a:defRPr sz="1000" b="0">
-                <a:solidFill>
-                  <a:srgbClr val="3A3A3A"/>
-                </a:solidFill>
-              </a:defRPr>
-            </a:pPr>
-            <a:r>
-              <a:t>Googleカレンダーから</a:t>
-            </a:r>
-            <a:br/>
-            <a:r>
-              <a:t>空き日時を選ぶだけ</a:t>
-            </a:r>
-            <a:br/>
-            <a:r>
-              <a:t>（アカウント登録不要）</a:t>
-            </a:r>
-          </a:p>
-        </p:txBody>
-      </p:sp>
-      <p:sp>
-        <p:nvSpPr>
-          <p:cNvPr id="8" name="TextBox 7"/>
-          <p:cNvSpPr txBox="1"/>
-          <p:nvPr/>
-        </p:nvSpPr>
-        <p:spPr>
-          <a:xfrm>
-            <a:off x="2194560" y="1828800"/>
-            <a:ext cx="274320" cy="548640"/>
-          </a:xfrm>
-          <a:prstGeom prst="rect">
-            <a:avLst/>
-          </a:prstGeom>
-          <a:noFill/>
-        </p:spPr>
-        <p:txBody>
-          <a:bodyPr wrap="square">
-            <a:spAutoFit/>
-          </a:bodyPr>
-          <a:lstStyle/>
-          <a:p>
-            <a:pPr algn="ctr">
-              <a:lnSpc>
-                <a:spcPts val="3000"/>
-              </a:lnSpc>
-              <a:defRPr sz="2000" b="1">
-                <a:solidFill>
-                  <a:srgbClr val="C06070"/>
-                </a:solidFill>
-              </a:defRPr>
-            </a:pPr>
-            <a:r>
-              <a:t>&gt;</a:t>
-            </a:r>
-          </a:p>
-        </p:txBody>
-      </p:sp>
-      <p:sp>
-        <p:nvSpPr>
-          <p:cNvPr id="9" name="Rectangle 8"/>
-          <p:cNvSpPr/>
-          <p:nvPr/>
-        </p:nvSpPr>
-        <p:spPr>
-          <a:xfrm>
-            <a:off x="2743199" y="1188720"/>
-            <a:ext cx="1371600" cy="320040"/>
-          </a:xfrm>
-          <a:prstGeom prst="rect">
-            <a:avLst/>
-          </a:prstGeom>
-          <a:solidFill>
-            <a:srgbClr val="C06070"/>
-          </a:solidFill>
-          <a:ln>
-            <a:noFill/>
-          </a:ln>
-        </p:spPr>
-        <p:style>
-          <a:lnRef idx="1">
-            <a:schemeClr val="accent1"/>
-          </a:lnRef>
-          <a:fillRef idx="3">
-            <a:schemeClr val="accent1"/>
-          </a:fillRef>
-          <a:effectRef idx="2">
-            <a:schemeClr val="accent1"/>
-          </a:effectRef>
-          <a:fontRef idx="minor">
-            <a:schemeClr val="lt1"/>
-          </a:fontRef>
-        </p:style>
-        <p:txBody>
-          <a:bodyPr rtlCol="0" anchor="ctr"/>
-          <a:lstStyle/>
-          <a:p>
-            <a:pPr algn="ctr"/>
-          </a:p>
-        </p:txBody>
-      </p:sp>
-      <p:sp>
-        <p:nvSpPr>
-          <p:cNvPr id="10" name="TextBox 9"/>
-          <p:cNvSpPr txBox="1"/>
-          <p:nvPr/>
-        </p:nvSpPr>
-        <p:spPr>
-          <a:xfrm>
-            <a:off x="2743199" y="1207008"/>
-            <a:ext cx="1371600" cy="274320"/>
-          </a:xfrm>
-          <a:prstGeom prst="rect">
-            <a:avLst/>
-          </a:prstGeom>
-          <a:noFill/>
-        </p:spPr>
-        <p:txBody>
-          <a:bodyPr wrap="square">
-            <a:spAutoFit/>
-          </a:bodyPr>
-          <a:lstStyle/>
-          <a:p>
-            <a:pPr algn="ctr">
-              <a:lnSpc>
-                <a:spcPts val="1500"/>
-              </a:lnSpc>
-              <a:defRPr sz="1000" b="1">
-                <a:solidFill>
-                  <a:srgbClr val="FFFFFF"/>
-                </a:solidFill>
-              </a:defRPr>
-            </a:pPr>
-            <a:r>
-              <a:t>STEP 2</a:t>
-            </a:r>
-          </a:p>
-        </p:txBody>
-      </p:sp>
-      <p:sp>
-        <p:nvSpPr>
-          <p:cNvPr id="11" name="TextBox 10"/>
-          <p:cNvSpPr txBox="1"/>
-          <p:nvPr/>
-        </p:nvSpPr>
-        <p:spPr>
-          <a:xfrm>
-            <a:off x="2468879" y="1737360"/>
-            <a:ext cx="1920240" cy="731520"/>
-          </a:xfrm>
-          <a:prstGeom prst="rect">
-            <a:avLst/>
-          </a:prstGeom>
-          <a:noFill/>
-        </p:spPr>
-        <p:txBody>
-          <a:bodyPr wrap="square">
-            <a:spAutoFit/>
-          </a:bodyPr>
-          <a:lstStyle/>
-          <a:p>
-            <a:pPr algn="ctr">
-              <a:lnSpc>
-                <a:spcPts val="1950"/>
-              </a:lnSpc>
-              <a:defRPr sz="1300" b="1">
-                <a:solidFill>
-                  <a:srgbClr val="9A4050"/>
-                </a:solidFill>
-              </a:defRPr>
-            </a:pPr>
-            <a:r>
-              <a:t>初回面談（無料）</a:t>
-            </a:r>
-          </a:p>
-        </p:txBody>
-      </p:sp>
-      <p:sp>
-        <p:nvSpPr>
-          <p:cNvPr id="12" name="TextBox 11"/>
-          <p:cNvSpPr txBox="1"/>
-          <p:nvPr/>
-        </p:nvSpPr>
-        <p:spPr>
-          <a:xfrm>
-            <a:off x="2468879" y="2651760"/>
-            <a:ext cx="1920240" cy="1371600"/>
-          </a:xfrm>
-          <a:prstGeom prst="rect">
-            <a:avLst/>
-          </a:prstGeom>
-          <a:noFill/>
-        </p:spPr>
-        <p:txBody>
-          <a:bodyPr wrap="square">
-            <a:spAutoFit/>
-          </a:bodyPr>
-          <a:lstStyle/>
-          <a:p>
-            <a:pPr algn="ctr">
-              <a:lnSpc>
-                <a:spcPts val="1800"/>
-              </a:lnSpc>
-              <a:defRPr sz="1000" b="0">
-                <a:solidFill>
-                  <a:srgbClr val="3A3A3A"/>
-                </a:solidFill>
-              </a:defRPr>
-            </a:pPr>
-            <a:r>
-              <a:t>現状をヒアリングし</a:t>
-            </a:r>
-            <a:br/>
-            <a:r>
-              <a:t>最適なプランをご提案</a:t>
-            </a:r>
-          </a:p>
-        </p:txBody>
-      </p:sp>
-      <p:sp>
-        <p:nvSpPr>
-          <p:cNvPr id="13" name="TextBox 12"/>
-          <p:cNvSpPr txBox="1"/>
-          <p:nvPr/>
-        </p:nvSpPr>
-        <p:spPr>
-          <a:xfrm>
-            <a:off x="4389120" y="1828800"/>
-            <a:ext cx="274320" cy="548640"/>
-          </a:xfrm>
-          <a:prstGeom prst="rect">
-            <a:avLst/>
-          </a:prstGeom>
-          <a:noFill/>
-        </p:spPr>
-        <p:txBody>
-          <a:bodyPr wrap="square">
-            <a:spAutoFit/>
-          </a:bodyPr>
-          <a:lstStyle/>
-          <a:p>
-            <a:pPr algn="ctr">
-              <a:lnSpc>
-                <a:spcPts val="3000"/>
-              </a:lnSpc>
-              <a:defRPr sz="2000" b="1">
-                <a:solidFill>
-                  <a:srgbClr val="C06070"/>
-                </a:solidFill>
-              </a:defRPr>
-            </a:pPr>
-            <a:r>
-              <a:t>&gt;</a:t>
-            </a:r>
-          </a:p>
-        </p:txBody>
-      </p:sp>
-      <p:sp>
-        <p:nvSpPr>
-          <p:cNvPr id="14" name="Rectangle 13"/>
-          <p:cNvSpPr/>
-          <p:nvPr/>
-        </p:nvSpPr>
-        <p:spPr>
-          <a:xfrm>
-            <a:off x="4937759" y="1188720"/>
-            <a:ext cx="1371600" cy="320040"/>
-          </a:xfrm>
-          <a:prstGeom prst="rect">
-            <a:avLst/>
-          </a:prstGeom>
-          <a:solidFill>
-            <a:srgbClr val="C06070"/>
-          </a:solidFill>
-          <a:ln>
-            <a:noFill/>
-          </a:ln>
-        </p:spPr>
-        <p:style>
-          <a:lnRef idx="1">
-            <a:schemeClr val="accent1"/>
-          </a:lnRef>
-          <a:fillRef idx="3">
-            <a:schemeClr val="accent1"/>
-          </a:fillRef>
-          <a:effectRef idx="2">
-            <a:schemeClr val="accent1"/>
-          </a:effectRef>
-          <a:fontRef idx="minor">
-            <a:schemeClr val="lt1"/>
-          </a:fontRef>
-        </p:style>
-        <p:txBody>
-          <a:bodyPr rtlCol="0" anchor="ctr"/>
-          <a:lstStyle/>
-          <a:p>
-            <a:pPr algn="ctr"/>
-          </a:p>
-        </p:txBody>
-      </p:sp>
-      <p:sp>
-        <p:nvSpPr>
-          <p:cNvPr id="15" name="TextBox 14"/>
-          <p:cNvSpPr txBox="1"/>
-          <p:nvPr/>
-        </p:nvSpPr>
-        <p:spPr>
-          <a:xfrm>
-            <a:off x="4937759" y="1207008"/>
-            <a:ext cx="1371600" cy="274320"/>
-          </a:xfrm>
-          <a:prstGeom prst="rect">
-            <a:avLst/>
-          </a:prstGeom>
-          <a:noFill/>
-        </p:spPr>
-        <p:txBody>
-          <a:bodyPr wrap="square">
-            <a:spAutoFit/>
-          </a:bodyPr>
-          <a:lstStyle/>
-          <a:p>
-            <a:pPr algn="ctr">
-              <a:lnSpc>
-                <a:spcPts val="1500"/>
-              </a:lnSpc>
-              <a:defRPr sz="1000" b="1">
-                <a:solidFill>
-                  <a:srgbClr val="FFFFFF"/>
-                </a:solidFill>
-              </a:defRPr>
-            </a:pPr>
-            <a:r>
-              <a:t>STEP 3</a:t>
-            </a:r>
-          </a:p>
-        </p:txBody>
-      </p:sp>
-      <p:sp>
-        <p:nvSpPr>
-          <p:cNvPr id="16" name="TextBox 15"/>
-          <p:cNvSpPr txBox="1"/>
-          <p:nvPr/>
-        </p:nvSpPr>
-        <p:spPr>
-          <a:xfrm>
-            <a:off x="4663440" y="1737360"/>
-            <a:ext cx="1920240" cy="731520"/>
-          </a:xfrm>
-          <a:prstGeom prst="rect">
-            <a:avLst/>
-          </a:prstGeom>
-          <a:noFill/>
-        </p:spPr>
-        <p:txBody>
-          <a:bodyPr wrap="square">
-            <a:spAutoFit/>
-          </a:bodyPr>
-          <a:lstStyle/>
-          <a:p>
-            <a:pPr algn="ctr">
-              <a:lnSpc>
-                <a:spcPts val="1950"/>
-              </a:lnSpc>
-              <a:defRPr sz="1300" b="1">
-                <a:solidFill>
-                  <a:srgbClr val="9A4050"/>
-                </a:solidFill>
-              </a:defRPr>
-            </a:pPr>
-            <a:r>
-              <a:t>プランを選んで</a:t>
-            </a:r>
-            <a:br/>
-            <a:r>
-              <a:t>スタート</a:t>
-            </a:r>
-          </a:p>
-        </p:txBody>
-      </p:sp>
-      <p:sp>
-        <p:nvSpPr>
-          <p:cNvPr id="17" name="TextBox 16"/>
-          <p:cNvSpPr txBox="1"/>
-          <p:nvPr/>
-        </p:nvSpPr>
-        <p:spPr>
-          <a:xfrm>
-            <a:off x="4663440" y="2651760"/>
-            <a:ext cx="1920240" cy="1371600"/>
-          </a:xfrm>
-          <a:prstGeom prst="rect">
-            <a:avLst/>
-          </a:prstGeom>
-          <a:noFill/>
-        </p:spPr>
-        <p:txBody>
-          <a:bodyPr wrap="square">
-            <a:spAutoFit/>
-          </a:bodyPr>
-          <a:lstStyle/>
-          <a:p>
-            <a:pPr algn="ctr">
-              <a:lnSpc>
-                <a:spcPts val="1800"/>
-              </a:lnSpc>
-              <a:defRPr sz="1000" b="0">
-                <a:solidFill>
-                  <a:srgbClr val="3A3A3A"/>
-                </a:solidFill>
-              </a:defRPr>
-            </a:pPr>
-            <a:r>
-              <a:t>クレジットカード</a:t>
-            </a:r>
-            <a:br/>
-            <a:r>
-              <a:t>Apple Pay / Google Pay</a:t>
-            </a:r>
-          </a:p>
-        </p:txBody>
-      </p:sp>
-      <p:sp>
-        <p:nvSpPr>
-          <p:cNvPr id="18" name="TextBox 17"/>
-          <p:cNvSpPr txBox="1"/>
-          <p:nvPr/>
-        </p:nvSpPr>
-        <p:spPr>
-          <a:xfrm>
-            <a:off x="6583679" y="1828800"/>
-            <a:ext cx="274320" cy="548640"/>
-          </a:xfrm>
-          <a:prstGeom prst="rect">
-            <a:avLst/>
-          </a:prstGeom>
-          <a:noFill/>
-        </p:spPr>
-        <p:txBody>
-          <a:bodyPr wrap="square">
-            <a:spAutoFit/>
-          </a:bodyPr>
-          <a:lstStyle/>
-          <a:p>
-            <a:pPr algn="ctr">
-              <a:lnSpc>
-                <a:spcPts val="3000"/>
-              </a:lnSpc>
-              <a:defRPr sz="2000" b="1">
-                <a:solidFill>
-                  <a:srgbClr val="C06070"/>
-                </a:solidFill>
-              </a:defRPr>
-            </a:pPr>
-            <a:r>
-              <a:t>&gt;</a:t>
-            </a:r>
-          </a:p>
-        </p:txBody>
-      </p:sp>
-      <p:sp>
-        <p:nvSpPr>
-          <p:cNvPr id="19" name="Rectangle 18"/>
-          <p:cNvSpPr/>
-          <p:nvPr/>
-        </p:nvSpPr>
-        <p:spPr>
-          <a:xfrm>
-            <a:off x="7132319" y="1188720"/>
-            <a:ext cx="1371600" cy="320040"/>
-          </a:xfrm>
-          <a:prstGeom prst="rect">
-            <a:avLst/>
-          </a:prstGeom>
-          <a:solidFill>
-            <a:srgbClr val="C06070"/>
-          </a:solidFill>
-          <a:ln>
-            <a:noFill/>
-          </a:ln>
-        </p:spPr>
-        <p:style>
-          <a:lnRef idx="1">
-            <a:schemeClr val="accent1"/>
-          </a:lnRef>
-          <a:fillRef idx="3">
-            <a:schemeClr val="accent1"/>
-          </a:fillRef>
-          <a:effectRef idx="2">
-            <a:schemeClr val="accent1"/>
-          </a:effectRef>
-          <a:fontRef idx="minor">
-            <a:schemeClr val="lt1"/>
-          </a:fontRef>
-        </p:style>
-        <p:txBody>
-          <a:bodyPr rtlCol="0" anchor="ctr"/>
-          <a:lstStyle/>
-          <a:p>
-            <a:pPr algn="ctr"/>
-          </a:p>
-        </p:txBody>
-      </p:sp>
-      <p:sp>
-        <p:nvSpPr>
-          <p:cNvPr id="20" name="TextBox 19"/>
-          <p:cNvSpPr txBox="1"/>
-          <p:nvPr/>
-        </p:nvSpPr>
-        <p:spPr>
-          <a:xfrm>
-            <a:off x="7132319" y="1207008"/>
-            <a:ext cx="1371600" cy="274320"/>
-          </a:xfrm>
-          <a:prstGeom prst="rect">
-            <a:avLst/>
-          </a:prstGeom>
-          <a:noFill/>
-        </p:spPr>
-        <p:txBody>
-          <a:bodyPr wrap="square">
-            <a:spAutoFit/>
-          </a:bodyPr>
-          <a:lstStyle/>
-          <a:p>
-            <a:pPr algn="ctr">
-              <a:lnSpc>
-                <a:spcPts val="1500"/>
-              </a:lnSpc>
-              <a:defRPr sz="1000" b="1">
-                <a:solidFill>
-                  <a:srgbClr val="FFFFFF"/>
-                </a:solidFill>
-              </a:defRPr>
-            </a:pPr>
-            <a:r>
-              <a:t>STEP 4</a:t>
-            </a:r>
-          </a:p>
-        </p:txBody>
-      </p:sp>
-      <p:sp>
-        <p:nvSpPr>
-          <p:cNvPr id="21" name="TextBox 20"/>
-          <p:cNvSpPr txBox="1"/>
-          <p:nvPr/>
-        </p:nvSpPr>
-        <p:spPr>
-          <a:xfrm>
-            <a:off x="6857999" y="1737360"/>
-            <a:ext cx="1920240" cy="731520"/>
-          </a:xfrm>
-          <a:prstGeom prst="rect">
-            <a:avLst/>
-          </a:prstGeom>
-          <a:noFill/>
-        </p:spPr>
-        <p:txBody>
-          <a:bodyPr wrap="square">
-            <a:spAutoFit/>
-          </a:bodyPr>
-          <a:lstStyle/>
-          <a:p>
-            <a:pPr algn="ctr">
-              <a:lnSpc>
-                <a:spcPts val="1950"/>
-              </a:lnSpc>
-              <a:defRPr sz="1300" b="1">
-                <a:solidFill>
-                  <a:srgbClr val="9A4050"/>
-                </a:solidFill>
-              </a:defRPr>
-            </a:pPr>
-            <a:r>
-              <a:t>定期面談で伴走</a:t>
-            </a:r>
-          </a:p>
-        </p:txBody>
-      </p:sp>
-      <p:sp>
-        <p:nvSpPr>
-          <p:cNvPr id="22" name="TextBox 21"/>
-          <p:cNvSpPr txBox="1"/>
-          <p:nvPr/>
-        </p:nvSpPr>
-        <p:spPr>
-          <a:xfrm>
-            <a:off x="6857999" y="2651760"/>
-            <a:ext cx="1920240" cy="1371600"/>
-          </a:xfrm>
-          <a:prstGeom prst="rect">
-            <a:avLst/>
-          </a:prstGeom>
-          <a:noFill/>
-        </p:spPr>
-        <p:txBody>
-          <a:bodyPr wrap="square">
-            <a:spAutoFit/>
-          </a:bodyPr>
-          <a:lstStyle/>
-          <a:p>
-            <a:pPr algn="ctr">
-              <a:lnSpc>
-                <a:spcPts val="1800"/>
-              </a:lnSpc>
-              <a:defRPr sz="1000" b="0">
-                <a:solidFill>
-                  <a:srgbClr val="3A3A3A"/>
-                </a:solidFill>
-              </a:defRPr>
-            </a:pPr>
-            <a:r>
-              <a:t>一緒に「あなたの言葉」を</a:t>
-            </a:r>
-            <a:br/>
-            <a:r>
-              <a:t>見つけていきます</a:t>
-            </a:r>
-          </a:p>
-        </p:txBody>
-      </p:sp>
-      <p:sp>
-        <p:nvSpPr>
-          <p:cNvPr id="23" name="TextBox 22"/>
-          <p:cNvSpPr txBox="1"/>
-          <p:nvPr/>
-        </p:nvSpPr>
-        <p:spPr>
-          <a:xfrm>
-            <a:off x="548640" y="4572000"/>
-            <a:ext cx="8046720" cy="1371600"/>
-          </a:xfrm>
-          <a:prstGeom prst="rect">
-            <a:avLst/>
-          </a:prstGeom>
-          <a:noFill/>
-        </p:spPr>
-        <p:txBody>
-          <a:bodyPr wrap="square">
-            <a:spAutoFit/>
-          </a:bodyPr>
-          <a:lstStyle/>
-          <a:p>
-            <a:pPr algn="ctr">
-              <a:lnSpc>
-                <a:spcPts val="1920"/>
-              </a:lnSpc>
-              <a:defRPr sz="1200" b="0">
+            <a:pPr>
+              <a:spcAft>
+                <a:spcPts val="600"/>
+              </a:spcAft>
+              <a:defRPr sz="1400" b="1">
+                <a:solidFill>
+                  <a:srgbClr val="5A2030"/>
+                </a:solidFill>
+              </a:defRPr>
+            </a:pPr>
+            <a:r>
+              <a:t>★ STEP 1：無料相談を予約</a:t>
+            </a:r>
+          </a:p>
+          <a:p>
+            <a:pPr lvl="1">
+              <a:spcAft>
+                <a:spcPts val="600"/>
+              </a:spcAft>
+              <a:defRPr sz="1200">
+                <a:solidFill>
+                  <a:srgbClr val="333333"/>
+                </a:solidFill>
+              </a:defRPr>
+            </a:pPr>
+            <a:r>
+              <a:t>Googleカレンダーから空き日時を選ぶだけ（アカウント登録不要）</a:t>
+            </a:r>
+          </a:p>
+          <a:p>
+            <a:pPr>
+              <a:spcAft>
+                <a:spcPts val="600"/>
+              </a:spcAft>
+              <a:defRPr sz="1400">
+                <a:solidFill>
+                  <a:srgbClr val="333333"/>
+                </a:solidFill>
+              </a:defRPr>
+            </a:pPr>
+          </a:p>
+          <a:p>
+            <a:pPr>
+              <a:spcAft>
+                <a:spcPts val="600"/>
+              </a:spcAft>
+              <a:defRPr sz="1400" b="1">
+                <a:solidFill>
+                  <a:srgbClr val="5A2030"/>
+                </a:solidFill>
+              </a:defRPr>
+            </a:pPr>
+            <a:r>
+              <a:t>★ STEP 2：初回面談（無料）</a:t>
+            </a:r>
+          </a:p>
+          <a:p>
+            <a:pPr lvl="1">
+              <a:spcAft>
+                <a:spcPts val="600"/>
+              </a:spcAft>
+              <a:defRPr sz="1200">
+                <a:solidFill>
+                  <a:srgbClr val="333333"/>
+                </a:solidFill>
+              </a:defRPr>
+            </a:pPr>
+            <a:r>
+              <a:t>現状をヒアリングし、最適なプランをご提案</a:t>
+            </a:r>
+          </a:p>
+          <a:p>
+            <a:pPr>
+              <a:spcAft>
+                <a:spcPts val="600"/>
+              </a:spcAft>
+              <a:defRPr sz="1400">
+                <a:solidFill>
+                  <a:srgbClr val="333333"/>
+                </a:solidFill>
+              </a:defRPr>
+            </a:pPr>
+          </a:p>
+          <a:p>
+            <a:pPr>
+              <a:spcAft>
+                <a:spcPts val="600"/>
+              </a:spcAft>
+              <a:defRPr sz="1400" b="1">
+                <a:solidFill>
+                  <a:srgbClr val="5A2030"/>
+                </a:solidFill>
+              </a:defRPr>
+            </a:pPr>
+            <a:r>
+              <a:t>★ STEP 3：プランを選んでスタート</a:t>
+            </a:r>
+          </a:p>
+          <a:p>
+            <a:pPr lvl="1">
+              <a:spcAft>
+                <a:spcPts val="600"/>
+              </a:spcAft>
+              <a:defRPr sz="1200">
+                <a:solidFill>
+                  <a:srgbClr val="333333"/>
+                </a:solidFill>
+              </a:defRPr>
+            </a:pPr>
+            <a:r>
+              <a:t>お支払いはクレジットカード / Apple Pay / Google Pay</a:t>
+            </a:r>
+          </a:p>
+          <a:p>
+            <a:pPr>
+              <a:spcAft>
+                <a:spcPts val="600"/>
+              </a:spcAft>
+              <a:defRPr sz="1400">
+                <a:solidFill>
+                  <a:srgbClr val="333333"/>
+                </a:solidFill>
+              </a:defRPr>
+            </a:pPr>
+          </a:p>
+          <a:p>
+            <a:pPr>
+              <a:spcAft>
+                <a:spcPts val="600"/>
+              </a:spcAft>
+              <a:defRPr sz="1400" b="1">
+                <a:solidFill>
+                  <a:srgbClr val="5A2030"/>
+                </a:solidFill>
+              </a:defRPr>
+            </a:pPr>
+            <a:r>
+              <a:t>★ STEP 4：定期面談で伴走</a:t>
+            </a:r>
+          </a:p>
+          <a:p>
+            <a:pPr lvl="1">
+              <a:spcAft>
+                <a:spcPts val="600"/>
+              </a:spcAft>
+              <a:defRPr sz="1200">
+                <a:solidFill>
+                  <a:srgbClr val="333333"/>
+                </a:solidFill>
+              </a:defRPr>
+            </a:pPr>
+            <a:r>
+              <a:t>一緒に「あなたの言葉」を見つけていきます</a:t>
+            </a:r>
+          </a:p>
+          <a:p/>
+          <a:p>
+            <a:pPr>
+              <a:defRPr sz="1100" i="1">
                 <a:solidFill>
                   <a:srgbClr val="888888"/>
                 </a:solidFill>

--- a/docs/hanasaku_service_overview.pptx
+++ b/docs/hanasaku_service_overview.pptx
@@ -16,7 +16,7 @@
     <p:sldId id="264" r:id="rId15"/>
     <p:sldId id="265" r:id="rId16"/>
   </p:sldIdLst>
-  <p:sldSz cx="9144000" cy="6858000" type="screen4x3"/>
+  <p:sldSz cx="12191695" cy="6858000" type="screen4x3"/>
   <p:notesSz cx="6858000" cy="9144000"/>
   <p:defaultTextStyle>
     <a:defPPr>
@@ -3113,8 +3113,8 @@
         </p:nvSpPr>
         <p:spPr>
           <a:xfrm>
-            <a:off x="731520" y="1371600"/>
-            <a:ext cx="7680960" cy="1828800"/>
+            <a:off x="1097280" y="1371600"/>
+            <a:ext cx="10058400" cy="2286000"/>
           </a:xfrm>
           <a:prstGeom prst="rect">
             <a:avLst/>
@@ -3128,7 +3128,7 @@
           <a:lstStyle/>
           <a:p>
             <a:pPr algn="l">
-              <a:defRPr sz="3200" b="1">
+              <a:defRPr sz="4000" b="1">
                 <a:solidFill>
                   <a:srgbClr val="FFFFFF"/>
                 </a:solidFill>
@@ -3144,7 +3144,10 @@
           </a:p>
           <a:p>
             <a:pPr algn="l">
-              <a:defRPr sz="1600">
+              <a:spcBef>
+                <a:spcPts val="1200"/>
+              </a:spcBef>
+              <a:defRPr sz="2000">
                 <a:solidFill>
                   <a:srgbClr val="E8A0A8"/>
                 </a:solidFill>
@@ -3195,8 +3198,8 @@
         </p:nvSpPr>
         <p:spPr>
           <a:xfrm>
-            <a:off x="731520" y="2286000"/>
-            <a:ext cx="7680960" cy="1371600"/>
+            <a:off x="1097280" y="2286000"/>
+            <a:ext cx="10058400" cy="1828800"/>
           </a:xfrm>
           <a:prstGeom prst="rect">
             <a:avLst/>
@@ -3210,7 +3213,7 @@
           <a:lstStyle/>
           <a:p>
             <a:pPr algn="ctr">
-              <a:defRPr sz="2800" b="1">
+              <a:defRPr sz="3600" b="1">
                 <a:solidFill>
                   <a:srgbClr val="FFFFFF"/>
                 </a:solidFill>
@@ -3230,8 +3233,8 @@
         </p:nvSpPr>
         <p:spPr>
           <a:xfrm>
-            <a:off x="731520" y="3657600"/>
-            <a:ext cx="7680960" cy="2286000"/>
+            <a:off x="1097280" y="3657600"/>
+            <a:ext cx="10058400" cy="2743200"/>
           </a:xfrm>
           <a:prstGeom prst="rect">
             <a:avLst/>
@@ -3246,66 +3249,66 @@
           <a:p>
             <a:pPr algn="ctr">
               <a:spcAft>
-                <a:spcPts val="800"/>
+                <a:spcPts val="1200"/>
+              </a:spcAft>
+              <a:defRPr sz="1800">
+                <a:solidFill>
+                  <a:srgbClr val="E8A0A8"/>
+                </a:solidFill>
+              </a:defRPr>
+            </a:pPr>
+            <a:r>
+              <a:t>LP: https://mai-san447.github.io/hanasaku-career/</a:t>
+            </a:r>
+          </a:p>
+          <a:p>
+            <a:pPr algn="ctr">
+              <a:spcAft>
+                <a:spcPts val="1200"/>
+              </a:spcAft>
+              <a:defRPr sz="1800">
+                <a:solidFill>
+                  <a:srgbClr val="E8A0A8"/>
+                </a:solidFill>
+              </a:defRPr>
+            </a:pPr>
+            <a:r>
+              <a:t>無料相談予約: https://calendar.app.google/u8SkpMApaMfaRoSx6</a:t>
+            </a:r>
+          </a:p>
+          <a:p>
+            <a:pPr algn="ctr">
+              <a:spcAft>
+                <a:spcPts val="1200"/>
+              </a:spcAft>
+              <a:defRPr sz="1800">
+                <a:solidFill>
+                  <a:srgbClr val="E8A0A8"/>
+                </a:solidFill>
+              </a:defRPr>
+            </a:pPr>
+            <a:r>
+              <a:t>LINE公式: https://lin.ee/qURXYyS</a:t>
+            </a:r>
+          </a:p>
+          <a:p>
+            <a:pPr algn="ctr">
+              <a:spcAft>
+                <a:spcPts val="1200"/>
               </a:spcAft>
               <a:defRPr sz="1400">
                 <a:solidFill>
-                  <a:srgbClr val="E8A0A8"/>
-                </a:solidFill>
-              </a:defRPr>
-            </a:pPr>
-            <a:r>
-              <a:t>LP: https://mai-san447.github.io/hanasaku-career/</a:t>
-            </a:r>
+                  <a:srgbClr val="888888"/>
+                </a:solidFill>
+              </a:defRPr>
+            </a:pPr>
           </a:p>
           <a:p>
             <a:pPr algn="ctr">
               <a:spcAft>
-                <a:spcPts val="800"/>
+                <a:spcPts val="1200"/>
               </a:spcAft>
               <a:defRPr sz="1400">
-                <a:solidFill>
-                  <a:srgbClr val="E8A0A8"/>
-                </a:solidFill>
-              </a:defRPr>
-            </a:pPr>
-            <a:r>
-              <a:t>無料相談予約: https://calendar.app.google/u8SkpMApaMfaRoSx6</a:t>
-            </a:r>
-          </a:p>
-          <a:p>
-            <a:pPr algn="ctr">
-              <a:spcAft>
-                <a:spcPts val="800"/>
-              </a:spcAft>
-              <a:defRPr sz="1400">
-                <a:solidFill>
-                  <a:srgbClr val="E8A0A8"/>
-                </a:solidFill>
-              </a:defRPr>
-            </a:pPr>
-            <a:r>
-              <a:t>LINE公式: https://lin.ee/qURXYyS</a:t>
-            </a:r>
-          </a:p>
-          <a:p>
-            <a:pPr algn="ctr">
-              <a:spcAft>
-                <a:spcPts val="800"/>
-              </a:spcAft>
-              <a:defRPr sz="1100">
-                <a:solidFill>
-                  <a:srgbClr val="888888"/>
-                </a:solidFill>
-              </a:defRPr>
-            </a:pPr>
-          </a:p>
-          <a:p>
-            <a:pPr algn="ctr">
-              <a:spcAft>
-                <a:spcPts val="800"/>
-              </a:spcAft>
-              <a:defRPr sz="1100">
                 <a:solidFill>
                   <a:srgbClr val="888888"/>
                 </a:solidFill>
@@ -3344,7 +3347,7 @@
         <p:spPr>
           <a:xfrm>
             <a:off x="0" y="0"/>
-            <a:ext cx="9144000" cy="914400"/>
+            <a:ext cx="12191695" cy="1005840"/>
           </a:xfrm>
           <a:prstGeom prst="rect">
             <a:avLst/>
@@ -3358,7 +3361,7 @@
           <a:lstStyle/>
           <a:p>
             <a:pPr algn="l">
-              <a:defRPr sz="2200" b="1">
+              <a:defRPr sz="2800" b="1">
                 <a:solidFill>
                   <a:srgbClr val="5A2030"/>
                 </a:solidFill>
@@ -3378,8 +3381,8 @@
         </p:nvSpPr>
         <p:spPr>
           <a:xfrm>
-            <a:off x="457200" y="868680"/>
-            <a:ext cx="8229600" cy="27432"/>
+            <a:off x="731520" y="960120"/>
+            <a:ext cx="10698480" cy="27432"/>
           </a:xfrm>
           <a:prstGeom prst="rect">
             <a:avLst/>
@@ -3421,8 +3424,8 @@
         </p:nvSpPr>
         <p:spPr>
           <a:xfrm>
-            <a:off x="548640" y="1097280"/>
-            <a:ext cx="8046720" cy="5029200"/>
+            <a:off x="914400" y="1280160"/>
+            <a:ext cx="10332720" cy="5029200"/>
           </a:xfrm>
           <a:prstGeom prst="rect">
             <a:avLst/>
@@ -3437,9 +3440,9 @@
           <a:p>
             <a:pPr>
               <a:spcAft>
-                <a:spcPts val="600"/>
+                <a:spcPts val="800"/>
               </a:spcAft>
-              <a:defRPr sz="1400">
+              <a:defRPr sz="1800">
                 <a:solidFill>
                   <a:srgbClr val="333333"/>
                 </a:solidFill>
@@ -3452,9 +3455,9 @@
           <a:p>
             <a:pPr>
               <a:spcAft>
-                <a:spcPts val="600"/>
+                <a:spcPts val="800"/>
               </a:spcAft>
-              <a:defRPr sz="1400">
+              <a:defRPr sz="1800">
                 <a:solidFill>
                   <a:srgbClr val="333333"/>
                 </a:solidFill>
@@ -3467,9 +3470,9 @@
           <a:p>
             <a:pPr>
               <a:spcAft>
-                <a:spcPts val="600"/>
+                <a:spcPts val="800"/>
               </a:spcAft>
-              <a:defRPr sz="1400">
+              <a:defRPr sz="1800">
                 <a:solidFill>
                   <a:srgbClr val="333333"/>
                 </a:solidFill>
@@ -3479,9 +3482,9 @@
           <a:p>
             <a:pPr>
               <a:spcAft>
-                <a:spcPts val="600"/>
+                <a:spcPts val="800"/>
               </a:spcAft>
-              <a:defRPr sz="1400" b="1">
+              <a:defRPr sz="1800" b="1">
                 <a:solidFill>
                   <a:srgbClr val="5A2030"/>
                 </a:solidFill>
@@ -3494,9 +3497,9 @@
           <a:p>
             <a:pPr lvl="1">
               <a:spcAft>
-                <a:spcPts val="600"/>
+                <a:spcPts val="800"/>
               </a:spcAft>
-              <a:defRPr sz="1200">
+              <a:defRPr sz="1600">
                 <a:solidFill>
                   <a:srgbClr val="333333"/>
                 </a:solidFill>
@@ -3509,9 +3512,9 @@
           <a:p>
             <a:pPr lvl="1">
               <a:spcAft>
-                <a:spcPts val="600"/>
+                <a:spcPts val="800"/>
               </a:spcAft>
-              <a:defRPr sz="1200">
+              <a:defRPr sz="1600">
                 <a:solidFill>
                   <a:srgbClr val="333333"/>
                 </a:solidFill>
@@ -3524,9 +3527,9 @@
           <a:p>
             <a:pPr lvl="1">
               <a:spcAft>
-                <a:spcPts val="600"/>
+                <a:spcPts val="800"/>
               </a:spcAft>
-              <a:defRPr sz="1200">
+              <a:defRPr sz="1600">
                 <a:solidFill>
                   <a:srgbClr val="333333"/>
                 </a:solidFill>
@@ -3539,9 +3542,9 @@
           <a:p>
             <a:pPr>
               <a:spcAft>
-                <a:spcPts val="600"/>
+                <a:spcPts val="800"/>
               </a:spcAft>
-              <a:defRPr sz="1400">
+              <a:defRPr sz="1800">
                 <a:solidFill>
                   <a:srgbClr val="333333"/>
                 </a:solidFill>
@@ -3551,9 +3554,9 @@
           <a:p>
             <a:pPr>
               <a:spcAft>
-                <a:spcPts val="600"/>
+                <a:spcPts val="800"/>
               </a:spcAft>
-              <a:defRPr sz="1400" b="1">
+              <a:defRPr sz="1800" b="1">
                 <a:solidFill>
                   <a:srgbClr val="5A2030"/>
                 </a:solidFill>
@@ -3566,9 +3569,9 @@
           <a:p>
             <a:pPr lvl="1">
               <a:spcAft>
-                <a:spcPts val="600"/>
+                <a:spcPts val="800"/>
               </a:spcAft>
-              <a:defRPr sz="1200">
+              <a:defRPr sz="1600">
                 <a:solidFill>
                   <a:srgbClr val="333333"/>
                 </a:solidFill>
@@ -3581,9 +3584,9 @@
           <a:p>
             <a:pPr lvl="1">
               <a:spcAft>
-                <a:spcPts val="600"/>
+                <a:spcPts val="800"/>
               </a:spcAft>
-              <a:defRPr sz="1200">
+              <a:defRPr sz="1600">
                 <a:solidFill>
                   <a:srgbClr val="333333"/>
                 </a:solidFill>
@@ -3596,9 +3599,9 @@
           <a:p>
             <a:pPr lvl="1">
               <a:spcAft>
-                <a:spcPts val="600"/>
+                <a:spcPts val="800"/>
               </a:spcAft>
-              <a:defRPr sz="1200">
+              <a:defRPr sz="1600">
                 <a:solidFill>
                   <a:srgbClr val="333333"/>
                 </a:solidFill>
@@ -3637,7 +3640,7 @@
         <p:spPr>
           <a:xfrm>
             <a:off x="0" y="0"/>
-            <a:ext cx="9144000" cy="914400"/>
+            <a:ext cx="12191695" cy="1005840"/>
           </a:xfrm>
           <a:prstGeom prst="rect">
             <a:avLst/>
@@ -3651,7 +3654,7 @@
           <a:lstStyle/>
           <a:p>
             <a:pPr algn="l">
-              <a:defRPr sz="2200" b="1">
+              <a:defRPr sz="2800" b="1">
                 <a:solidFill>
                   <a:srgbClr val="5A2030"/>
                 </a:solidFill>
@@ -3671,8 +3674,8 @@
         </p:nvSpPr>
         <p:spPr>
           <a:xfrm>
-            <a:off x="457200" y="868680"/>
-            <a:ext cx="8229600" cy="27432"/>
+            <a:off x="731520" y="960120"/>
+            <a:ext cx="10698480" cy="27432"/>
           </a:xfrm>
           <a:prstGeom prst="rect">
             <a:avLst/>
@@ -3714,8 +3717,8 @@
         </p:nvSpPr>
         <p:spPr>
           <a:xfrm>
-            <a:off x="548640" y="1097280"/>
-            <a:ext cx="8046720" cy="5029200"/>
+            <a:off x="914400" y="1280160"/>
+            <a:ext cx="10332720" cy="5029200"/>
           </a:xfrm>
           <a:prstGeom prst="rect">
             <a:avLst/>
@@ -3730,9 +3733,9 @@
           <a:p>
             <a:pPr>
               <a:spcAft>
-                <a:spcPts val="600"/>
+                <a:spcPts val="800"/>
               </a:spcAft>
-              <a:defRPr sz="1400" b="1">
+              <a:defRPr sz="1800" b="1">
                 <a:solidFill>
                   <a:srgbClr val="5A2030"/>
                 </a:solidFill>
@@ -3745,9 +3748,9 @@
           <a:p>
             <a:pPr lvl="1">
               <a:spcAft>
-                <a:spcPts val="600"/>
+                <a:spcPts val="800"/>
               </a:spcAft>
-              <a:defRPr sz="1200">
+              <a:defRPr sz="1600">
                 <a:solidFill>
                   <a:srgbClr val="333333"/>
                 </a:solidFill>
@@ -3760,9 +3763,9 @@
           <a:p>
             <a:pPr lvl="1">
               <a:spcAft>
-                <a:spcPts val="600"/>
+                <a:spcPts val="800"/>
               </a:spcAft>
-              <a:defRPr sz="1200">
+              <a:defRPr sz="1600">
                 <a:solidFill>
                   <a:srgbClr val="333333"/>
                 </a:solidFill>
@@ -3775,9 +3778,9 @@
           <a:p>
             <a:pPr lvl="1">
               <a:spcAft>
-                <a:spcPts val="600"/>
+                <a:spcPts val="800"/>
               </a:spcAft>
-              <a:defRPr sz="1200">
+              <a:defRPr sz="1600">
                 <a:solidFill>
                   <a:srgbClr val="333333"/>
                 </a:solidFill>
@@ -3790,9 +3793,9 @@
           <a:p>
             <a:pPr lvl="1">
               <a:spcAft>
-                <a:spcPts val="600"/>
+                <a:spcPts val="800"/>
               </a:spcAft>
-              <a:defRPr sz="1200">
+              <a:defRPr sz="1600">
                 <a:solidFill>
                   <a:srgbClr val="333333"/>
                 </a:solidFill>
@@ -3805,9 +3808,9 @@
           <a:p>
             <a:pPr>
               <a:spcAft>
-                <a:spcPts val="600"/>
+                <a:spcPts val="800"/>
               </a:spcAft>
-              <a:defRPr sz="1400">
+              <a:defRPr sz="1800">
                 <a:solidFill>
                   <a:srgbClr val="333333"/>
                 </a:solidFill>
@@ -3817,9 +3820,9 @@
           <a:p>
             <a:pPr>
               <a:spcAft>
-                <a:spcPts val="600"/>
+                <a:spcPts val="800"/>
               </a:spcAft>
-              <a:defRPr sz="1400" b="1">
+              <a:defRPr sz="1800" b="1">
                 <a:solidFill>
                   <a:srgbClr val="5A2030"/>
                 </a:solidFill>
@@ -3832,9 +3835,9 @@
           <a:p>
             <a:pPr lvl="1">
               <a:spcAft>
-                <a:spcPts val="600"/>
+                <a:spcPts val="800"/>
               </a:spcAft>
-              <a:defRPr sz="1200">
+              <a:defRPr sz="1600">
                 <a:solidFill>
                   <a:srgbClr val="333333"/>
                 </a:solidFill>
@@ -3847,9 +3850,9 @@
           <a:p>
             <a:pPr lvl="1">
               <a:spcAft>
-                <a:spcPts val="600"/>
+                <a:spcPts val="800"/>
               </a:spcAft>
-              <a:defRPr sz="1200">
+              <a:defRPr sz="1600">
                 <a:solidFill>
                   <a:srgbClr val="333333"/>
                 </a:solidFill>
@@ -3862,9 +3865,9 @@
           <a:p>
             <a:pPr lvl="1">
               <a:spcAft>
-                <a:spcPts val="600"/>
+                <a:spcPts val="800"/>
               </a:spcAft>
-              <a:defRPr sz="1200">
+              <a:defRPr sz="1600">
                 <a:solidFill>
                   <a:srgbClr val="333333"/>
                 </a:solidFill>
@@ -3877,9 +3880,9 @@
           <a:p>
             <a:pPr>
               <a:spcAft>
-                <a:spcPts val="600"/>
+                <a:spcPts val="800"/>
               </a:spcAft>
-              <a:defRPr sz="1400">
+              <a:defRPr sz="1800">
                 <a:solidFill>
                   <a:srgbClr val="333333"/>
                 </a:solidFill>
@@ -3889,9 +3892,9 @@
           <a:p>
             <a:pPr>
               <a:spcAft>
-                <a:spcPts val="600"/>
+                <a:spcPts val="800"/>
               </a:spcAft>
-              <a:defRPr sz="1400" b="1">
+              <a:defRPr sz="1800" b="1">
                 <a:solidFill>
                   <a:srgbClr val="5A2030"/>
                 </a:solidFill>
@@ -3904,9 +3907,9 @@
           <a:p>
             <a:pPr lvl="1">
               <a:spcAft>
-                <a:spcPts val="600"/>
+                <a:spcPts val="800"/>
               </a:spcAft>
-              <a:defRPr sz="1200">
+              <a:defRPr sz="1600">
                 <a:solidFill>
                   <a:srgbClr val="333333"/>
                 </a:solidFill>
@@ -3919,9 +3922,9 @@
           <a:p>
             <a:pPr lvl="1">
               <a:spcAft>
-                <a:spcPts val="600"/>
+                <a:spcPts val="800"/>
               </a:spcAft>
-              <a:defRPr sz="1200">
+              <a:defRPr sz="1600">
                 <a:solidFill>
                   <a:srgbClr val="333333"/>
                 </a:solidFill>
@@ -3934,9 +3937,9 @@
           <a:p>
             <a:pPr lvl="1">
               <a:spcAft>
-                <a:spcPts val="600"/>
+                <a:spcPts val="800"/>
               </a:spcAft>
-              <a:defRPr sz="1200">
+              <a:defRPr sz="1600">
                 <a:solidFill>
                   <a:srgbClr val="333333"/>
                 </a:solidFill>
@@ -3975,7 +3978,7 @@
         <p:spPr>
           <a:xfrm>
             <a:off x="0" y="0"/>
-            <a:ext cx="9144000" cy="914400"/>
+            <a:ext cx="12191695" cy="1005840"/>
           </a:xfrm>
           <a:prstGeom prst="rect">
             <a:avLst/>
@@ -3989,7 +3992,7 @@
           <a:lstStyle/>
           <a:p>
             <a:pPr algn="l">
-              <a:defRPr sz="2200" b="1">
+              <a:defRPr sz="2800" b="1">
                 <a:solidFill>
                   <a:srgbClr val="5A2030"/>
                 </a:solidFill>
@@ -4009,8 +4012,8 @@
         </p:nvSpPr>
         <p:spPr>
           <a:xfrm>
-            <a:off x="457200" y="868680"/>
-            <a:ext cx="8229600" cy="27432"/>
+            <a:off x="731520" y="960120"/>
+            <a:ext cx="10698480" cy="27432"/>
           </a:xfrm>
           <a:prstGeom prst="rect">
             <a:avLst/>
@@ -4052,8 +4055,8 @@
         </p:nvSpPr>
         <p:spPr>
           <a:xfrm>
-            <a:off x="548640" y="1097280"/>
-            <a:ext cx="8046720" cy="5029200"/>
+            <a:off x="914400" y="1280160"/>
+            <a:ext cx="10332720" cy="5029200"/>
           </a:xfrm>
           <a:prstGeom prst="rect">
             <a:avLst/>
@@ -4068,9 +4071,9 @@
           <a:p>
             <a:pPr>
               <a:spcAft>
-                <a:spcPts val="600"/>
+                <a:spcPts val="800"/>
               </a:spcAft>
-              <a:defRPr sz="1400" b="1">
+              <a:defRPr sz="1800" b="1">
                 <a:solidFill>
                   <a:srgbClr val="5A2030"/>
                 </a:solidFill>
@@ -4083,9 +4086,9 @@
           <a:p>
             <a:pPr lvl="1">
               <a:spcAft>
-                <a:spcPts val="600"/>
+                <a:spcPts val="800"/>
               </a:spcAft>
-              <a:defRPr sz="1200">
+              <a:defRPr sz="1600">
                 <a:solidFill>
                   <a:srgbClr val="333333"/>
                 </a:solidFill>
@@ -4098,9 +4101,9 @@
           <a:p>
             <a:pPr lvl="1">
               <a:spcAft>
-                <a:spcPts val="600"/>
+                <a:spcPts val="800"/>
               </a:spcAft>
-              <a:defRPr sz="1200">
+              <a:defRPr sz="1600">
                 <a:solidFill>
                   <a:srgbClr val="333333"/>
                 </a:solidFill>
@@ -4113,9 +4116,9 @@
           <a:p>
             <a:pPr>
               <a:spcAft>
-                <a:spcPts val="600"/>
+                <a:spcPts val="800"/>
               </a:spcAft>
-              <a:defRPr sz="1400">
+              <a:defRPr sz="1800">
                 <a:solidFill>
                   <a:srgbClr val="333333"/>
                 </a:solidFill>
@@ -4125,9 +4128,9 @@
           <a:p>
             <a:pPr>
               <a:spcAft>
-                <a:spcPts val="600"/>
+                <a:spcPts val="800"/>
               </a:spcAft>
-              <a:defRPr sz="1400" b="1">
+              <a:defRPr sz="1800" b="1">
                 <a:solidFill>
                   <a:srgbClr val="5A2030"/>
                 </a:solidFill>
@@ -4140,9 +4143,9 @@
           <a:p>
             <a:pPr lvl="1">
               <a:spcAft>
-                <a:spcPts val="600"/>
+                <a:spcPts val="800"/>
               </a:spcAft>
-              <a:defRPr sz="1200">
+              <a:defRPr sz="1600">
                 <a:solidFill>
                   <a:srgbClr val="333333"/>
                 </a:solidFill>
@@ -4155,9 +4158,9 @@
           <a:p>
             <a:pPr lvl="1">
               <a:spcAft>
-                <a:spcPts val="600"/>
+                <a:spcPts val="800"/>
               </a:spcAft>
-              <a:defRPr sz="1200">
+              <a:defRPr sz="1600">
                 <a:solidFill>
                   <a:srgbClr val="333333"/>
                 </a:solidFill>
@@ -4170,9 +4173,9 @@
           <a:p>
             <a:pPr lvl="1">
               <a:spcAft>
-                <a:spcPts val="600"/>
+                <a:spcPts val="800"/>
               </a:spcAft>
-              <a:defRPr sz="1200">
+              <a:defRPr sz="1600">
                 <a:solidFill>
                   <a:srgbClr val="333333"/>
                 </a:solidFill>
@@ -4185,9 +4188,9 @@
           <a:p>
             <a:pPr>
               <a:spcAft>
-                <a:spcPts val="600"/>
+                <a:spcPts val="800"/>
               </a:spcAft>
-              <a:defRPr sz="1400">
+              <a:defRPr sz="1800">
                 <a:solidFill>
                   <a:srgbClr val="333333"/>
                 </a:solidFill>
@@ -4197,9 +4200,9 @@
           <a:p>
             <a:pPr>
               <a:spcAft>
-                <a:spcPts val="600"/>
+                <a:spcPts val="800"/>
               </a:spcAft>
-              <a:defRPr sz="1400" b="1">
+              <a:defRPr sz="1800" b="1">
                 <a:solidFill>
                   <a:srgbClr val="5A2030"/>
                 </a:solidFill>
@@ -4212,9 +4215,9 @@
           <a:p>
             <a:pPr lvl="1">
               <a:spcAft>
-                <a:spcPts val="600"/>
+                <a:spcPts val="800"/>
               </a:spcAft>
-              <a:defRPr sz="1200">
+              <a:defRPr sz="1600">
                 <a:solidFill>
                   <a:srgbClr val="333333"/>
                 </a:solidFill>
@@ -4227,9 +4230,9 @@
           <a:p>
             <a:pPr lvl="1">
               <a:spcAft>
-                <a:spcPts val="600"/>
+                <a:spcPts val="800"/>
               </a:spcAft>
-              <a:defRPr sz="1200">
+              <a:defRPr sz="1600">
                 <a:solidFill>
                   <a:srgbClr val="333333"/>
                 </a:solidFill>
@@ -4268,7 +4271,7 @@
         <p:spPr>
           <a:xfrm>
             <a:off x="0" y="0"/>
-            <a:ext cx="9144000" cy="914400"/>
+            <a:ext cx="12191695" cy="1005840"/>
           </a:xfrm>
           <a:prstGeom prst="rect">
             <a:avLst/>
@@ -4282,7 +4285,7 @@
           <a:lstStyle/>
           <a:p>
             <a:pPr>
-              <a:defRPr sz="2200" b="1">
+              <a:defRPr sz="2800" b="1">
                 <a:solidFill>
                   <a:srgbClr val="5A2030"/>
                 </a:solidFill>
@@ -4302,8 +4305,8 @@
         </p:nvSpPr>
         <p:spPr>
           <a:xfrm>
-            <a:off x="457200" y="868680"/>
-            <a:ext cx="8229600" cy="27432"/>
+            <a:off x="731520" y="960120"/>
+            <a:ext cx="10698480" cy="27432"/>
           </a:xfrm>
           <a:prstGeom prst="rect">
             <a:avLst/>
@@ -4346,8 +4349,8 @@
           <p:nvPr/>
         </p:nvGraphicFramePr>
         <p:xfrm>
-          <a:off x="457200" y="1188720"/>
-          <a:ext cx="8229600" cy="1828800"/>
+          <a:off x="731520" y="1280160"/>
+          <a:ext cx="10698480" cy="2286000"/>
         </p:xfrm>
         <a:graphic>
           <a:graphicData uri="http://schemas.openxmlformats.org/drawingml/2006/table">
@@ -4356,19 +4359,19 @@
                 <a:tableStyleId>{5C22544A-7EE6-4342-B048-85BDC9FD1C3A}</a:tableStyleId>
               </a:tblPr>
               <a:tblGrid>
-                <a:gridCol w="2057400"/>
-                <a:gridCol w="2057400"/>
-                <a:gridCol w="2057400"/>
-                <a:gridCol w="2057400"/>
+                <a:gridCol w="2674620"/>
+                <a:gridCol w="2674620"/>
+                <a:gridCol w="2674620"/>
+                <a:gridCol w="2674620"/>
               </a:tblGrid>
-              <a:tr h="365760">
+              <a:tr h="457200">
                 <a:tc>
                   <a:txBody>
                     <a:bodyPr/>
                     <a:lstStyle/>
                     <a:p>
                       <a:pPr>
-                        <a:defRPr sz="1100" b="1">
+                        <a:defRPr sz="1400" b="1">
                           <a:solidFill>
                             <a:srgbClr val="FFFFFF"/>
                           </a:solidFill>
@@ -4391,7 +4394,7 @@
                     <a:lstStyle/>
                     <a:p>
                       <a:pPr>
-                        <a:defRPr sz="1100" b="1">
+                        <a:defRPr sz="1400" b="1">
                           <a:solidFill>
                             <a:srgbClr val="FFFFFF"/>
                           </a:solidFill>
@@ -4414,7 +4417,7 @@
                     <a:lstStyle/>
                     <a:p>
                       <a:pPr>
-                        <a:defRPr sz="1100" b="1">
+                        <a:defRPr sz="1400" b="1">
                           <a:solidFill>
                             <a:srgbClr val="FFFFFF"/>
                           </a:solidFill>
@@ -4437,7 +4440,7 @@
                     <a:lstStyle/>
                     <a:p>
                       <a:pPr>
-                        <a:defRPr sz="1100" b="1">
+                        <a:defRPr sz="1400" b="1">
                           <a:solidFill>
                             <a:srgbClr val="FFFFFF"/>
                           </a:solidFill>
@@ -4455,14 +4458,14 @@
                   </a:tcPr>
                 </a:tc>
               </a:tr>
-              <a:tr h="365760">
+              <a:tr h="457200">
                 <a:tc>
                   <a:txBody>
                     <a:bodyPr/>
                     <a:lstStyle/>
                     <a:p>
                       <a:pPr>
-                        <a:defRPr sz="1000">
+                        <a:defRPr sz="1300">
                           <a:solidFill>
                             <a:srgbClr val="333333"/>
                           </a:solidFill>
@@ -4485,7 +4488,7 @@
                     <a:lstStyle/>
                     <a:p>
                       <a:pPr>
-                        <a:defRPr sz="1000">
+                        <a:defRPr sz="1300">
                           <a:solidFill>
                             <a:srgbClr val="333333"/>
                           </a:solidFill>
@@ -4508,7 +4511,7 @@
                     <a:lstStyle/>
                     <a:p>
                       <a:pPr>
-                        <a:defRPr sz="1000">
+                        <a:defRPr sz="1300">
                           <a:solidFill>
                             <a:srgbClr val="333333"/>
                           </a:solidFill>
@@ -4531,7 +4534,7 @@
                     <a:lstStyle/>
                     <a:p>
                       <a:pPr>
-                        <a:defRPr sz="1000">
+                        <a:defRPr sz="1300">
                           <a:solidFill>
                             <a:srgbClr val="333333"/>
                           </a:solidFill>
@@ -4549,14 +4552,14 @@
                   </a:tcPr>
                 </a:tc>
               </a:tr>
-              <a:tr h="365760">
+              <a:tr h="457200">
                 <a:tc>
                   <a:txBody>
                     <a:bodyPr/>
                     <a:lstStyle/>
                     <a:p>
                       <a:pPr>
-                        <a:defRPr sz="1000">
+                        <a:defRPr sz="1300">
                           <a:solidFill>
                             <a:srgbClr val="333333"/>
                           </a:solidFill>
@@ -4575,7 +4578,7 @@
                     <a:lstStyle/>
                     <a:p>
                       <a:pPr>
-                        <a:defRPr sz="1000">
+                        <a:defRPr sz="1300">
                           <a:solidFill>
                             <a:srgbClr val="333333"/>
                           </a:solidFill>
@@ -4594,7 +4597,7 @@
                     <a:lstStyle/>
                     <a:p>
                       <a:pPr>
-                        <a:defRPr sz="1000">
+                        <a:defRPr sz="1300">
                           <a:solidFill>
                             <a:srgbClr val="333333"/>
                           </a:solidFill>
@@ -4613,7 +4616,7 @@
                     <a:lstStyle/>
                     <a:p>
                       <a:pPr>
-                        <a:defRPr sz="1000">
+                        <a:defRPr sz="1300">
                           <a:solidFill>
                             <a:srgbClr val="333333"/>
                           </a:solidFill>
@@ -4627,14 +4630,14 @@
                   <a:tcPr/>
                 </a:tc>
               </a:tr>
-              <a:tr h="365760">
+              <a:tr h="457200">
                 <a:tc>
                   <a:txBody>
                     <a:bodyPr/>
                     <a:lstStyle/>
                     <a:p>
                       <a:pPr>
-                        <a:defRPr sz="1000">
+                        <a:defRPr sz="1300">
                           <a:solidFill>
                             <a:srgbClr val="333333"/>
                           </a:solidFill>
@@ -4657,7 +4660,7 @@
                     <a:lstStyle/>
                     <a:p>
                       <a:pPr>
-                        <a:defRPr sz="1000">
+                        <a:defRPr sz="1300">
                           <a:solidFill>
                             <a:srgbClr val="333333"/>
                           </a:solidFill>
@@ -4680,7 +4683,7 @@
                     <a:lstStyle/>
                     <a:p>
                       <a:pPr>
-                        <a:defRPr sz="1000">
+                        <a:defRPr sz="1300">
                           <a:solidFill>
                             <a:srgbClr val="333333"/>
                           </a:solidFill>
@@ -4703,7 +4706,7 @@
                     <a:lstStyle/>
                     <a:p>
                       <a:pPr>
-                        <a:defRPr sz="1000">
+                        <a:defRPr sz="1300">
                           <a:solidFill>
                             <a:srgbClr val="333333"/>
                           </a:solidFill>
@@ -4721,14 +4724,14 @@
                   </a:tcPr>
                 </a:tc>
               </a:tr>
-              <a:tr h="365760">
+              <a:tr h="457200">
                 <a:tc>
                   <a:txBody>
                     <a:bodyPr/>
                     <a:lstStyle/>
                     <a:p>
                       <a:pPr>
-                        <a:defRPr sz="1000">
+                        <a:defRPr sz="1300">
                           <a:solidFill>
                             <a:srgbClr val="333333"/>
                           </a:solidFill>
@@ -4747,7 +4750,7 @@
                     <a:lstStyle/>
                     <a:p>
                       <a:pPr>
-                        <a:defRPr sz="1000">
+                        <a:defRPr sz="1300">
                           <a:solidFill>
                             <a:srgbClr val="333333"/>
                           </a:solidFill>
@@ -4766,7 +4769,7 @@
                     <a:lstStyle/>
                     <a:p>
                       <a:pPr>
-                        <a:defRPr sz="1000">
+                        <a:defRPr sz="1300">
                           <a:solidFill>
                             <a:srgbClr val="333333"/>
                           </a:solidFill>
@@ -4785,7 +4788,7 @@
                     <a:lstStyle/>
                     <a:p>
                       <a:pPr>
-                        <a:defRPr sz="1000">
+                        <a:defRPr sz="1300">
                           <a:solidFill>
                             <a:srgbClr val="333333"/>
                           </a:solidFill>
@@ -4830,7 +4833,7 @@
         <p:spPr>
           <a:xfrm>
             <a:off x="0" y="0"/>
-            <a:ext cx="9144000" cy="914400"/>
+            <a:ext cx="12191695" cy="1005840"/>
           </a:xfrm>
           <a:prstGeom prst="rect">
             <a:avLst/>
@@ -4844,7 +4847,7 @@
           <a:lstStyle/>
           <a:p>
             <a:pPr>
-              <a:defRPr sz="2200" b="1">
+              <a:defRPr sz="2800" b="1">
                 <a:solidFill>
                   <a:srgbClr val="5A2030"/>
                 </a:solidFill>
@@ -4864,8 +4867,8 @@
         </p:nvSpPr>
         <p:spPr>
           <a:xfrm>
-            <a:off x="457200" y="868680"/>
-            <a:ext cx="8229600" cy="27432"/>
+            <a:off x="731520" y="960120"/>
+            <a:ext cx="10698480" cy="27432"/>
           </a:xfrm>
           <a:prstGeom prst="rect">
             <a:avLst/>
@@ -4908,8 +4911,8 @@
           <p:nvPr/>
         </p:nvGraphicFramePr>
         <p:xfrm>
-          <a:off x="457200" y="1188720"/>
-          <a:ext cx="8229600" cy="1097280"/>
+          <a:off x="731520" y="1280160"/>
+          <a:ext cx="10698480" cy="1371600"/>
         </p:xfrm>
         <a:graphic>
           <a:graphicData uri="http://schemas.openxmlformats.org/drawingml/2006/table">
@@ -4918,19 +4921,19 @@
                 <a:tableStyleId>{5C22544A-7EE6-4342-B048-85BDC9FD1C3A}</a:tableStyleId>
               </a:tblPr>
               <a:tblGrid>
-                <a:gridCol w="2057400"/>
-                <a:gridCol w="2057400"/>
-                <a:gridCol w="2057400"/>
-                <a:gridCol w="2057400"/>
+                <a:gridCol w="2674620"/>
+                <a:gridCol w="2674620"/>
+                <a:gridCol w="2674620"/>
+                <a:gridCol w="2674620"/>
               </a:tblGrid>
-              <a:tr h="365760">
+              <a:tr h="457200">
                 <a:tc>
                   <a:txBody>
                     <a:bodyPr/>
                     <a:lstStyle/>
                     <a:p>
                       <a:pPr>
-                        <a:defRPr sz="1100" b="1">
+                        <a:defRPr sz="1400" b="1">
                           <a:solidFill>
                             <a:srgbClr val="FFFFFF"/>
                           </a:solidFill>
@@ -4953,7 +4956,7 @@
                     <a:lstStyle/>
                     <a:p>
                       <a:pPr>
-                        <a:defRPr sz="1100" b="1">
+                        <a:defRPr sz="1400" b="1">
                           <a:solidFill>
                             <a:srgbClr val="FFFFFF"/>
                           </a:solidFill>
@@ -4976,7 +4979,7 @@
                     <a:lstStyle/>
                     <a:p>
                       <a:pPr>
-                        <a:defRPr sz="1100" b="1">
+                        <a:defRPr sz="1400" b="1">
                           <a:solidFill>
                             <a:srgbClr val="FFFFFF"/>
                           </a:solidFill>
@@ -4999,7 +5002,7 @@
                     <a:lstStyle/>
                     <a:p>
                       <a:pPr>
-                        <a:defRPr sz="1100" b="1">
+                        <a:defRPr sz="1400" b="1">
                           <a:solidFill>
                             <a:srgbClr val="FFFFFF"/>
                           </a:solidFill>
@@ -5017,14 +5020,14 @@
                   </a:tcPr>
                 </a:tc>
               </a:tr>
-              <a:tr h="365760">
+              <a:tr h="457200">
                 <a:tc>
                   <a:txBody>
                     <a:bodyPr/>
                     <a:lstStyle/>
                     <a:p>
                       <a:pPr>
-                        <a:defRPr sz="1000">
+                        <a:defRPr sz="1300">
                           <a:solidFill>
                             <a:srgbClr val="333333"/>
                           </a:solidFill>
@@ -5047,7 +5050,7 @@
                     <a:lstStyle/>
                     <a:p>
                       <a:pPr>
-                        <a:defRPr sz="1000">
+                        <a:defRPr sz="1300">
                           <a:solidFill>
                             <a:srgbClr val="333333"/>
                           </a:solidFill>
@@ -5070,7 +5073,7 @@
                     <a:lstStyle/>
                     <a:p>
                       <a:pPr>
-                        <a:defRPr sz="1000">
+                        <a:defRPr sz="1300">
                           <a:solidFill>
                             <a:srgbClr val="333333"/>
                           </a:solidFill>
@@ -5093,7 +5096,7 @@
                     <a:lstStyle/>
                     <a:p>
                       <a:pPr>
-                        <a:defRPr sz="1000">
+                        <a:defRPr sz="1300">
                           <a:solidFill>
                             <a:srgbClr val="333333"/>
                           </a:solidFill>
@@ -5111,14 +5114,14 @@
                   </a:tcPr>
                 </a:tc>
               </a:tr>
-              <a:tr h="365760">
+              <a:tr h="457200">
                 <a:tc>
                   <a:txBody>
                     <a:bodyPr/>
                     <a:lstStyle/>
                     <a:p>
                       <a:pPr>
-                        <a:defRPr sz="1000">
+                        <a:defRPr sz="1300">
                           <a:solidFill>
                             <a:srgbClr val="333333"/>
                           </a:solidFill>
@@ -5137,7 +5140,7 @@
                     <a:lstStyle/>
                     <a:p>
                       <a:pPr>
-                        <a:defRPr sz="1000">
+                        <a:defRPr sz="1300">
                           <a:solidFill>
                             <a:srgbClr val="333333"/>
                           </a:solidFill>
@@ -5156,7 +5159,7 @@
                     <a:lstStyle/>
                     <a:p>
                       <a:pPr>
-                        <a:defRPr sz="1000">
+                        <a:defRPr sz="1300">
                           <a:solidFill>
                             <a:srgbClr val="333333"/>
                           </a:solidFill>
@@ -5175,7 +5178,7 @@
                     <a:lstStyle/>
                     <a:p>
                       <a:pPr>
-                        <a:defRPr sz="1000">
+                        <a:defRPr sz="1300">
                           <a:solidFill>
                             <a:srgbClr val="333333"/>
                           </a:solidFill>
@@ -5201,8 +5204,8 @@
         </p:nvSpPr>
         <p:spPr>
           <a:xfrm>
-            <a:off x="548640" y="3200400"/>
-            <a:ext cx="8046720" cy="1371600"/>
+            <a:off x="914400" y="3657600"/>
+            <a:ext cx="10332720" cy="1371600"/>
           </a:xfrm>
           <a:prstGeom prst="rect">
             <a:avLst/>
@@ -5217,9 +5220,9 @@
           <a:p>
             <a:pPr>
               <a:spcAft>
-                <a:spcPts val="800"/>
+                <a:spcPts val="1000"/>
               </a:spcAft>
-              <a:defRPr sz="1300" b="1">
+              <a:defRPr sz="1800" b="1">
                 <a:solidFill>
                   <a:srgbClr val="5A2030"/>
                 </a:solidFill>
@@ -5232,9 +5235,9 @@
           <a:p>
             <a:pPr>
               <a:spcAft>
-                <a:spcPts val="800"/>
+                <a:spcPts val="1000"/>
               </a:spcAft>
-              <a:defRPr sz="1300" b="1">
+              <a:defRPr sz="1800" b="1">
                 <a:solidFill>
                   <a:srgbClr val="5A2030"/>
                 </a:solidFill>
@@ -5273,7 +5276,7 @@
         <p:spPr>
           <a:xfrm>
             <a:off x="0" y="0"/>
-            <a:ext cx="9144000" cy="914400"/>
+            <a:ext cx="12191695" cy="1005840"/>
           </a:xfrm>
           <a:prstGeom prst="rect">
             <a:avLst/>
@@ -5287,7 +5290,7 @@
           <a:lstStyle/>
           <a:p>
             <a:pPr>
-              <a:defRPr sz="2200" b="1">
+              <a:defRPr sz="2800" b="1">
                 <a:solidFill>
                   <a:srgbClr val="5A2030"/>
                 </a:solidFill>
@@ -5307,8 +5310,8 @@
         </p:nvSpPr>
         <p:spPr>
           <a:xfrm>
-            <a:off x="457200" y="868680"/>
-            <a:ext cx="8229600" cy="27432"/>
+            <a:off x="731520" y="960120"/>
+            <a:ext cx="10698480" cy="27432"/>
           </a:xfrm>
           <a:prstGeom prst="rect">
             <a:avLst/>
@@ -5351,8 +5354,8 @@
           <p:nvPr/>
         </p:nvGraphicFramePr>
         <p:xfrm>
-          <a:off x="457200" y="1188720"/>
-          <a:ext cx="8229600" cy="2560320"/>
+          <a:off x="731520" y="1280160"/>
+          <a:ext cx="10698480" cy="3200400"/>
         </p:xfrm>
         <a:graphic>
           <a:graphicData uri="http://schemas.openxmlformats.org/drawingml/2006/table">
@@ -5361,20 +5364,20 @@
                 <a:tableStyleId>{5C22544A-7EE6-4342-B048-85BDC9FD1C3A}</a:tableStyleId>
               </a:tblPr>
               <a:tblGrid>
-                <a:gridCol w="1645920"/>
-                <a:gridCol w="1645920"/>
-                <a:gridCol w="1645920"/>
-                <a:gridCol w="1645920"/>
-                <a:gridCol w="1645920"/>
+                <a:gridCol w="2139696"/>
+                <a:gridCol w="2139696"/>
+                <a:gridCol w="2139696"/>
+                <a:gridCol w="2139696"/>
+                <a:gridCol w="2139696"/>
               </a:tblGrid>
-              <a:tr h="365760">
+              <a:tr h="457200">
                 <a:tc>
                   <a:txBody>
                     <a:bodyPr/>
                     <a:lstStyle/>
                     <a:p>
                       <a:pPr>
-                        <a:defRPr sz="1100" b="1">
+                        <a:defRPr sz="1400" b="1">
                           <a:solidFill>
                             <a:srgbClr val="FFFFFF"/>
                           </a:solidFill>
@@ -5394,7 +5397,7 @@
                     <a:lstStyle/>
                     <a:p>
                       <a:pPr>
-                        <a:defRPr sz="1100" b="1">
+                        <a:defRPr sz="1400" b="1">
                           <a:solidFill>
                             <a:srgbClr val="FFFFFF"/>
                           </a:solidFill>
@@ -5417,7 +5420,7 @@
                     <a:lstStyle/>
                     <a:p>
                       <a:pPr>
-                        <a:defRPr sz="1100" b="1">
+                        <a:defRPr sz="1400" b="1">
                           <a:solidFill>
                             <a:srgbClr val="FFFFFF"/>
                           </a:solidFill>
@@ -5440,7 +5443,7 @@
                     <a:lstStyle/>
                     <a:p>
                       <a:pPr>
-                        <a:defRPr sz="1100" b="1">
+                        <a:defRPr sz="1400" b="1">
                           <a:solidFill>
                             <a:srgbClr val="FFFFFF"/>
                           </a:solidFill>
@@ -5463,7 +5466,7 @@
                     <a:lstStyle/>
                     <a:p>
                       <a:pPr>
-                        <a:defRPr sz="1100" b="1">
+                        <a:defRPr sz="1400" b="1">
                           <a:solidFill>
                             <a:srgbClr val="FFFFFF"/>
                           </a:solidFill>
@@ -5481,14 +5484,14 @@
                   </a:tcPr>
                 </a:tc>
               </a:tr>
-              <a:tr h="365760">
+              <a:tr h="457200">
                 <a:tc>
                   <a:txBody>
                     <a:bodyPr/>
                     <a:lstStyle/>
                     <a:p>
                       <a:pPr>
-                        <a:defRPr sz="1000">
+                        <a:defRPr sz="1300">
                           <a:solidFill>
                             <a:srgbClr val="333333"/>
                           </a:solidFill>
@@ -5511,7 +5514,7 @@
                     <a:lstStyle/>
                     <a:p>
                       <a:pPr>
-                        <a:defRPr sz="1000">
+                        <a:defRPr sz="1300">
                           <a:solidFill>
                             <a:srgbClr val="333333"/>
                           </a:solidFill>
@@ -5534,7 +5537,7 @@
                     <a:lstStyle/>
                     <a:p>
                       <a:pPr>
-                        <a:defRPr sz="1000">
+                        <a:defRPr sz="1300">
                           <a:solidFill>
                             <a:srgbClr val="333333"/>
                           </a:solidFill>
@@ -5557,7 +5560,7 @@
                     <a:lstStyle/>
                     <a:p>
                       <a:pPr>
-                        <a:defRPr sz="1000">
+                        <a:defRPr sz="1300">
                           <a:solidFill>
                             <a:srgbClr val="333333"/>
                           </a:solidFill>
@@ -5580,7 +5583,7 @@
                     <a:lstStyle/>
                     <a:p>
                       <a:pPr>
-                        <a:defRPr sz="1000">
+                        <a:defRPr sz="1300">
                           <a:solidFill>
                             <a:srgbClr val="333333"/>
                           </a:solidFill>
@@ -5598,14 +5601,14 @@
                   </a:tcPr>
                 </a:tc>
               </a:tr>
-              <a:tr h="365760">
+              <a:tr h="457200">
                 <a:tc>
                   <a:txBody>
                     <a:bodyPr/>
                     <a:lstStyle/>
                     <a:p>
                       <a:pPr>
-                        <a:defRPr sz="1000">
+                        <a:defRPr sz="1300">
                           <a:solidFill>
                             <a:srgbClr val="333333"/>
                           </a:solidFill>
@@ -5624,7 +5627,7 @@
                     <a:lstStyle/>
                     <a:p>
                       <a:pPr>
-                        <a:defRPr sz="1000">
+                        <a:defRPr sz="1300">
                           <a:solidFill>
                             <a:srgbClr val="333333"/>
                           </a:solidFill>
@@ -5643,7 +5646,7 @@
                     <a:lstStyle/>
                     <a:p>
                       <a:pPr>
-                        <a:defRPr sz="1000">
+                        <a:defRPr sz="1300">
                           <a:solidFill>
                             <a:srgbClr val="333333"/>
                           </a:solidFill>
@@ -5662,7 +5665,7 @@
                     <a:lstStyle/>
                     <a:p>
                       <a:pPr>
-                        <a:defRPr sz="1000">
+                        <a:defRPr sz="1300">
                           <a:solidFill>
                             <a:srgbClr val="333333"/>
                           </a:solidFill>
@@ -5681,7 +5684,7 @@
                     <a:lstStyle/>
                     <a:p>
                       <a:pPr>
-                        <a:defRPr sz="1000">
+                        <a:defRPr sz="1300">
                           <a:solidFill>
                             <a:srgbClr val="333333"/>
                           </a:solidFill>
@@ -5695,14 +5698,14 @@
                   <a:tcPr/>
                 </a:tc>
               </a:tr>
-              <a:tr h="365760">
+              <a:tr h="457200">
                 <a:tc>
                   <a:txBody>
                     <a:bodyPr/>
                     <a:lstStyle/>
                     <a:p>
                       <a:pPr>
-                        <a:defRPr sz="1000">
+                        <a:defRPr sz="1300">
                           <a:solidFill>
                             <a:srgbClr val="333333"/>
                           </a:solidFill>
@@ -5725,7 +5728,7 @@
                     <a:lstStyle/>
                     <a:p>
                       <a:pPr>
-                        <a:defRPr sz="1000">
+                        <a:defRPr sz="1300">
                           <a:solidFill>
                             <a:srgbClr val="333333"/>
                           </a:solidFill>
@@ -5748,7 +5751,7 @@
                     <a:lstStyle/>
                     <a:p>
                       <a:pPr>
-                        <a:defRPr sz="1000">
+                        <a:defRPr sz="1300">
                           <a:solidFill>
                             <a:srgbClr val="333333"/>
                           </a:solidFill>
@@ -5771,7 +5774,7 @@
                     <a:lstStyle/>
                     <a:p>
                       <a:pPr>
-                        <a:defRPr sz="1000">
+                        <a:defRPr sz="1300">
                           <a:solidFill>
                             <a:srgbClr val="333333"/>
                           </a:solidFill>
@@ -5794,7 +5797,7 @@
                     <a:lstStyle/>
                     <a:p>
                       <a:pPr>
-                        <a:defRPr sz="1000">
+                        <a:defRPr sz="1300">
                           <a:solidFill>
                             <a:srgbClr val="333333"/>
                           </a:solidFill>
@@ -5812,14 +5815,14 @@
                   </a:tcPr>
                 </a:tc>
               </a:tr>
-              <a:tr h="365760">
+              <a:tr h="457200">
                 <a:tc>
                   <a:txBody>
                     <a:bodyPr/>
                     <a:lstStyle/>
                     <a:p>
                       <a:pPr>
-                        <a:defRPr sz="1000">
+                        <a:defRPr sz="1300">
                           <a:solidFill>
                             <a:srgbClr val="333333"/>
                           </a:solidFill>
@@ -5838,7 +5841,7 @@
                     <a:lstStyle/>
                     <a:p>
                       <a:pPr>
-                        <a:defRPr sz="1000">
+                        <a:defRPr sz="1300">
                           <a:solidFill>
                             <a:srgbClr val="333333"/>
                           </a:solidFill>
@@ -5857,7 +5860,7 @@
                     <a:lstStyle/>
                     <a:p>
                       <a:pPr>
-                        <a:defRPr sz="1000">
+                        <a:defRPr sz="1300">
                           <a:solidFill>
                             <a:srgbClr val="333333"/>
                           </a:solidFill>
@@ -5876,7 +5879,7 @@
                     <a:lstStyle/>
                     <a:p>
                       <a:pPr>
-                        <a:defRPr sz="1000">
+                        <a:defRPr sz="1300">
                           <a:solidFill>
                             <a:srgbClr val="333333"/>
                           </a:solidFill>
@@ -5895,7 +5898,7 @@
                     <a:lstStyle/>
                     <a:p>
                       <a:pPr>
-                        <a:defRPr sz="1000">
+                        <a:defRPr sz="1300">
                           <a:solidFill>
                             <a:srgbClr val="333333"/>
                           </a:solidFill>
@@ -5909,14 +5912,14 @@
                   <a:tcPr/>
                 </a:tc>
               </a:tr>
-              <a:tr h="365760">
+              <a:tr h="457200">
                 <a:tc>
                   <a:txBody>
                     <a:bodyPr/>
                     <a:lstStyle/>
                     <a:p>
                       <a:pPr>
-                        <a:defRPr sz="1000">
+                        <a:defRPr sz="1300">
                           <a:solidFill>
                             <a:srgbClr val="333333"/>
                           </a:solidFill>
@@ -5939,7 +5942,7 @@
                     <a:lstStyle/>
                     <a:p>
                       <a:pPr>
-                        <a:defRPr sz="1000">
+                        <a:defRPr sz="1300">
                           <a:solidFill>
                             <a:srgbClr val="333333"/>
                           </a:solidFill>
@@ -5962,7 +5965,7 @@
                     <a:lstStyle/>
                     <a:p>
                       <a:pPr>
-                        <a:defRPr sz="1000">
+                        <a:defRPr sz="1300">
                           <a:solidFill>
                             <a:srgbClr val="333333"/>
                           </a:solidFill>
@@ -5985,7 +5988,7 @@
                     <a:lstStyle/>
                     <a:p>
                       <a:pPr>
-                        <a:defRPr sz="1000">
+                        <a:defRPr sz="1300">
                           <a:solidFill>
                             <a:srgbClr val="333333"/>
                           </a:solidFill>
@@ -6008,7 +6011,7 @@
                     <a:lstStyle/>
                     <a:p>
                       <a:pPr>
-                        <a:defRPr sz="1000">
+                        <a:defRPr sz="1300">
                           <a:solidFill>
                             <a:srgbClr val="333333"/>
                           </a:solidFill>
@@ -6026,14 +6029,14 @@
                   </a:tcPr>
                 </a:tc>
               </a:tr>
-              <a:tr h="365760">
+              <a:tr h="457200">
                 <a:tc>
                   <a:txBody>
                     <a:bodyPr/>
                     <a:lstStyle/>
                     <a:p>
                       <a:pPr>
-                        <a:defRPr sz="1000">
+                        <a:defRPr sz="1300">
                           <a:solidFill>
                             <a:srgbClr val="333333"/>
                           </a:solidFill>
@@ -6052,7 +6055,7 @@
                     <a:lstStyle/>
                     <a:p>
                       <a:pPr>
-                        <a:defRPr sz="1000">
+                        <a:defRPr sz="1300">
                           <a:solidFill>
                             <a:srgbClr val="333333"/>
                           </a:solidFill>
@@ -6071,7 +6074,7 @@
                     <a:lstStyle/>
                     <a:p>
                       <a:pPr>
-                        <a:defRPr sz="1000">
+                        <a:defRPr sz="1300">
                           <a:solidFill>
                             <a:srgbClr val="333333"/>
                           </a:solidFill>
@@ -6090,7 +6093,7 @@
                     <a:lstStyle/>
                     <a:p>
                       <a:pPr>
-                        <a:defRPr sz="1000">
+                        <a:defRPr sz="1300">
                           <a:solidFill>
                             <a:srgbClr val="333333"/>
                           </a:solidFill>
@@ -6109,7 +6112,7 @@
                     <a:lstStyle/>
                     <a:p>
                       <a:pPr>
-                        <a:defRPr sz="1000">
+                        <a:defRPr sz="1300">
                           <a:solidFill>
                             <a:srgbClr val="333333"/>
                           </a:solidFill>
@@ -6154,7 +6157,7 @@
         <p:spPr>
           <a:xfrm>
             <a:off x="0" y="0"/>
-            <a:ext cx="9144000" cy="914400"/>
+            <a:ext cx="12191695" cy="1005840"/>
           </a:xfrm>
           <a:prstGeom prst="rect">
             <a:avLst/>
@@ -6168,7 +6171,7 @@
           <a:lstStyle/>
           <a:p>
             <a:pPr algn="l">
-              <a:defRPr sz="2200" b="1">
+              <a:defRPr sz="2800" b="1">
                 <a:solidFill>
                   <a:srgbClr val="5A2030"/>
                 </a:solidFill>
@@ -6188,8 +6191,8 @@
         </p:nvSpPr>
         <p:spPr>
           <a:xfrm>
-            <a:off x="457200" y="868680"/>
-            <a:ext cx="8229600" cy="27432"/>
+            <a:off x="731520" y="960120"/>
+            <a:ext cx="10698480" cy="27432"/>
           </a:xfrm>
           <a:prstGeom prst="rect">
             <a:avLst/>
@@ -6231,8 +6234,8 @@
         </p:nvSpPr>
         <p:spPr>
           <a:xfrm>
-            <a:off x="548640" y="1097280"/>
-            <a:ext cx="8046720" cy="5029200"/>
+            <a:off x="914400" y="1280160"/>
+            <a:ext cx="10332720" cy="5029200"/>
           </a:xfrm>
           <a:prstGeom prst="rect">
             <a:avLst/>
@@ -6247,9 +6250,9 @@
           <a:p>
             <a:pPr>
               <a:spcAft>
-                <a:spcPts val="600"/>
+                <a:spcPts val="800"/>
               </a:spcAft>
-              <a:defRPr sz="1400" b="1">
+              <a:defRPr sz="1800" b="1">
                 <a:solidFill>
                   <a:srgbClr val="5A2030"/>
                 </a:solidFill>
@@ -6262,9 +6265,9 @@
           <a:p>
             <a:pPr>
               <a:spcAft>
-                <a:spcPts val="600"/>
+                <a:spcPts val="800"/>
               </a:spcAft>
-              <a:defRPr sz="1400">
+              <a:defRPr sz="1800">
                 <a:solidFill>
                   <a:srgbClr val="333333"/>
                 </a:solidFill>
@@ -6274,9 +6277,9 @@
           <a:p>
             <a:pPr>
               <a:spcAft>
-                <a:spcPts val="600"/>
+                <a:spcPts val="800"/>
               </a:spcAft>
-              <a:defRPr sz="1400">
+              <a:defRPr sz="1800">
                 <a:solidFill>
                   <a:srgbClr val="333333"/>
                 </a:solidFill>
@@ -6289,9 +6292,9 @@
           <a:p>
             <a:pPr>
               <a:spcAft>
-                <a:spcPts val="600"/>
+                <a:spcPts val="800"/>
               </a:spcAft>
-              <a:defRPr sz="1400">
+              <a:defRPr sz="1800">
                 <a:solidFill>
                   <a:srgbClr val="333333"/>
                 </a:solidFill>
@@ -6304,9 +6307,9 @@
           <a:p>
             <a:pPr>
               <a:spcAft>
-                <a:spcPts val="600"/>
+                <a:spcPts val="800"/>
               </a:spcAft>
-              <a:defRPr sz="1400">
+              <a:defRPr sz="1800">
                 <a:solidFill>
                   <a:srgbClr val="333333"/>
                 </a:solidFill>
@@ -6319,9 +6322,9 @@
           <a:p>
             <a:pPr>
               <a:spcAft>
-                <a:spcPts val="600"/>
+                <a:spcPts val="800"/>
               </a:spcAft>
-              <a:defRPr sz="1400">
+              <a:defRPr sz="1800">
                 <a:solidFill>
                   <a:srgbClr val="333333"/>
                 </a:solidFill>
@@ -6334,9 +6337,9 @@
           <a:p>
             <a:pPr>
               <a:spcAft>
-                <a:spcPts val="600"/>
+                <a:spcPts val="800"/>
               </a:spcAft>
-              <a:defRPr sz="1400">
+              <a:defRPr sz="1800">
                 <a:solidFill>
                   <a:srgbClr val="333333"/>
                 </a:solidFill>
@@ -6349,9 +6352,9 @@
           <a:p>
             <a:pPr>
               <a:spcAft>
-                <a:spcPts val="600"/>
+                <a:spcPts val="800"/>
               </a:spcAft>
-              <a:defRPr sz="1400">
+              <a:defRPr sz="1800">
                 <a:solidFill>
                   <a:srgbClr val="333333"/>
                 </a:solidFill>
@@ -6361,9 +6364,9 @@
           <a:p>
             <a:pPr>
               <a:spcAft>
-                <a:spcPts val="600"/>
+                <a:spcPts val="800"/>
               </a:spcAft>
-              <a:defRPr sz="1400" b="1">
+              <a:defRPr sz="1800" b="1">
                 <a:solidFill>
                   <a:srgbClr val="5A2030"/>
                 </a:solidFill>
@@ -6376,9 +6379,9 @@
           <a:p>
             <a:pPr lvl="1">
               <a:spcAft>
-                <a:spcPts val="600"/>
+                <a:spcPts val="800"/>
               </a:spcAft>
-              <a:defRPr sz="1200">
+              <a:defRPr sz="1600">
                 <a:solidFill>
                   <a:srgbClr val="333333"/>
                 </a:solidFill>
@@ -6417,7 +6420,7 @@
         <p:spPr>
           <a:xfrm>
             <a:off x="0" y="0"/>
-            <a:ext cx="9144000" cy="914400"/>
+            <a:ext cx="12191695" cy="1005840"/>
           </a:xfrm>
           <a:prstGeom prst="rect">
             <a:avLst/>
@@ -6431,7 +6434,7 @@
           <a:lstStyle/>
           <a:p>
             <a:pPr algn="l">
-              <a:defRPr sz="2200" b="1">
+              <a:defRPr sz="2800" b="1">
                 <a:solidFill>
                   <a:srgbClr val="5A2030"/>
                 </a:solidFill>
@@ -6451,8 +6454,8 @@
         </p:nvSpPr>
         <p:spPr>
           <a:xfrm>
-            <a:off x="457200" y="868680"/>
-            <a:ext cx="8229600" cy="27432"/>
+            <a:off x="731520" y="960120"/>
+            <a:ext cx="10698480" cy="27432"/>
           </a:xfrm>
           <a:prstGeom prst="rect">
             <a:avLst/>
@@ -6494,8 +6497,8 @@
         </p:nvSpPr>
         <p:spPr>
           <a:xfrm>
-            <a:off x="548640" y="1097280"/>
-            <a:ext cx="8046720" cy="5029200"/>
+            <a:off x="914400" y="1280160"/>
+            <a:ext cx="10332720" cy="5029200"/>
           </a:xfrm>
           <a:prstGeom prst="rect">
             <a:avLst/>
@@ -6510,9 +6513,9 @@
           <a:p>
             <a:pPr>
               <a:spcAft>
-                <a:spcPts val="600"/>
+                <a:spcPts val="800"/>
               </a:spcAft>
-              <a:defRPr sz="1400" b="1">
+              <a:defRPr sz="1800" b="1">
                 <a:solidFill>
                   <a:srgbClr val="5A2030"/>
                 </a:solidFill>
@@ -6525,9 +6528,9 @@
           <a:p>
             <a:pPr lvl="1">
               <a:spcAft>
-                <a:spcPts val="600"/>
+                <a:spcPts val="800"/>
               </a:spcAft>
-              <a:defRPr sz="1200">
+              <a:defRPr sz="1600">
                 <a:solidFill>
                   <a:srgbClr val="333333"/>
                 </a:solidFill>
@@ -6540,9 +6543,9 @@
           <a:p>
             <a:pPr>
               <a:spcAft>
-                <a:spcPts val="600"/>
+                <a:spcPts val="800"/>
               </a:spcAft>
-              <a:defRPr sz="1400">
+              <a:defRPr sz="1800">
                 <a:solidFill>
                   <a:srgbClr val="333333"/>
                 </a:solidFill>
@@ -6552,9 +6555,9 @@
           <a:p>
             <a:pPr>
               <a:spcAft>
-                <a:spcPts val="600"/>
+                <a:spcPts val="800"/>
               </a:spcAft>
-              <a:defRPr sz="1400" b="1">
+              <a:defRPr sz="1800" b="1">
                 <a:solidFill>
                   <a:srgbClr val="5A2030"/>
                 </a:solidFill>
@@ -6567,9 +6570,9 @@
           <a:p>
             <a:pPr lvl="1">
               <a:spcAft>
-                <a:spcPts val="600"/>
+                <a:spcPts val="800"/>
               </a:spcAft>
-              <a:defRPr sz="1200">
+              <a:defRPr sz="1600">
                 <a:solidFill>
                   <a:srgbClr val="333333"/>
                 </a:solidFill>
@@ -6582,9 +6585,9 @@
           <a:p>
             <a:pPr>
               <a:spcAft>
-                <a:spcPts val="600"/>
+                <a:spcPts val="800"/>
               </a:spcAft>
-              <a:defRPr sz="1400">
+              <a:defRPr sz="1800">
                 <a:solidFill>
                   <a:srgbClr val="333333"/>
                 </a:solidFill>
@@ -6594,9 +6597,9 @@
           <a:p>
             <a:pPr>
               <a:spcAft>
-                <a:spcPts val="600"/>
+                <a:spcPts val="800"/>
               </a:spcAft>
-              <a:defRPr sz="1400" b="1">
+              <a:defRPr sz="1800" b="1">
                 <a:solidFill>
                   <a:srgbClr val="5A2030"/>
                 </a:solidFill>
@@ -6609,9 +6612,9 @@
           <a:p>
             <a:pPr lvl="1">
               <a:spcAft>
-                <a:spcPts val="600"/>
+                <a:spcPts val="800"/>
               </a:spcAft>
-              <a:defRPr sz="1200">
+              <a:defRPr sz="1600">
                 <a:solidFill>
                   <a:srgbClr val="333333"/>
                 </a:solidFill>
@@ -6624,9 +6627,9 @@
           <a:p>
             <a:pPr>
               <a:spcAft>
-                <a:spcPts val="600"/>
+                <a:spcPts val="800"/>
               </a:spcAft>
-              <a:defRPr sz="1400">
+              <a:defRPr sz="1800">
                 <a:solidFill>
                   <a:srgbClr val="333333"/>
                 </a:solidFill>
@@ -6636,9 +6639,9 @@
           <a:p>
             <a:pPr>
               <a:spcAft>
-                <a:spcPts val="600"/>
+                <a:spcPts val="800"/>
               </a:spcAft>
-              <a:defRPr sz="1400" b="1">
+              <a:defRPr sz="1800" b="1">
                 <a:solidFill>
                   <a:srgbClr val="5A2030"/>
                 </a:solidFill>
@@ -6651,9 +6654,9 @@
           <a:p>
             <a:pPr lvl="1">
               <a:spcAft>
-                <a:spcPts val="600"/>
+                <a:spcPts val="800"/>
               </a:spcAft>
-              <a:defRPr sz="1200">
+              <a:defRPr sz="1600">
                 <a:solidFill>
                   <a:srgbClr val="333333"/>
                 </a:solidFill>
@@ -6666,7 +6669,7 @@
           <a:p/>
           <a:p>
             <a:pPr>
-              <a:defRPr sz="1100" i="1">
+              <a:defRPr sz="1400" i="1">
                 <a:solidFill>
                   <a:srgbClr val="888888"/>
                 </a:solidFill>
